--- a/Planning docs/Slides/lesson-1-2-teacher-slides.pptx
+++ b/Planning docs/Slides/lesson-1-2-teacher-slides.pptx
@@ -20,9 +20,10 @@
     <p:sldId id="268" r:id="rId14"/>
     <p:sldId id="269" r:id="rId15"/>
     <p:sldId id="270" r:id="rId16"/>
+    <p:sldId id="271" r:id="rId17"/>
   </p:sldIdLst>
   <p:notesMasterIdLst>
-    <p:notesMasterId r:id="rId17"/>
+    <p:notesMasterId r:id="rId18"/>
   </p:notesMasterIdLst>
   <p:sldSz cx="9144000" cy="5143500"/>
   <p:notesSz cx="5143500" cy="9144000"/>
@@ -516,7 +517,7 @@
           <a:p>
             <a:r>
               <a:rPr lang="en-US" dirty="0"/>
-              <a:t>Title slide for Week 1 Day 2. Launch Week.</a:t>
+              <a:t>Lesson 1.2. Reading: Chapter 1.</a:t>
             </a:r>
             <a:endParaRPr lang="en-US" dirty="0"/>
           </a:p>
@@ -604,7 +605,7 @@
           <a:p>
             <a:r>
               <a:rPr lang="en-US" dirty="0"/>
-              <a:t>Review morphology focus. Have students identify the base word and affix in each example.</a:t>
+              <a:t>Each word appears in the chapters read this week, in the author’s own sentence.</a:t>
             </a:r>
             <a:endParaRPr lang="en-US" dirty="0"/>
           </a:p>
@@ -692,7 +693,7 @@
           <a:p>
             <a:r>
               <a:rPr lang="en-US" dirty="0"/>
-              <a:t>Go through each vocabulary word. For flip cards, have students guess the definition before revealing.</a:t>
+              <a:t>Answers: Flat and half an inch thick., The doctor in his office., A kite in the park., Arthur with the bicycle pump.</a:t>
             </a:r>
             <a:endParaRPr lang="en-US" dirty="0"/>
           </a:p>
@@ -780,7 +781,7 @@
           <a:p>
             <a:r>
               <a:rPr lang="en-US" dirty="0"/>
-              <a:t>Give students time to sort the words. Use the chat or paper to organize.</a:t>
+              <a:t>Answers: Flat and half an inch thick., The doctor in his office., A kite in the park., Arthur with the bicycle pump.</a:t>
             </a:r>
             <a:endParaRPr lang="en-US" dirty="0"/>
           </a:p>
@@ -868,7 +869,7 @@
           <a:p>
             <a:r>
               <a:rPr lang="en-US" dirty="0"/>
-              <a:t>Review each column. Ask: what pattern do you see in each group?</a:t>
+              <a:t>closed: flat, bed, not, bump | not closed: wake, home, like, huge</a:t>
             </a:r>
             <a:endParaRPr lang="en-US" dirty="0"/>
           </a:p>
@@ -956,7 +957,7 @@
           <a:p>
             <a:r>
               <a:rPr lang="en-US" dirty="0"/>
-              <a:t>Reading focus slide. Use pause-and-think questions during reading. Copywork can be done after reading.</a:t>
+              <a:t>closed: flat, bed, not, bump | not closed: wake, home, like, huge</a:t>
             </a:r>
             <a:endParaRPr lang="en-US" dirty="0"/>
           </a:p>
@@ -1044,7 +1045,7 @@
           <a:p>
             <a:r>
               <a:rPr lang="en-US" dirty="0"/>
-              <a:t>Transition to the writing workshop assignment in Canvas.</a:t>
+              <a:t>Read the chapters, then return to the pause questions.</a:t>
             </a:r>
             <a:endParaRPr lang="en-US" dirty="0"/>
           </a:p>
@@ -1068,6 +1069,94 @@
             <a:fld id="{F7021451-1387-4CA6-816F-3879F97B5CBC}" type="slidenum">
               <a:rPr lang="en-US"/>
               <a:t>15</a:t>
+            </a:fld>
+            <a:endParaRPr lang="en-US"/>
+          </a:p>
+        </p:txBody>
+      </p:sp>
+    </p:spTree>
+    <p:extLst>
+      <p:ext uri="{BB962C8B-B14F-4D97-AF65-F5344CB8AC3E}">
+        <p14:creationId xmlns:p14="http://schemas.microsoft.com/office/powerpoint/2010/main" val="1024086991"/>
+      </p:ext>
+    </p:extLst>
+  </p:cSld>
+  <p:clrMapOvr>
+    <a:masterClrMapping/>
+  </p:clrMapOvr>
+</p:notes>
+</file>
+
+<file path=ppt/notesSlides/notesSlide16.xml><?xml version="1.0" encoding="utf-8"?>
+<p:notes xmlns:a="http://schemas.openxmlformats.org/drawingml/2006/main" xmlns:r="http://schemas.openxmlformats.org/officeDocument/2006/relationships" xmlns:p="http://schemas.openxmlformats.org/presentationml/2006/main">
+  <p:cSld>
+    <p:spTree>
+      <p:nvGrpSpPr>
+        <p:cNvPr id="1" name=""/>
+        <p:cNvGrpSpPr/>
+        <p:nvPr/>
+      </p:nvGrpSpPr>
+      <p:grpSpPr>
+        <a:xfrm>
+          <a:off x="0" y="0"/>
+          <a:ext cx="0" cy="0"/>
+          <a:chOff x="0" y="0"/>
+          <a:chExt cx="0" cy="0"/>
+        </a:xfrm>
+      </p:grpSpPr>
+      <p:sp>
+        <p:nvSpPr>
+          <p:cNvPr id="2" name="Slide Image Placeholder 1"/>
+          <p:cNvSpPr>
+            <a:spLocks noGrp="1" noRot="1" noChangeAspect="1"/>
+          </p:cNvSpPr>
+          <p:nvPr>
+            <p:ph type="sldImg"/>
+          </p:nvPr>
+        </p:nvSpPr>
+        <p:spPr/>
+      </p:sp>
+      <p:sp>
+        <p:nvSpPr>
+          <p:cNvPr id="3" name="Notes Placeholder 2"/>
+          <p:cNvSpPr>
+            <a:spLocks noGrp="1"/>
+          </p:cNvSpPr>
+          <p:nvPr>
+            <p:ph type="body" idx="1"/>
+          </p:nvPr>
+        </p:nvSpPr>
+        <p:spPr/>
+        <p:txBody>
+          <a:bodyPr/>
+          <a:lstStyle/>
+          <a:p>
+            <a:r>
+              <a:rPr lang="en-US" dirty="0"/>
+              <a:t>Writer’s Workshop stage for the week.</a:t>
+            </a:r>
+            <a:endParaRPr lang="en-US" dirty="0"/>
+          </a:p>
+        </p:txBody>
+      </p:sp>
+      <p:sp>
+        <p:nvSpPr>
+          <p:cNvPr id="4" name="Slide Number Placeholder 3"/>
+          <p:cNvSpPr>
+            <a:spLocks noGrp="1"/>
+          </p:cNvSpPr>
+          <p:nvPr>
+            <p:ph type="sldNum" sz="quarter" idx="10"/>
+          </p:nvPr>
+        </p:nvSpPr>
+        <p:spPr/>
+        <p:txBody>
+          <a:bodyPr/>
+          <a:lstStyle/>
+          <a:p>
+            <a:fld id="{F7021451-1387-4CA6-816F-3879F97B5CBC}" type="slidenum">
+              <a:rPr lang="en-US"/>
+              <a:t>16</a:t>
             </a:fld>
             <a:endParaRPr lang="en-US"/>
           </a:p>
@@ -1132,7 +1221,7 @@
           <a:p>
             <a:r>
               <a:rPr lang="en-US" dirty="0"/>
-              <a:t>Read the prompt aloud once. Give students about 1 minute to read it again silently and think. Remind them: there is no wrong answer — just write what comes to mind. Advance to the writing slide when ready.</a:t>
+              <a:t>Read the prompt aloud. Give students a moment to think before writing.</a:t>
             </a:r>
             <a:endParaRPr lang="en-US" dirty="0"/>
           </a:p>
@@ -1220,7 +1309,7 @@
           <a:p>
             <a:r>
               <a:rPr lang="en-US" dirty="0"/>
-              <a:t>Set a 5-minute timer. Walk the room quietly. If a student stops, gently encourage them: "Keep writing — even one more sentence." The goal is sustained writing, not perfection. Do not interrupt to correct spelling or grammar during this time.</a:t>
+              <a:t>Five minutes of sustained writing. Stamina over polish. Do not correct spelling now.</a:t>
             </a:r>
             <a:endParaRPr lang="en-US" dirty="0"/>
           </a:p>
@@ -1308,7 +1397,7 @@
           <a:p>
             <a:r>
               <a:rPr lang="en-US" dirty="0"/>
-              <a:t>Set a 1-minute timer. Remind students: we are only fixing ONE thing today — Did I include how I felt, not just what happened?. They should also do a quick conventions check (capitals, punctuation, spelling). They do NOT need to rewrite — just fix and improve. Revision = improving ideas; Editing = fixing conventions. Keep them separate in your language.</a:t>
+              <a:t>One fix only. Editing is conventions; revision is ideas. Name which one you are asking for.</a:t>
             </a:r>
             <a:endParaRPr lang="en-US" dirty="0"/>
           </a:p>
@@ -1396,7 +1485,7 @@
           <a:p>
             <a:r>
               <a:rPr lang="en-US" dirty="0"/>
-              <a:t>Call on 3-5 students to share. Respond with genuine interest: "I love how you described that" or "That's a really interesting idea." Avoid correcting grammar or spelling during share time — this is about celebrating writing. If time is short, have 2-3 students share in chat instead.</a:t>
+              <a:t>Two or three volunteers. Praise something specific in each.</a:t>
             </a:r>
             <a:endParaRPr lang="en-US" dirty="0"/>
           </a:p>
@@ -1484,7 +1573,7 @@
           <a:p>
             <a:r>
               <a:rPr lang="en-US" dirty="0"/>
-              <a:t>Review the big question and reading lens with students before reading.</a:t>
+              <a:t>Reading lens: Good readers preview a text and ask questions before they read. Today, practice this skill with Chapter 1:</a:t>
             </a:r>
             <a:endParaRPr lang="en-US" dirty="0"/>
           </a:p>
@@ -1572,7 +1661,8 @@
           <a:p>
             <a:r>
               <a:rPr lang="en-US" dirty="0"/>
-              <a:t>Read the model sentence aloud. Ask students: what do you notice about the punctuation and capitalization?</a:t>
+              <a:t>Corrected: Corrected: 
+Look for: “Gosh!” said Arthur when he saw his brother flat as a pancake under the big board .</a:t>
             </a:r>
             <a:endParaRPr lang="en-US" dirty="0"/>
           </a:p>
@@ -1660,7 +1750,8 @@
           <a:p>
             <a:r>
               <a:rPr lang="en-US" dirty="0"/>
-              <a:t>Give students 1-2 minutes to fix the sentence. Walk the room and check.</a:t>
+              <a:t>Corrected: Corrected: 
+Look for: “Gosh!” said Arthur when he saw his brother flat as a pancake under the big board .</a:t>
             </a:r>
             <a:endParaRPr lang="en-US" dirty="0"/>
           </a:p>
@@ -1748,7 +1839,7 @@
           <a:p>
             <a:r>
               <a:rPr lang="en-US" dirty="0"/>
-              <a:t>Reveal the corrected version. Point out each fix: capitalization, punctuation, spelling.</a:t>
+              <a:t>Break the word into base + word part. Ask what the part adds to the meaning.</a:t>
             </a:r>
             <a:endParaRPr lang="en-US" dirty="0"/>
           </a:p>
@@ -2129,8 +2220,8 @@
         </p:nvSpPr>
         <p:spPr>
           <a:xfrm>
-            <a:off x="457200" y="914400"/>
-            <a:ext cx="8229600" cy="1097280"/>
+            <a:off x="0" y="822960"/>
+            <a:ext cx="9144000" cy="822960"/>
           </a:xfrm>
           <a:prstGeom prst="rect">
             <a:avLst/>
@@ -2146,7 +2237,43 @@
               <a:buNone/>
             </a:pPr>
             <a:r>
-              <a:rPr lang="en-US" sz="4000" b="1" dirty="0">
+              <a:rPr lang="en-US" sz="5200" dirty="0">
+                <a:solidFill>
+                  <a:srgbClr val="000000"/>
+                </a:solidFill>
+              </a:rPr>
+              <a:t>🌟</a:t>
+            </a:r>
+            <a:endParaRPr lang="en-US" sz="5200" dirty="0"/>
+          </a:p>
+        </p:txBody>
+      </p:sp>
+      <p:sp>
+        <p:nvSpPr>
+          <p:cNvPr id="3" name="Text 1"/>
+          <p:cNvSpPr/>
+          <p:nvPr/>
+        </p:nvSpPr>
+        <p:spPr>
+          <a:xfrm>
+            <a:off x="457200" y="1691640"/>
+            <a:ext cx="8229600" cy="566928"/>
+          </a:xfrm>
+          <a:prstGeom prst="rect">
+            <a:avLst/>
+          </a:prstGeom>
+          <a:noFill/>
+          <a:ln/>
+        </p:spPr>
+        <p:txBody>
+          <a:bodyPr wrap="square" lIns="0" tIns="0" rIns="0" bIns="0" rtlCol="0" anchor="ctr"/>
+          <a:lstStyle/>
+          <a:p>
+            <a:pPr algn="ctr" indent="0" marL="0">
+              <a:buNone/>
+            </a:pPr>
+            <a:r>
+              <a:rPr lang="en-US" sz="3400" b="1" dirty="0">
                 <a:solidFill>
                   <a:srgbClr val="FFFFFF"/>
                 </a:solidFill>
@@ -2154,22 +2281,22 @@
                 <a:ea typeface="Calibri" pitchFamily="34" charset="-122"/>
                 <a:cs typeface="Calibri" pitchFamily="34" charset="-120"/>
               </a:rPr>
-              <a:t>🚀  Week 1 · Day 2</a:t>
-            </a:r>
-            <a:endParaRPr lang="en-US" sz="4000" dirty="0"/>
-          </a:p>
-        </p:txBody>
-      </p:sp>
-      <p:sp>
-        <p:nvSpPr>
-          <p:cNvPr id="3" name="Text 1"/>
-          <p:cNvSpPr/>
-          <p:nvPr/>
-        </p:nvSpPr>
-        <p:spPr>
-          <a:xfrm>
-            <a:off x="457200" y="2103120"/>
-            <a:ext cx="8229600" cy="731520"/>
+              <a:t>Launch: Reading Routines</a:t>
+            </a:r>
+            <a:endParaRPr lang="en-US" sz="3400" dirty="0"/>
+          </a:p>
+        </p:txBody>
+      </p:sp>
+      <p:sp>
+        <p:nvSpPr>
+          <p:cNvPr id="4" name="Text 2"/>
+          <p:cNvSpPr/>
+          <p:nvPr/>
+        </p:nvSpPr>
+        <p:spPr>
+          <a:xfrm>
+            <a:off x="457200" y="2331720"/>
+            <a:ext cx="8229600" cy="411480"/>
           </a:xfrm>
           <a:prstGeom prst="rect">
             <a:avLst/>
@@ -2185,7 +2312,7 @@
               <a:buNone/>
             </a:pPr>
             <a:r>
-              <a:rPr lang="en-US" sz="1800" dirty="0">
+              <a:rPr lang="en-US" sz="2000" dirty="0">
                 <a:solidFill>
                   <a:srgbClr val="55C8E8"/>
                 </a:solidFill>
@@ -2193,22 +2320,22 @@
                 <a:ea typeface="Calibri" pitchFamily="34" charset="-122"/>
                 <a:cs typeface="Calibri" pitchFamily="34" charset="-120"/>
               </a:rPr>
-              <a:t>Launch Week — Lesson 1.2</a:t>
-            </a:r>
-            <a:endParaRPr lang="en-US" sz="1800" dirty="0"/>
-          </a:p>
-        </p:txBody>
-      </p:sp>
-      <p:sp>
-        <p:nvSpPr>
-          <p:cNvPr id="4" name="Text 2"/>
-          <p:cNvSpPr/>
-          <p:nvPr/>
-        </p:nvSpPr>
-        <p:spPr>
-          <a:xfrm>
-            <a:off x="457200" y="4114800"/>
-            <a:ext cx="8229600" cy="457200"/>
+              <a:t>Lesson 1.2  ·  Chapter 1</a:t>
+            </a:r>
+            <a:endParaRPr lang="en-US" sz="2000" dirty="0"/>
+          </a:p>
+        </p:txBody>
+      </p:sp>
+      <p:sp>
+        <p:nvSpPr>
+          <p:cNvPr id="5" name="Text 3"/>
+          <p:cNvSpPr/>
+          <p:nvPr/>
+        </p:nvSpPr>
+        <p:spPr>
+          <a:xfrm>
+            <a:off x="457200" y="2880360"/>
+            <a:ext cx="8229600" cy="320040"/>
           </a:xfrm>
           <a:prstGeom prst="rect">
             <a:avLst/>
@@ -2224,17 +2351,17 @@
               <a:buNone/>
             </a:pPr>
             <a:r>
-              <a:rPr lang="en-US" sz="1300" dirty="0">
-                <a:solidFill>
-                  <a:srgbClr val="AAAAAA"/>
-                </a:solidFill>
-                <a:latin typeface="Calibri" pitchFamily="34" charset="0"/>
-                <a:ea typeface="Calibri" pitchFamily="34" charset="-122"/>
-                <a:cs typeface="Calibri" pitchFamily="34" charset="-120"/>
-              </a:rPr>
-              <a:t>Optima Academy Online · 3rd Grade ELA</a:t>
-            </a:r>
-            <a:endParaRPr lang="en-US" sz="1300" dirty="0"/>
+              <a:rPr lang="en-US" sz="1400" dirty="0">
+                <a:solidFill>
+                  <a:srgbClr val="C9BCE4"/>
+                </a:solidFill>
+                <a:latin typeface="Calibri" pitchFamily="34" charset="0"/>
+                <a:ea typeface="Calibri" pitchFamily="34" charset="-122"/>
+                <a:cs typeface="Calibri" pitchFamily="34" charset="-120"/>
+              </a:rPr>
+              <a:t>Grade 3 ELA  ·  Virtue: Curiosity</a:t>
+            </a:r>
+            <a:endParaRPr lang="en-US" sz="1400" dirty="0"/>
           </a:p>
         </p:txBody>
       </p:sp>
@@ -2272,65 +2399,62 @@
       </p:grpSpPr>
       <p:sp>
         <p:nvSpPr>
-          <p:cNvPr id="2" name="Text 0"/>
-          <p:cNvSpPr/>
-          <p:nvPr/>
-        </p:nvSpPr>
-        <p:spPr>
-          <a:xfrm>
-            <a:off x="365760" y="164592"/>
-            <a:ext cx="8412480" cy="566928"/>
-          </a:xfrm>
-          <a:prstGeom prst="rect">
-            <a:avLst/>
-          </a:prstGeom>
-          <a:noFill/>
-          <a:ln/>
-        </p:spPr>
-        <p:txBody>
-          <a:bodyPr wrap="square" lIns="0" tIns="0" rIns="0" bIns="0" rtlCol="0" anchor="ctr"/>
-          <a:lstStyle/>
-          <a:p>
-            <a:pPr algn="l" indent="0" marL="0">
-              <a:buNone/>
-            </a:pPr>
-            <a:r>
-              <a:rPr lang="en-US" sz="2800" b="1" dirty="0">
-                <a:solidFill>
-                  <a:srgbClr val="0E1C42"/>
-                </a:solidFill>
-                <a:latin typeface="Calibri" pitchFamily="34" charset="0"/>
-                <a:ea typeface="Calibri" pitchFamily="34" charset="-122"/>
-                <a:cs typeface="Calibri" pitchFamily="34" charset="-120"/>
-              </a:rPr>
-              <a:t>🌱 Morphology: What is a base word?</a:t>
-            </a:r>
-            <a:endParaRPr lang="en-US" sz="2800" dirty="0"/>
-          </a:p>
-        </p:txBody>
-      </p:sp>
-      <p:sp>
-        <p:nvSpPr>
-          <p:cNvPr id="3" name="Shape 1"/>
-          <p:cNvSpPr/>
-          <p:nvPr/>
-        </p:nvSpPr>
-        <p:spPr>
-          <a:xfrm>
-            <a:off x="365760" y="749808"/>
-            <a:ext cx="8412480" cy="0"/>
-          </a:xfrm>
-          <a:prstGeom prst="line">
-            <a:avLst/>
-          </a:prstGeom>
-          <a:noFill/>
-          <a:ln w="19050">
-            <a:solidFill>
-              <a:srgbClr val="8B6FC0"/>
-            </a:solidFill>
-            <a:prstDash val="solid"/>
-          </a:ln>
-        </p:spPr>
+          <p:cNvPr id="2" name="Shape 0"/>
+          <p:cNvSpPr/>
+          <p:nvPr/>
+        </p:nvSpPr>
+        <p:spPr>
+          <a:xfrm>
+            <a:off x="0" y="0"/>
+            <a:ext cx="9144000" cy="566928"/>
+          </a:xfrm>
+          <a:prstGeom prst="rect">
+            <a:avLst/>
+          </a:prstGeom>
+          <a:solidFill>
+            <a:srgbClr val="55C8E8"/>
+          </a:solidFill>
+          <a:ln/>
+        </p:spPr>
+      </p:sp>
+      <p:sp>
+        <p:nvSpPr>
+          <p:cNvPr id="3" name="Text 1"/>
+          <p:cNvSpPr/>
+          <p:nvPr/>
+        </p:nvSpPr>
+        <p:spPr>
+          <a:xfrm>
+            <a:off x="365760" y="54864"/>
+            <a:ext cx="8412480" cy="457200"/>
+          </a:xfrm>
+          <a:prstGeom prst="rect">
+            <a:avLst/>
+          </a:prstGeom>
+          <a:noFill/>
+          <a:ln/>
+        </p:spPr>
+        <p:txBody>
+          <a:bodyPr wrap="square" lIns="0" tIns="0" rIns="0" bIns="0" rtlCol="0" anchor="ctr"/>
+          <a:lstStyle/>
+          <a:p>
+            <a:pPr indent="0" marL="0">
+              <a:buNone/>
+            </a:pPr>
+            <a:r>
+              <a:rPr lang="en-US" sz="2200" b="1" dirty="0">
+                <a:solidFill>
+                  <a:srgbClr val="FFFFFF"/>
+                </a:solidFill>
+                <a:latin typeface="Calibri" pitchFamily="34" charset="0"/>
+                <a:ea typeface="Calibri" pitchFamily="34" charset="-122"/>
+                <a:cs typeface="Calibri" pitchFamily="34" charset="-120"/>
+              </a:rPr>
+              <a:t>🔤  Vocabulary</a:t>
+            </a:r>
+            <a:endParaRPr lang="en-US" sz="2200" dirty="0"/>
+          </a:p>
+        </p:txBody>
       </p:sp>
       <p:sp>
         <p:nvSpPr>
@@ -2340,32 +2464,32 @@
         </p:nvSpPr>
         <p:spPr>
           <a:xfrm>
-            <a:off x="457200" y="1005840"/>
-            <a:ext cx="8046720" cy="292608"/>
-          </a:xfrm>
-          <a:prstGeom prst="rect">
-            <a:avLst/>
-          </a:prstGeom>
-          <a:noFill/>
-          <a:ln/>
-        </p:spPr>
-        <p:txBody>
-          <a:bodyPr wrap="square" lIns="0" tIns="0" rIns="0" bIns="0" rtlCol="0" anchor="ctr"/>
-          <a:lstStyle/>
-          <a:p>
-            <a:pPr indent="0" marL="0">
-              <a:buNone/>
-            </a:pPr>
-            <a:r>
-              <a:rPr lang="en-US" sz="1100" b="1" spc="200" kern="0" dirty="0">
-                <a:solidFill>
-                  <a:srgbClr val="8B6FC0"/>
-                </a:solidFill>
-                <a:latin typeface="Calibri" pitchFamily="34" charset="0"/>
-                <a:ea typeface="Calibri" pitchFamily="34" charset="-122"/>
-                <a:cs typeface="Calibri" pitchFamily="34" charset="-120"/>
-              </a:rPr>
-              <a:t>MATCH THE WORDS</a:t>
+            <a:off x="365760" y="804672"/>
+            <a:ext cx="8229600" cy="237744"/>
+          </a:xfrm>
+          <a:prstGeom prst="rect">
+            <a:avLst/>
+          </a:prstGeom>
+          <a:noFill/>
+          <a:ln/>
+        </p:spPr>
+        <p:txBody>
+          <a:bodyPr wrap="square" lIns="0" tIns="0" rIns="0" bIns="0" rtlCol="0" anchor="ctr"/>
+          <a:lstStyle/>
+          <a:p>
+            <a:pPr indent="0" marL="0">
+              <a:buNone/>
+            </a:pPr>
+            <a:r>
+              <a:rPr lang="en-US" sz="1100" b="1" spc="100" kern="0" dirty="0">
+                <a:solidFill>
+                  <a:srgbClr val="55C8E8"/>
+                </a:solidFill>
+                <a:latin typeface="Calibri" pitchFamily="34" charset="0"/>
+                <a:ea typeface="Calibri" pitchFamily="34" charset="-122"/>
+                <a:cs typeface="Calibri" pitchFamily="34" charset="-120"/>
+              </a:rPr>
+              <a:t>THIS WEEK'S WORDS</a:t>
             </a:r>
             <a:endParaRPr lang="en-US" sz="1100" dirty="0"/>
           </a:p>
@@ -2379,16 +2503,16 @@
         </p:nvSpPr>
         <p:spPr>
           <a:xfrm>
-            <a:off x="457200" y="1371600"/>
-            <a:ext cx="8229600" cy="411480"/>
+            <a:off x="365760" y="1097280"/>
+            <a:ext cx="8412480" cy="658368"/>
           </a:xfrm>
           <a:prstGeom prst="roundRect">
             <a:avLst>
-              <a:gd name="adj" fmla="val 22222"/>
+              <a:gd name="adj" fmla="val 13889"/>
             </a:avLst>
           </a:prstGeom>
           <a:solidFill>
-            <a:srgbClr val="F0E8FF"/>
+            <a:srgbClr val="E5F7FC"/>
           </a:solidFill>
           <a:ln/>
           <a:effectLst>
@@ -2408,24 +2532,38 @@
         </p:nvSpPr>
         <p:spPr>
           <a:xfrm>
-            <a:off x="640080" y="1417320"/>
-            <a:ext cx="7863840" cy="320040"/>
-          </a:xfrm>
-          <a:prstGeom prst="rect">
-            <a:avLst/>
-          </a:prstGeom>
-          <a:noFill/>
-          <a:ln/>
-        </p:spPr>
-        <p:txBody>
-          <a:bodyPr wrap="square" lIns="0" tIns="0" rIns="0" bIns="0" rtlCol="0" anchor="ctr"/>
-          <a:lstStyle/>
-          <a:p>
-            <a:pPr indent="0" marL="0">
-              <a:buNone/>
-            </a:pPr>
-            <a:r>
-              <a:rPr lang="en-US" sz="1500" dirty="0">
+            <a:off x="594360" y="1225296"/>
+            <a:ext cx="7863840" cy="420624"/>
+          </a:xfrm>
+          <a:prstGeom prst="rect">
+            <a:avLst/>
+          </a:prstGeom>
+          <a:noFill/>
+          <a:ln/>
+        </p:spPr>
+        <p:txBody>
+          <a:bodyPr wrap="square" lIns="0" tIns="0" rIns="0" bIns="0" rtlCol="0" anchor="ctr"/>
+          <a:lstStyle/>
+          <a:p>
+            <a:pPr indent="0" marL="0">
+              <a:buNone/>
+            </a:pPr>
+            <a:r>
+              <a:rPr lang="en-US" sz="1700" b="1" dirty="0">
+                <a:solidFill>
+                  <a:srgbClr val="0E1C42"/>
+                </a:solidFill>
+                <a:latin typeface="Calibri" pitchFamily="34" charset="0"/>
+                <a:ea typeface="Calibri" pitchFamily="34" charset="-122"/>
+                <a:cs typeface="Calibri" pitchFamily="34" charset="-120"/>
+              </a:rPr>
+              <a:t>enormous  </a:t>
+            </a:r>
+            <a:pPr indent="0" marL="0">
+              <a:buNone/>
+            </a:pPr>
+            <a:r>
+              <a:rPr lang="en-US" sz="1400" dirty="0">
                 <a:solidFill>
                   <a:srgbClr val="1E293B"/>
                 </a:solidFill>
@@ -2433,9 +2571,9 @@
                 <a:ea typeface="Calibri" pitchFamily="34" charset="-122"/>
                 <a:cs typeface="Calibri" pitchFamily="34" charset="-120"/>
               </a:rPr>
-              <a:t>playing → play</a:t>
-            </a:r>
-            <a:endParaRPr lang="en-US" sz="1500" dirty="0"/>
+              <a:t>Looked at very carefully, especially by a doctor.</a:t>
+            </a:r>
+            <a:endParaRPr lang="en-US" sz="1700" dirty="0"/>
           </a:p>
         </p:txBody>
       </p:sp>
@@ -2447,16 +2585,16 @@
         </p:nvSpPr>
         <p:spPr>
           <a:xfrm>
-            <a:off x="457200" y="1847088"/>
-            <a:ext cx="8229600" cy="411480"/>
+            <a:off x="365760" y="1828800"/>
+            <a:ext cx="8412480" cy="658368"/>
           </a:xfrm>
           <a:prstGeom prst="roundRect">
             <a:avLst>
-              <a:gd name="adj" fmla="val 22222"/>
+              <a:gd name="adj" fmla="val 13889"/>
             </a:avLst>
           </a:prstGeom>
           <a:solidFill>
-            <a:srgbClr val="F0E8FF"/>
+            <a:srgbClr val="FFFFFF"/>
           </a:solidFill>
           <a:ln/>
           <a:effectLst>
@@ -2476,24 +2614,38 @@
         </p:nvSpPr>
         <p:spPr>
           <a:xfrm>
-            <a:off x="640080" y="1892808"/>
-            <a:ext cx="7863840" cy="320040"/>
-          </a:xfrm>
-          <a:prstGeom prst="rect">
-            <a:avLst/>
-          </a:prstGeom>
-          <a:noFill/>
-          <a:ln/>
-        </p:spPr>
-        <p:txBody>
-          <a:bodyPr wrap="square" lIns="0" tIns="0" rIns="0" bIns="0" rtlCol="0" anchor="ctr"/>
-          <a:lstStyle/>
-          <a:p>
-            <a:pPr indent="0" marL="0">
-              <a:buNone/>
-            </a:pPr>
-            <a:r>
-              <a:rPr lang="en-US" sz="1500" dirty="0">
+            <a:off x="594360" y="1956816"/>
+            <a:ext cx="7863840" cy="420624"/>
+          </a:xfrm>
+          <a:prstGeom prst="rect">
+            <a:avLst/>
+          </a:prstGeom>
+          <a:noFill/>
+          <a:ln/>
+        </p:spPr>
+        <p:txBody>
+          <a:bodyPr wrap="square" lIns="0" tIns="0" rIns="0" bIns="0" rtlCol="0" anchor="ctr"/>
+          <a:lstStyle/>
+          <a:p>
+            <a:pPr indent="0" marL="0">
+              <a:buNone/>
+            </a:pPr>
+            <a:r>
+              <a:rPr lang="en-US" sz="1700" b="1" dirty="0">
+                <a:solidFill>
+                  <a:srgbClr val="0E1C42"/>
+                </a:solidFill>
+                <a:latin typeface="Calibri" pitchFamily="34" charset="0"/>
+                <a:ea typeface="Calibri" pitchFamily="34" charset="-122"/>
+                <a:cs typeface="Calibri" pitchFamily="34" charset="-120"/>
+              </a:rPr>
+              <a:t>marvel  </a:t>
+            </a:r>
+            <a:pPr indent="0" marL="0">
+              <a:buNone/>
+            </a:pPr>
+            <a:r>
+              <a:rPr lang="en-US" sz="1400" dirty="0">
                 <a:solidFill>
                   <a:srgbClr val="1E293B"/>
                 </a:solidFill>
@@ -2501,9 +2653,9 @@
                 <a:ea typeface="Calibri" pitchFamily="34" charset="-122"/>
                 <a:cs typeface="Calibri" pitchFamily="34" charset="-120"/>
               </a:rPr>
-              <a:t>unhappy → happy</a:t>
-            </a:r>
-            <a:endParaRPr lang="en-US" sz="1500" dirty="0"/>
+              <a:t>A board where you pin up messages and pictures.</a:t>
+            </a:r>
+            <a:endParaRPr lang="en-US" sz="1700" dirty="0"/>
           </a:p>
         </p:txBody>
       </p:sp>
@@ -2515,16 +2667,16 @@
         </p:nvSpPr>
         <p:spPr>
           <a:xfrm>
-            <a:off x="457200" y="2322576"/>
-            <a:ext cx="8229600" cy="411480"/>
+            <a:off x="365760" y="2560320"/>
+            <a:ext cx="8412480" cy="658368"/>
           </a:xfrm>
           <a:prstGeom prst="roundRect">
             <a:avLst>
-              <a:gd name="adj" fmla="val 22222"/>
+              <a:gd name="adj" fmla="val 13889"/>
             </a:avLst>
           </a:prstGeom>
           <a:solidFill>
-            <a:srgbClr val="F0E8FF"/>
+            <a:srgbClr val="E5F7FC"/>
           </a:solidFill>
           <a:ln/>
           <a:effectLst>
@@ -2544,24 +2696,38 @@
         </p:nvSpPr>
         <p:spPr>
           <a:xfrm>
-            <a:off x="640080" y="2368296"/>
-            <a:ext cx="7863840" cy="320040"/>
-          </a:xfrm>
-          <a:prstGeom prst="rect">
-            <a:avLst/>
-          </a:prstGeom>
-          <a:noFill/>
-          <a:ln/>
-        </p:spPr>
-        <p:txBody>
-          <a:bodyPr wrap="square" lIns="0" tIns="0" rIns="0" bIns="0" rtlCol="0" anchor="ctr"/>
-          <a:lstStyle/>
-          <a:p>
-            <a:pPr indent="0" marL="0">
-              <a:buNone/>
-            </a:pPr>
-            <a:r>
-              <a:rPr lang="en-US" sz="1500" dirty="0">
+            <a:off x="594360" y="2688336"/>
+            <a:ext cx="7863840" cy="420624"/>
+          </a:xfrm>
+          <a:prstGeom prst="rect">
+            <a:avLst/>
+          </a:prstGeom>
+          <a:noFill/>
+          <a:ln/>
+        </p:spPr>
+        <p:txBody>
+          <a:bodyPr wrap="square" lIns="0" tIns="0" rIns="0" bIns="0" rtlCol="0" anchor="ctr"/>
+          <a:lstStyle/>
+          <a:p>
+            <a:pPr indent="0" marL="0">
+              <a:buNone/>
+            </a:pPr>
+            <a:r>
+              <a:rPr lang="en-US" sz="1700" b="1" dirty="0">
+                <a:solidFill>
+                  <a:srgbClr val="0E1C42"/>
+                </a:solidFill>
+                <a:latin typeface="Calibri" pitchFamily="34" charset="0"/>
+                <a:ea typeface="Calibri" pitchFamily="34" charset="-122"/>
+                <a:cs typeface="Calibri" pitchFamily="34" charset="-120"/>
+              </a:rPr>
+              <a:t>bulletin  </a:t>
+            </a:r>
+            <a:pPr indent="0" marL="0">
+              <a:buNone/>
+            </a:pPr>
+            <a:r>
+              <a:rPr lang="en-US" sz="1400" dirty="0">
                 <a:solidFill>
                   <a:srgbClr val="1E293B"/>
                 </a:solidFill>
@@ -2569,9 +2735,9 @@
                 <a:ea typeface="Calibri" pitchFamily="34" charset="-122"/>
                 <a:cs typeface="Calibri" pitchFamily="34" charset="-120"/>
               </a:rPr>
-              <a:t>jumping → jump</a:t>
-            </a:r>
-            <a:endParaRPr lang="en-US" sz="1500" dirty="0"/>
+              <a:t>To be amazed or surprised by something.</a:t>
+            </a:r>
+            <a:endParaRPr lang="en-US" sz="1700" dirty="0"/>
           </a:p>
         </p:txBody>
       </p:sp>
@@ -2583,16 +2749,16 @@
         </p:nvSpPr>
         <p:spPr>
           <a:xfrm>
-            <a:off x="457200" y="2798064"/>
-            <a:ext cx="8229600" cy="411480"/>
+            <a:off x="365760" y="3291840"/>
+            <a:ext cx="8412480" cy="658368"/>
           </a:xfrm>
           <a:prstGeom prst="roundRect">
             <a:avLst>
-              <a:gd name="adj" fmla="val 22222"/>
+              <a:gd name="adj" fmla="val 13889"/>
             </a:avLst>
           </a:prstGeom>
           <a:solidFill>
-            <a:srgbClr val="F0E8FF"/>
+            <a:srgbClr val="FFFFFF"/>
           </a:solidFill>
           <a:ln/>
           <a:effectLst>
@@ -2612,24 +2778,38 @@
         </p:nvSpPr>
         <p:spPr>
           <a:xfrm>
-            <a:off x="640080" y="2843784"/>
-            <a:ext cx="7863840" cy="320040"/>
-          </a:xfrm>
-          <a:prstGeom prst="rect">
-            <a:avLst/>
-          </a:prstGeom>
-          <a:noFill/>
-          <a:ln/>
-        </p:spPr>
-        <p:txBody>
-          <a:bodyPr wrap="square" lIns="0" tIns="0" rIns="0" bIns="0" rtlCol="0" anchor="ctr"/>
-          <a:lstStyle/>
-          <a:p>
-            <a:pPr indent="0" marL="0">
-              <a:buNone/>
-            </a:pPr>
-            <a:r>
-              <a:rPr lang="en-US" sz="1500" dirty="0">
+            <a:off x="594360" y="3419856"/>
+            <a:ext cx="7863840" cy="420624"/>
+          </a:xfrm>
+          <a:prstGeom prst="rect">
+            <a:avLst/>
+          </a:prstGeom>
+          <a:noFill/>
+          <a:ln/>
+        </p:spPr>
+        <p:txBody>
+          <a:bodyPr wrap="square" lIns="0" tIns="0" rIns="0" bIns="0" rtlCol="0" anchor="ctr"/>
+          <a:lstStyle/>
+          <a:p>
+            <a:pPr indent="0" marL="0">
+              <a:buNone/>
+            </a:pPr>
+            <a:r>
+              <a:rPr lang="en-US" sz="1700" b="1" dirty="0">
+                <a:solidFill>
+                  <a:srgbClr val="0E1C42"/>
+                </a:solidFill>
+                <a:latin typeface="Calibri" pitchFamily="34" charset="0"/>
+                <a:ea typeface="Calibri" pitchFamily="34" charset="-122"/>
+                <a:cs typeface="Calibri" pitchFamily="34" charset="-120"/>
+              </a:rPr>
+              <a:t>examined  </a:t>
+            </a:r>
+            <a:pPr indent="0" marL="0">
+              <a:buNone/>
+            </a:pPr>
+            <a:r>
+              <a:rPr lang="en-US" sz="1400" dirty="0">
                 <a:solidFill>
                   <a:srgbClr val="1E293B"/>
                 </a:solidFill>
@@ -2637,87 +2817,9 @@
                 <a:ea typeface="Calibri" pitchFamily="34" charset="-122"/>
                 <a:cs typeface="Calibri" pitchFamily="34" charset="-120"/>
               </a:rPr>
-              <a:t>redo → do</a:t>
-            </a:r>
-            <a:endParaRPr lang="en-US" sz="1500" dirty="0"/>
-          </a:p>
-        </p:txBody>
-      </p:sp>
-      <p:sp>
-        <p:nvSpPr>
-          <p:cNvPr id="13" name="Text 11"/>
-          <p:cNvSpPr/>
-          <p:nvPr/>
-        </p:nvSpPr>
-        <p:spPr>
-          <a:xfrm>
-            <a:off x="457200" y="3273552"/>
-            <a:ext cx="8046720" cy="292608"/>
-          </a:xfrm>
-          <a:prstGeom prst="rect">
-            <a:avLst/>
-          </a:prstGeom>
-          <a:noFill/>
-          <a:ln/>
-        </p:spPr>
-        <p:txBody>
-          <a:bodyPr wrap="square" lIns="0" tIns="0" rIns="0" bIns="0" rtlCol="0" anchor="ctr"/>
-          <a:lstStyle/>
-          <a:p>
-            <a:pPr indent="0" marL="0">
-              <a:buNone/>
-            </a:pPr>
-            <a:r>
-              <a:rPr lang="en-US" sz="1100" b="1" spc="200" kern="0" dirty="0">
-                <a:solidFill>
-                  <a:srgbClr val="64748B"/>
-                </a:solidFill>
-                <a:latin typeface="Calibri" pitchFamily="34" charset="0"/>
-                <a:ea typeface="Calibri" pitchFamily="34" charset="-122"/>
-                <a:cs typeface="Calibri" pitchFamily="34" charset="-120"/>
-              </a:rPr>
-              <a:t>CONCEPT EXAMPLES</a:t>
-            </a:r>
-            <a:endParaRPr lang="en-US" sz="1100" dirty="0"/>
-          </a:p>
-        </p:txBody>
-      </p:sp>
-      <p:sp>
-        <p:nvSpPr>
-          <p:cNvPr id="14" name="Text 12"/>
-          <p:cNvSpPr/>
-          <p:nvPr/>
-        </p:nvSpPr>
-        <p:spPr>
-          <a:xfrm>
-            <a:off x="640080" y="3593592"/>
-            <a:ext cx="7863840" cy="320040"/>
-          </a:xfrm>
-          <a:prstGeom prst="rect">
-            <a:avLst/>
-          </a:prstGeom>
-          <a:noFill/>
-          <a:ln/>
-        </p:spPr>
-        <p:txBody>
-          <a:bodyPr wrap="square" lIns="0" tIns="0" rIns="0" bIns="0" rtlCol="0" anchor="ctr"/>
-          <a:lstStyle/>
-          <a:p>
-            <a:pPr indent="0" marL="0">
-              <a:buNone/>
-            </a:pPr>
-            <a:r>
-              <a:rPr lang="en-US" sz="1300" dirty="0">
-                <a:solidFill>
-                  <a:srgbClr val="1E293B"/>
-                </a:solidFill>
-                <a:latin typeface="Calibri" pitchFamily="34" charset="0"/>
-                <a:ea typeface="Calibri" pitchFamily="34" charset="-122"/>
-                <a:cs typeface="Calibri" pitchFamily="34" charset="-120"/>
-              </a:rPr>
-              <a:t>• 📌 Examples</a:t>
-            </a:r>
-            <a:endParaRPr lang="en-US" sz="1300" dirty="0"/>
+              <a:t>Very, very big.</a:t>
+            </a:r>
+            <a:endParaRPr lang="en-US" sz="1700" dirty="0"/>
           </a:p>
         </p:txBody>
       </p:sp>
@@ -2735,7 +2837,7 @@
     <p:bg>
       <p:bgPr>
         <a:solidFill>
-          <a:srgbClr val="FFFFFF"/>
+          <a:srgbClr val="F8FAFC"/>
         </a:solidFill>
       </p:bgPr>
     </p:bg>
@@ -2755,80 +2857,116 @@
       </p:grpSpPr>
       <p:sp>
         <p:nvSpPr>
-          <p:cNvPr id="2" name="Text 0"/>
-          <p:cNvSpPr/>
-          <p:nvPr/>
-        </p:nvSpPr>
-        <p:spPr>
-          <a:xfrm>
-            <a:off x="365760" y="164592"/>
-            <a:ext cx="8412480" cy="566928"/>
-          </a:xfrm>
-          <a:prstGeom prst="rect">
-            <a:avLst/>
-          </a:prstGeom>
-          <a:noFill/>
-          <a:ln/>
-        </p:spPr>
-        <p:txBody>
-          <a:bodyPr wrap="square" lIns="0" tIns="0" rIns="0" bIns="0" rtlCol="0" anchor="ctr"/>
-          <a:lstStyle/>
-          <a:p>
-            <a:pPr algn="l" indent="0" marL="0">
-              <a:buNone/>
-            </a:pPr>
-            <a:r>
-              <a:rPr lang="en-US" sz="2800" b="1" dirty="0">
-                <a:solidFill>
-                  <a:srgbClr val="0E1C42"/>
-                </a:solidFill>
-                <a:latin typeface="Calibri" pitchFamily="34" charset="0"/>
-                <a:ea typeface="Calibri" pitchFamily="34" charset="-122"/>
-                <a:cs typeface="Calibri" pitchFamily="34" charset="-120"/>
-              </a:rPr>
-              <a:t>🔤 Vocabulary</a:t>
-            </a:r>
-            <a:endParaRPr lang="en-US" sz="2800" dirty="0"/>
-          </a:p>
-        </p:txBody>
-      </p:sp>
-      <p:sp>
-        <p:nvSpPr>
-          <p:cNvPr id="3" name="Shape 1"/>
-          <p:cNvSpPr/>
-          <p:nvPr/>
-        </p:nvSpPr>
-        <p:spPr>
-          <a:xfrm>
-            <a:off x="365760" y="749808"/>
-            <a:ext cx="8412480" cy="0"/>
-          </a:xfrm>
-          <a:prstGeom prst="line">
-            <a:avLst/>
-          </a:prstGeom>
-          <a:noFill/>
-          <a:ln w="19050">
-            <a:solidFill>
-              <a:srgbClr val="55C8E8"/>
-            </a:solidFill>
-            <a:prstDash val="solid"/>
-          </a:ln>
-        </p:spPr>
-      </p:sp>
-      <p:sp>
-        <p:nvSpPr>
-          <p:cNvPr id="4" name="Shape 2"/>
-          <p:cNvSpPr/>
-          <p:nvPr/>
-        </p:nvSpPr>
-        <p:spPr>
-          <a:xfrm>
-            <a:off x="457200" y="1005840"/>
-            <a:ext cx="3840480" cy="640080"/>
+          <p:cNvPr id="2" name="Shape 0"/>
+          <p:cNvSpPr/>
+          <p:nvPr/>
+        </p:nvSpPr>
+        <p:spPr>
+          <a:xfrm>
+            <a:off x="0" y="0"/>
+            <a:ext cx="9144000" cy="566928"/>
+          </a:xfrm>
+          <a:prstGeom prst="rect">
+            <a:avLst/>
+          </a:prstGeom>
+          <a:solidFill>
+            <a:srgbClr val="C7922C"/>
+          </a:solidFill>
+          <a:ln/>
+        </p:spPr>
+      </p:sp>
+      <p:sp>
+        <p:nvSpPr>
+          <p:cNvPr id="3" name="Text 1"/>
+          <p:cNvSpPr/>
+          <p:nvPr/>
+        </p:nvSpPr>
+        <p:spPr>
+          <a:xfrm>
+            <a:off x="365760" y="54864"/>
+            <a:ext cx="8412480" cy="457200"/>
+          </a:xfrm>
+          <a:prstGeom prst="rect">
+            <a:avLst/>
+          </a:prstGeom>
+          <a:noFill/>
+          <a:ln/>
+        </p:spPr>
+        <p:txBody>
+          <a:bodyPr wrap="square" lIns="0" tIns="0" rIns="0" bIns="0" rtlCol="0" anchor="ctr"/>
+          <a:lstStyle/>
+          <a:p>
+            <a:pPr indent="0" marL="0">
+              <a:buNone/>
+            </a:pPr>
+            <a:r>
+              <a:rPr lang="en-US" sz="2200" b="1" dirty="0">
+                <a:solidFill>
+                  <a:srgbClr val="FFFFFF"/>
+                </a:solidFill>
+                <a:latin typeface="Calibri" pitchFamily="34" charset="0"/>
+                <a:ea typeface="Calibri" pitchFamily="34" charset="-122"/>
+                <a:cs typeface="Calibri" pitchFamily="34" charset="-120"/>
+              </a:rPr>
+              <a:t>✏️  Grammar</a:t>
+            </a:r>
+            <a:endParaRPr lang="en-US" sz="2200" dirty="0"/>
+          </a:p>
+        </p:txBody>
+      </p:sp>
+      <p:sp>
+        <p:nvSpPr>
+          <p:cNvPr id="4" name="Text 2"/>
+          <p:cNvSpPr/>
+          <p:nvPr/>
+        </p:nvSpPr>
+        <p:spPr>
+          <a:xfrm>
+            <a:off x="365760" y="777240"/>
+            <a:ext cx="8229600" cy="237744"/>
+          </a:xfrm>
+          <a:prstGeom prst="rect">
+            <a:avLst/>
+          </a:prstGeom>
+          <a:noFill/>
+          <a:ln/>
+        </p:spPr>
+        <p:txBody>
+          <a:bodyPr wrap="square" lIns="0" tIns="0" rIns="0" bIns="0" rtlCol="0" anchor="ctr"/>
+          <a:lstStyle/>
+          <a:p>
+            <a:pPr indent="0" marL="0">
+              <a:buNone/>
+            </a:pPr>
+            <a:r>
+              <a:rPr lang="en-US" sz="1100" b="1" spc="100" kern="0" dirty="0">
+                <a:solidFill>
+                  <a:srgbClr val="C7922C"/>
+                </a:solidFill>
+                <a:latin typeface="Calibri" pitchFamily="34" charset="0"/>
+                <a:ea typeface="Calibri" pitchFamily="34" charset="-122"/>
+                <a:cs typeface="Calibri" pitchFamily="34" charset="-120"/>
+              </a:rPr>
+              <a:t>COMPLETE SENTENCES</a:t>
+            </a:r>
+            <a:endParaRPr lang="en-US" sz="1100" dirty="0"/>
+          </a:p>
+        </p:txBody>
+      </p:sp>
+      <p:sp>
+        <p:nvSpPr>
+          <p:cNvPr id="5" name="Shape 3"/>
+          <p:cNvSpPr/>
+          <p:nvPr/>
+        </p:nvSpPr>
+        <p:spPr>
+          <a:xfrm>
+            <a:off x="365760" y="1078992"/>
+            <a:ext cx="8412480" cy="658368"/>
           </a:xfrm>
           <a:prstGeom prst="roundRect">
             <a:avLst>
-              <a:gd name="adj" fmla="val 14286"/>
+              <a:gd name="adj" fmla="val 13889"/>
             </a:avLst>
           </a:prstGeom>
           <a:solidFill>
@@ -2846,50 +2984,30 @@
       </p:sp>
       <p:sp>
         <p:nvSpPr>
-          <p:cNvPr id="5" name="Text 3"/>
-          <p:cNvSpPr/>
-          <p:nvPr/>
-        </p:nvSpPr>
-        <p:spPr>
-          <a:xfrm>
-            <a:off x="594360" y="1060704"/>
-            <a:ext cx="3566160" cy="530352"/>
-          </a:xfrm>
-          <a:prstGeom prst="rect">
-            <a:avLst/>
-          </a:prstGeom>
-          <a:noFill/>
-          <a:ln/>
-        </p:spPr>
-        <p:txBody>
-          <a:bodyPr wrap="square" lIns="0" tIns="0" rIns="0" bIns="0" rtlCol="0" anchor="ctr"/>
-          <a:lstStyle/>
-          <a:p>
-            <a:pPr indent="0" marL="0">
-              <a:buNone/>
-            </a:pPr>
-            <a:r>
-              <a:rPr lang="en-US" sz="1500" b="1" dirty="0">
-                <a:solidFill>
-                  <a:srgbClr val="0E1C42"/>
-                </a:solidFill>
-                <a:latin typeface="Calibri" pitchFamily="34" charset="0"/>
-                <a:ea typeface="Calibri" pitchFamily="34" charset="-122"/>
-                <a:cs typeface="Calibri" pitchFamily="34" charset="-120"/>
-              </a:rPr>
-              <a:t>bulletin</a:t>
-            </a:r>
-            <a:pPr indent="0" marL="0">
-              <a:buNone/>
-            </a:pPr>
-            <a:endParaRPr lang="en-US" sz="1500" dirty="0"/>
-          </a:p>
-          <a:p>
-            <a:pPr indent="0" marL="0">
-              <a:buNone/>
-            </a:pPr>
-            <a:r>
-              <a:rPr lang="en-US" sz="1200" dirty="0">
+          <p:cNvPr id="6" name="Text 4"/>
+          <p:cNvSpPr/>
+          <p:nvPr/>
+        </p:nvSpPr>
+        <p:spPr>
+          <a:xfrm>
+            <a:off x="594360" y="1225296"/>
+            <a:ext cx="7863840" cy="402336"/>
+          </a:xfrm>
+          <a:prstGeom prst="rect">
+            <a:avLst/>
+          </a:prstGeom>
+          <a:noFill/>
+          <a:ln/>
+        </p:spPr>
+        <p:txBody>
+          <a:bodyPr wrap="square" lIns="0" tIns="0" rIns="0" bIns="0" rtlCol="0" anchor="ctr"/>
+          <a:lstStyle/>
+          <a:p>
+            <a:pPr indent="0" marL="0">
+              <a:buNone/>
+            </a:pPr>
+            <a:r>
+              <a:rPr lang="en-US" sz="1600" dirty="0">
                 <a:solidFill>
                   <a:srgbClr val="1E293B"/>
                 </a:solidFill>
@@ -2897,30 +3015,30 @@
                 <a:ea typeface="Calibri" pitchFamily="34" charset="-122"/>
                 <a:cs typeface="Calibri" pitchFamily="34" charset="-120"/>
               </a:rPr>
-              <a:t>A board where you pin up messages and pictures.</a:t>
-            </a:r>
-            <a:endParaRPr lang="en-US" sz="1500" dirty="0"/>
-          </a:p>
-        </p:txBody>
-      </p:sp>
-      <p:sp>
-        <p:nvSpPr>
-          <p:cNvPr id="6" name="Shape 4"/>
-          <p:cNvSpPr/>
-          <p:nvPr/>
-        </p:nvSpPr>
-        <p:spPr>
-          <a:xfrm>
-            <a:off x="4572000" y="1005840"/>
-            <a:ext cx="3840480" cy="640080"/>
+              <a:t>Flat and half an inch thick.   |   Stanley was half an inch thick.</a:t>
+            </a:r>
+            <a:endParaRPr lang="en-US" sz="1600" dirty="0"/>
+          </a:p>
+        </p:txBody>
+      </p:sp>
+      <p:sp>
+        <p:nvSpPr>
+          <p:cNvPr id="7" name="Shape 5"/>
+          <p:cNvSpPr/>
+          <p:nvPr/>
+        </p:nvSpPr>
+        <p:spPr>
+          <a:xfrm>
+            <a:off x="365760" y="1810512"/>
+            <a:ext cx="8412480" cy="658368"/>
           </a:xfrm>
           <a:prstGeom prst="roundRect">
             <a:avLst>
-              <a:gd name="adj" fmla="val 14286"/>
+              <a:gd name="adj" fmla="val 13889"/>
             </a:avLst>
           </a:prstGeom>
           <a:solidFill>
-            <a:srgbClr val="FEF6E8"/>
+            <a:srgbClr val="FFFFFF"/>
           </a:solidFill>
           <a:ln/>
           <a:effectLst>
@@ -2934,50 +3052,30 @@
       </p:sp>
       <p:sp>
         <p:nvSpPr>
-          <p:cNvPr id="7" name="Text 5"/>
-          <p:cNvSpPr/>
-          <p:nvPr/>
-        </p:nvSpPr>
-        <p:spPr>
-          <a:xfrm>
-            <a:off x="4709160" y="1060704"/>
-            <a:ext cx="3566160" cy="530352"/>
-          </a:xfrm>
-          <a:prstGeom prst="rect">
-            <a:avLst/>
-          </a:prstGeom>
-          <a:noFill/>
-          <a:ln/>
-        </p:spPr>
-        <p:txBody>
-          <a:bodyPr wrap="square" lIns="0" tIns="0" rIns="0" bIns="0" rtlCol="0" anchor="ctr"/>
-          <a:lstStyle/>
-          <a:p>
-            <a:pPr indent="0" marL="0">
-              <a:buNone/>
-            </a:pPr>
-            <a:r>
-              <a:rPr lang="en-US" sz="1500" b="1" dirty="0">
-                <a:solidFill>
-                  <a:srgbClr val="0E1C42"/>
-                </a:solidFill>
-                <a:latin typeface="Calibri" pitchFamily="34" charset="0"/>
-                <a:ea typeface="Calibri" pitchFamily="34" charset="-122"/>
-                <a:cs typeface="Calibri" pitchFamily="34" charset="-120"/>
-              </a:rPr>
-              <a:t>examined</a:t>
-            </a:r>
-            <a:pPr indent="0" marL="0">
-              <a:buNone/>
-            </a:pPr>
-            <a:endParaRPr lang="en-US" sz="1500" dirty="0"/>
-          </a:p>
-          <a:p>
-            <a:pPr indent="0" marL="0">
-              <a:buNone/>
-            </a:pPr>
-            <a:r>
-              <a:rPr lang="en-US" sz="1200" dirty="0">
+          <p:cNvPr id="8" name="Text 6"/>
+          <p:cNvSpPr/>
+          <p:nvPr/>
+        </p:nvSpPr>
+        <p:spPr>
+          <a:xfrm>
+            <a:off x="594360" y="1956816"/>
+            <a:ext cx="7863840" cy="402336"/>
+          </a:xfrm>
+          <a:prstGeom prst="rect">
+            <a:avLst/>
+          </a:prstGeom>
+          <a:noFill/>
+          <a:ln/>
+        </p:spPr>
+        <p:txBody>
+          <a:bodyPr wrap="square" lIns="0" tIns="0" rIns="0" bIns="0" rtlCol="0" anchor="ctr"/>
+          <a:lstStyle/>
+          <a:p>
+            <a:pPr indent="0" marL="0">
+              <a:buNone/>
+            </a:pPr>
+            <a:r>
+              <a:rPr lang="en-US" sz="1600" dirty="0">
                 <a:solidFill>
                   <a:srgbClr val="1E293B"/>
                 </a:solidFill>
@@ -2985,26 +3083,26 @@
                 <a:ea typeface="Calibri" pitchFamily="34" charset="-122"/>
                 <a:cs typeface="Calibri" pitchFamily="34" charset="-120"/>
               </a:rPr>
-              <a:t>Looked at very carefully, especially by a doctor.</a:t>
-            </a:r>
-            <a:endParaRPr lang="en-US" sz="1500" dirty="0"/>
-          </a:p>
-        </p:txBody>
-      </p:sp>
-      <p:sp>
-        <p:nvSpPr>
-          <p:cNvPr id="8" name="Shape 6"/>
-          <p:cNvSpPr/>
-          <p:nvPr/>
-        </p:nvSpPr>
-        <p:spPr>
-          <a:xfrm>
-            <a:off x="457200" y="1755648"/>
-            <a:ext cx="3840480" cy="640080"/>
+              <a:t>The doctor examined Stanley.   |   The doctor in his office.</a:t>
+            </a:r>
+            <a:endParaRPr lang="en-US" sz="1600" dirty="0"/>
+          </a:p>
+        </p:txBody>
+      </p:sp>
+      <p:sp>
+        <p:nvSpPr>
+          <p:cNvPr id="9" name="Shape 7"/>
+          <p:cNvSpPr/>
+          <p:nvPr/>
+        </p:nvSpPr>
+        <p:spPr>
+          <a:xfrm>
+            <a:off x="365760" y="2542032"/>
+            <a:ext cx="8412480" cy="658368"/>
           </a:xfrm>
           <a:prstGeom prst="roundRect">
             <a:avLst>
-              <a:gd name="adj" fmla="val 14286"/>
+              <a:gd name="adj" fmla="val 13889"/>
             </a:avLst>
           </a:prstGeom>
           <a:solidFill>
@@ -3022,50 +3120,30 @@
       </p:sp>
       <p:sp>
         <p:nvSpPr>
-          <p:cNvPr id="9" name="Text 7"/>
-          <p:cNvSpPr/>
-          <p:nvPr/>
-        </p:nvSpPr>
-        <p:spPr>
-          <a:xfrm>
-            <a:off x="594360" y="1810512"/>
-            <a:ext cx="3566160" cy="530352"/>
-          </a:xfrm>
-          <a:prstGeom prst="rect">
-            <a:avLst/>
-          </a:prstGeom>
-          <a:noFill/>
-          <a:ln/>
-        </p:spPr>
-        <p:txBody>
-          <a:bodyPr wrap="square" lIns="0" tIns="0" rIns="0" bIns="0" rtlCol="0" anchor="ctr"/>
-          <a:lstStyle/>
-          <a:p>
-            <a:pPr indent="0" marL="0">
-              <a:buNone/>
-            </a:pPr>
-            <a:r>
-              <a:rPr lang="en-US" sz="1500" b="1" dirty="0">
-                <a:solidFill>
-                  <a:srgbClr val="0E1C42"/>
-                </a:solidFill>
-                <a:latin typeface="Calibri" pitchFamily="34" charset="0"/>
-                <a:ea typeface="Calibri" pitchFamily="34" charset="-122"/>
-                <a:cs typeface="Calibri" pitchFamily="34" charset="-120"/>
-              </a:rPr>
-              <a:t>enormous</a:t>
-            </a:r>
-            <a:pPr indent="0" marL="0">
-              <a:buNone/>
-            </a:pPr>
-            <a:endParaRPr lang="en-US" sz="1500" dirty="0"/>
-          </a:p>
-          <a:p>
-            <a:pPr indent="0" marL="0">
-              <a:buNone/>
-            </a:pPr>
-            <a:r>
-              <a:rPr lang="en-US" sz="1200" dirty="0">
+          <p:cNvPr id="10" name="Text 8"/>
+          <p:cNvSpPr/>
+          <p:nvPr/>
+        </p:nvSpPr>
+        <p:spPr>
+          <a:xfrm>
+            <a:off x="594360" y="2688336"/>
+            <a:ext cx="7863840" cy="402336"/>
+          </a:xfrm>
+          <a:prstGeom prst="rect">
+            <a:avLst/>
+          </a:prstGeom>
+          <a:noFill/>
+          <a:ln/>
+        </p:spPr>
+        <p:txBody>
+          <a:bodyPr wrap="square" lIns="0" tIns="0" rIns="0" bIns="0" rtlCol="0" anchor="ctr"/>
+          <a:lstStyle/>
+          <a:p>
+            <a:pPr indent="0" marL="0">
+              <a:buNone/>
+            </a:pPr>
+            <a:r>
+              <a:rPr lang="en-US" sz="1600" dirty="0">
                 <a:solidFill>
                   <a:srgbClr val="1E293B"/>
                 </a:solidFill>
@@ -3073,30 +3151,30 @@
                 <a:ea typeface="Calibri" pitchFamily="34" charset="-122"/>
                 <a:cs typeface="Calibri" pitchFamily="34" charset="-120"/>
               </a:rPr>
-              <a:t>Very, very big.</a:t>
-            </a:r>
-            <a:endParaRPr lang="en-US" sz="1500" dirty="0"/>
-          </a:p>
-        </p:txBody>
-      </p:sp>
-      <p:sp>
-        <p:nvSpPr>
-          <p:cNvPr id="10" name="Shape 8"/>
-          <p:cNvSpPr/>
-          <p:nvPr/>
-        </p:nvSpPr>
-        <p:spPr>
-          <a:xfrm>
-            <a:off x="4572000" y="1755648"/>
-            <a:ext cx="3840480" cy="640080"/>
+              <a:t>A kite in the park.   |   Stanley flew like a kite.</a:t>
+            </a:r>
+            <a:endParaRPr lang="en-US" sz="1600" dirty="0"/>
+          </a:p>
+        </p:txBody>
+      </p:sp>
+      <p:sp>
+        <p:nvSpPr>
+          <p:cNvPr id="11" name="Shape 9"/>
+          <p:cNvSpPr/>
+          <p:nvPr/>
+        </p:nvSpPr>
+        <p:spPr>
+          <a:xfrm>
+            <a:off x="365760" y="3273552"/>
+            <a:ext cx="8412480" cy="658368"/>
           </a:xfrm>
           <a:prstGeom prst="roundRect">
             <a:avLst>
-              <a:gd name="adj" fmla="val 14286"/>
+              <a:gd name="adj" fmla="val 13889"/>
             </a:avLst>
           </a:prstGeom>
           <a:solidFill>
-            <a:srgbClr val="FEF6E8"/>
+            <a:srgbClr val="FFFFFF"/>
           </a:solidFill>
           <a:ln/>
           <a:effectLst>
@@ -3110,50 +3188,30 @@
       </p:sp>
       <p:sp>
         <p:nvSpPr>
-          <p:cNvPr id="11" name="Text 9"/>
-          <p:cNvSpPr/>
-          <p:nvPr/>
-        </p:nvSpPr>
-        <p:spPr>
-          <a:xfrm>
-            <a:off x="4709160" y="1810512"/>
-            <a:ext cx="3566160" cy="530352"/>
-          </a:xfrm>
-          <a:prstGeom prst="rect">
-            <a:avLst/>
-          </a:prstGeom>
-          <a:noFill/>
-          <a:ln/>
-        </p:spPr>
-        <p:txBody>
-          <a:bodyPr wrap="square" lIns="0" tIns="0" rIns="0" bIns="0" rtlCol="0" anchor="ctr"/>
-          <a:lstStyle/>
-          <a:p>
-            <a:pPr indent="0" marL="0">
-              <a:buNone/>
-            </a:pPr>
-            <a:r>
-              <a:rPr lang="en-US" sz="1500" b="1" dirty="0">
-                <a:solidFill>
-                  <a:srgbClr val="0E1C42"/>
-                </a:solidFill>
-                <a:latin typeface="Calibri" pitchFamily="34" charset="0"/>
-                <a:ea typeface="Calibri" pitchFamily="34" charset="-122"/>
-                <a:cs typeface="Calibri" pitchFamily="34" charset="-120"/>
-              </a:rPr>
-              <a:t>marvel</a:t>
-            </a:r>
-            <a:pPr indent="0" marL="0">
-              <a:buNone/>
-            </a:pPr>
-            <a:endParaRPr lang="en-US" sz="1500" dirty="0"/>
-          </a:p>
-          <a:p>
-            <a:pPr indent="0" marL="0">
-              <a:buNone/>
-            </a:pPr>
-            <a:r>
-              <a:rPr lang="en-US" sz="1200" dirty="0">
+          <p:cNvPr id="12" name="Text 10"/>
+          <p:cNvSpPr/>
+          <p:nvPr/>
+        </p:nvSpPr>
+        <p:spPr>
+          <a:xfrm>
+            <a:off x="594360" y="3419856"/>
+            <a:ext cx="7863840" cy="402336"/>
+          </a:xfrm>
+          <a:prstGeom prst="rect">
+            <a:avLst/>
+          </a:prstGeom>
+          <a:noFill/>
+          <a:ln/>
+        </p:spPr>
+        <p:txBody>
+          <a:bodyPr wrap="square" lIns="0" tIns="0" rIns="0" bIns="0" rtlCol="0" anchor="ctr"/>
+          <a:lstStyle/>
+          <a:p>
+            <a:pPr indent="0" marL="0">
+              <a:buNone/>
+            </a:pPr>
+            <a:r>
+              <a:rPr lang="en-US" sz="1600" dirty="0">
                 <a:solidFill>
                   <a:srgbClr val="1E293B"/>
                 </a:solidFill>
@@ -3161,7 +3219,46 @@
                 <a:ea typeface="Calibri" pitchFamily="34" charset="-122"/>
                 <a:cs typeface="Calibri" pitchFamily="34" charset="-120"/>
               </a:rPr>
-              <a:t>To be amazed or surprised by something.</a:t>
+              <a:t>Arthur blew his brother up.   |   Arthur with the bicycle pump.</a:t>
+            </a:r>
+            <a:endParaRPr lang="en-US" sz="1600" dirty="0"/>
+          </a:p>
+        </p:txBody>
+      </p:sp>
+      <p:sp>
+        <p:nvSpPr>
+          <p:cNvPr id="13" name="Text 11"/>
+          <p:cNvSpPr/>
+          <p:nvPr/>
+        </p:nvSpPr>
+        <p:spPr>
+          <a:xfrm>
+            <a:off x="365760" y="4050792"/>
+            <a:ext cx="8412480" cy="365760"/>
+          </a:xfrm>
+          <a:prstGeom prst="rect">
+            <a:avLst/>
+          </a:prstGeom>
+          <a:noFill/>
+          <a:ln/>
+        </p:spPr>
+        <p:txBody>
+          <a:bodyPr wrap="square" lIns="0" tIns="0" rIns="0" bIns="0" rtlCol="0" anchor="ctr"/>
+          <a:lstStyle/>
+          <a:p>
+            <a:pPr indent="0" marL="0">
+              <a:buNone/>
+            </a:pPr>
+            <a:r>
+              <a:rPr lang="en-US" sz="1500" i="1" dirty="0">
+                <a:solidFill>
+                  <a:srgbClr val="64748B"/>
+                </a:solidFill>
+                <a:latin typeface="Calibri" pitchFamily="34" charset="0"/>
+                <a:ea typeface="Calibri" pitchFamily="34" charset="-122"/>
+                <a:cs typeface="Calibri" pitchFamily="34" charset="-120"/>
+              </a:rPr>
+              <a:t>Your turn. One choice in each row is not a complete sentence . Tap the one that is missing a part. Tap to check — green means you got it.</a:t>
             </a:r>
             <a:endParaRPr lang="en-US" sz="1500" dirty="0"/>
           </a:p>
@@ -3181,7 +3278,7 @@
     <p:bg>
       <p:bgPr>
         <a:solidFill>
-          <a:srgbClr val="E5F7FC"/>
+          <a:srgbClr val="F8FAFC"/>
         </a:solidFill>
       </p:bgPr>
     </p:bg>
@@ -3201,180 +3298,116 @@
       </p:grpSpPr>
       <p:sp>
         <p:nvSpPr>
-          <p:cNvPr id="2" name="Text 0"/>
-          <p:cNvSpPr/>
-          <p:nvPr/>
-        </p:nvSpPr>
-        <p:spPr>
-          <a:xfrm>
-            <a:off x="365760" y="164592"/>
-            <a:ext cx="5943600" cy="566928"/>
-          </a:xfrm>
-          <a:prstGeom prst="rect">
-            <a:avLst/>
-          </a:prstGeom>
-          <a:noFill/>
-          <a:ln/>
-        </p:spPr>
-        <p:txBody>
-          <a:bodyPr wrap="square" lIns="0" tIns="0" rIns="0" bIns="0" rtlCol="0" anchor="ctr"/>
-          <a:lstStyle/>
-          <a:p>
-            <a:pPr algn="l" indent="0" marL="0">
-              <a:buNone/>
-            </a:pPr>
-            <a:r>
-              <a:rPr lang="en-US" sz="2800" b="1" dirty="0">
-                <a:solidFill>
-                  <a:srgbClr val="0E1C42"/>
-                </a:solidFill>
-                <a:latin typeface="Calibri" pitchFamily="34" charset="0"/>
-                <a:ea typeface="Calibri" pitchFamily="34" charset="-122"/>
-                <a:cs typeface="Calibri" pitchFamily="34" charset="-120"/>
-              </a:rPr>
-              <a:t>🔠 Spelling: Closed syllables and short vowels review</a:t>
-            </a:r>
-            <a:endParaRPr lang="en-US" sz="2800" dirty="0"/>
-          </a:p>
-        </p:txBody>
-      </p:sp>
-      <p:sp>
-        <p:nvSpPr>
-          <p:cNvPr id="3" name="Shape 1"/>
-          <p:cNvSpPr/>
-          <p:nvPr/>
-        </p:nvSpPr>
-        <p:spPr>
-          <a:xfrm>
-            <a:off x="365760" y="749808"/>
-            <a:ext cx="8412480" cy="0"/>
-          </a:xfrm>
-          <a:prstGeom prst="line">
-            <a:avLst/>
-          </a:prstGeom>
-          <a:noFill/>
-          <a:ln w="19050">
-            <a:solidFill>
-              <a:srgbClr val="55C8E8"/>
-            </a:solidFill>
-            <a:prstDash val="solid"/>
-          </a:ln>
-        </p:spPr>
-      </p:sp>
-      <p:sp>
-        <p:nvSpPr>
-          <p:cNvPr id="4" name="Shape 2"/>
-          <p:cNvSpPr/>
-          <p:nvPr/>
-        </p:nvSpPr>
-        <p:spPr>
-          <a:xfrm>
-            <a:off x="6492240" y="173736"/>
-            <a:ext cx="2286000" cy="502920"/>
+          <p:cNvPr id="2" name="Shape 0"/>
+          <p:cNvSpPr/>
+          <p:nvPr/>
+        </p:nvSpPr>
+        <p:spPr>
+          <a:xfrm>
+            <a:off x="0" y="0"/>
+            <a:ext cx="9144000" cy="566928"/>
+          </a:xfrm>
+          <a:prstGeom prst="rect">
+            <a:avLst/>
+          </a:prstGeom>
+          <a:solidFill>
+            <a:srgbClr val="C7922C"/>
+          </a:solidFill>
+          <a:ln/>
+        </p:spPr>
+      </p:sp>
+      <p:sp>
+        <p:nvSpPr>
+          <p:cNvPr id="3" name="Text 1"/>
+          <p:cNvSpPr/>
+          <p:nvPr/>
+        </p:nvSpPr>
+        <p:spPr>
+          <a:xfrm>
+            <a:off x="365760" y="54864"/>
+            <a:ext cx="8412480" cy="457200"/>
+          </a:xfrm>
+          <a:prstGeom prst="rect">
+            <a:avLst/>
+          </a:prstGeom>
+          <a:noFill/>
+          <a:ln/>
+        </p:spPr>
+        <p:txBody>
+          <a:bodyPr wrap="square" lIns="0" tIns="0" rIns="0" bIns="0" rtlCol="0" anchor="ctr"/>
+          <a:lstStyle/>
+          <a:p>
+            <a:pPr indent="0" marL="0">
+              <a:buNone/>
+            </a:pPr>
+            <a:r>
+              <a:rPr lang="en-US" sz="2200" b="1" dirty="0">
+                <a:solidFill>
+                  <a:srgbClr val="FFFFFF"/>
+                </a:solidFill>
+                <a:latin typeface="Calibri" pitchFamily="34" charset="0"/>
+                <a:ea typeface="Calibri" pitchFamily="34" charset="-122"/>
+                <a:cs typeface="Calibri" pitchFamily="34" charset="-120"/>
+              </a:rPr>
+              <a:t>✏️  Grammar</a:t>
+            </a:r>
+            <a:endParaRPr lang="en-US" sz="2200" dirty="0"/>
+          </a:p>
+        </p:txBody>
+      </p:sp>
+      <p:sp>
+        <p:nvSpPr>
+          <p:cNvPr id="4" name="Text 2"/>
+          <p:cNvSpPr/>
+          <p:nvPr/>
+        </p:nvSpPr>
+        <p:spPr>
+          <a:xfrm>
+            <a:off x="365760" y="777240"/>
+            <a:ext cx="8229600" cy="237744"/>
+          </a:xfrm>
+          <a:prstGeom prst="rect">
+            <a:avLst/>
+          </a:prstGeom>
+          <a:noFill/>
+          <a:ln/>
+        </p:spPr>
+        <p:txBody>
+          <a:bodyPr wrap="square" lIns="0" tIns="0" rIns="0" bIns="0" rtlCol="0" anchor="ctr"/>
+          <a:lstStyle/>
+          <a:p>
+            <a:pPr indent="0" marL="0">
+              <a:buNone/>
+            </a:pPr>
+            <a:r>
+              <a:rPr lang="en-US" sz="1100" b="1" spc="100" kern="0" dirty="0">
+                <a:solidFill>
+                  <a:srgbClr val="C7922C"/>
+                </a:solidFill>
+                <a:latin typeface="Calibri" pitchFamily="34" charset="0"/>
+                <a:ea typeface="Calibri" pitchFamily="34" charset="-122"/>
+                <a:cs typeface="Calibri" pitchFamily="34" charset="-120"/>
+              </a:rPr>
+              <a:t>COMPLETE SENTENCES</a:t>
+            </a:r>
+            <a:endParaRPr lang="en-US" sz="1100" dirty="0"/>
+          </a:p>
+        </p:txBody>
+      </p:sp>
+      <p:sp>
+        <p:nvSpPr>
+          <p:cNvPr id="5" name="Shape 3"/>
+          <p:cNvSpPr/>
+          <p:nvPr/>
+        </p:nvSpPr>
+        <p:spPr>
+          <a:xfrm>
+            <a:off x="365760" y="1078992"/>
+            <a:ext cx="8412480" cy="658368"/>
           </a:xfrm>
           <a:prstGeom prst="roundRect">
             <a:avLst>
-              <a:gd name="adj" fmla="val 21818"/>
-            </a:avLst>
-          </a:prstGeom>
-          <a:solidFill>
-            <a:srgbClr val="55C8E8"/>
-          </a:solidFill>
-          <a:ln/>
-        </p:spPr>
-      </p:sp>
-      <p:sp>
-        <p:nvSpPr>
-          <p:cNvPr id="5" name="Text 3"/>
-          <p:cNvSpPr/>
-          <p:nvPr/>
-        </p:nvSpPr>
-        <p:spPr>
-          <a:xfrm>
-            <a:off x="6492240" y="173736"/>
-            <a:ext cx="2286000" cy="502920"/>
-          </a:xfrm>
-          <a:prstGeom prst="rect">
-            <a:avLst/>
-          </a:prstGeom>
-          <a:noFill/>
-          <a:ln/>
-        </p:spPr>
-        <p:txBody>
-          <a:bodyPr wrap="square" lIns="0" tIns="0" rIns="0" bIns="0" rtlCol="0" anchor="ctr"/>
-          <a:lstStyle/>
-          <a:p>
-            <a:pPr algn="ctr" indent="0" marL="0">
-              <a:buNone/>
-            </a:pPr>
-            <a:r>
-              <a:rPr lang="en-US" sz="1100" b="1" dirty="0">
-                <a:solidFill>
-                  <a:srgbClr val="0E1C42"/>
-                </a:solidFill>
-                <a:latin typeface="Calibri" pitchFamily="34" charset="0"/>
-                <a:ea typeface="Calibri" pitchFamily="34" charset="-122"/>
-                <a:cs typeface="Calibri" pitchFamily="34" charset="-120"/>
-              </a:rPr>
-              <a:t>CHAT PROMPT</a:t>
-            </a:r>
-            <a:endParaRPr lang="en-US" sz="1100" dirty="0"/>
-          </a:p>
-        </p:txBody>
-      </p:sp>
-      <p:sp>
-        <p:nvSpPr>
-          <p:cNvPr id="6" name="Text 4"/>
-          <p:cNvSpPr/>
-          <p:nvPr/>
-        </p:nvSpPr>
-        <p:spPr>
-          <a:xfrm>
-            <a:off x="457200" y="1005840"/>
-            <a:ext cx="8046720" cy="292608"/>
-          </a:xfrm>
-          <a:prstGeom prst="rect">
-            <a:avLst/>
-          </a:prstGeom>
-          <a:noFill/>
-          <a:ln/>
-        </p:spPr>
-        <p:txBody>
-          <a:bodyPr wrap="square" lIns="0" tIns="0" rIns="0" bIns="0" rtlCol="0" anchor="ctr"/>
-          <a:lstStyle/>
-          <a:p>
-            <a:pPr indent="0" marL="0">
-              <a:buNone/>
-            </a:pPr>
-            <a:r>
-              <a:rPr lang="en-US" sz="1100" b="1" spc="200" kern="0" dirty="0">
-                <a:solidFill>
-                  <a:srgbClr val="C7922C"/>
-                </a:solidFill>
-                <a:latin typeface="Calibri" pitchFamily="34" charset="0"/>
-                <a:ea typeface="Calibri" pitchFamily="34" charset="-122"/>
-                <a:cs typeface="Calibri" pitchFamily="34" charset="-120"/>
-              </a:rPr>
-              <a:t>WORD BANK — Sort these words!</a:t>
-            </a:r>
-            <a:endParaRPr lang="en-US" sz="1100" dirty="0"/>
-          </a:p>
-        </p:txBody>
-      </p:sp>
-      <p:sp>
-        <p:nvSpPr>
-          <p:cNvPr id="7" name="Shape 5"/>
-          <p:cNvSpPr/>
-          <p:nvPr/>
-        </p:nvSpPr>
-        <p:spPr>
-          <a:xfrm>
-            <a:off x="457200" y="1371600"/>
-            <a:ext cx="8229600" cy="914400"/>
-          </a:xfrm>
-          <a:prstGeom prst="roundRect">
-            <a:avLst>
-              <a:gd name="adj" fmla="val 10000"/>
+              <a:gd name="adj" fmla="val 13889"/>
             </a:avLst>
           </a:prstGeom>
           <a:solidFill>
@@ -3392,38 +3425,52 @@
       </p:sp>
       <p:sp>
         <p:nvSpPr>
-          <p:cNvPr id="8" name="Text 6"/>
-          <p:cNvSpPr/>
-          <p:nvPr/>
-        </p:nvSpPr>
-        <p:spPr>
-          <a:xfrm>
-            <a:off x="640080" y="1463040"/>
-            <a:ext cx="7863840" cy="731520"/>
-          </a:xfrm>
-          <a:prstGeom prst="rect">
-            <a:avLst/>
-          </a:prstGeom>
-          <a:noFill/>
-          <a:ln/>
-        </p:spPr>
-        <p:txBody>
-          <a:bodyPr wrap="square" lIns="0" tIns="0" rIns="0" bIns="0" rtlCol="0" anchor="ctr"/>
-          <a:lstStyle/>
-          <a:p>
-            <a:pPr algn="ctr" indent="0" marL="0">
+          <p:cNvPr id="6" name="Text 4"/>
+          <p:cNvSpPr/>
+          <p:nvPr/>
+        </p:nvSpPr>
+        <p:spPr>
+          <a:xfrm>
+            <a:off x="594360" y="1225296"/>
+            <a:ext cx="7863840" cy="402336"/>
+          </a:xfrm>
+          <a:prstGeom prst="rect">
+            <a:avLst/>
+          </a:prstGeom>
+          <a:noFill/>
+          <a:ln/>
+        </p:spPr>
+        <p:txBody>
+          <a:bodyPr wrap="square" lIns="0" tIns="0" rIns="0" bIns="0" rtlCol="0" anchor="ctr"/>
+          <a:lstStyle/>
+          <a:p>
+            <a:pPr indent="0" marL="0">
+              <a:buNone/>
+            </a:pPr>
+            <a:r>
+              <a:rPr lang="en-US" sz="1600" b="1" dirty="0">
+                <a:solidFill>
+                  <a:srgbClr val="34B76F"/>
+                </a:solidFill>
+                <a:latin typeface="Calibri" pitchFamily="34" charset="0"/>
+                <a:ea typeface="Calibri" pitchFamily="34" charset="-122"/>
+                <a:cs typeface="Calibri" pitchFamily="34" charset="-120"/>
+              </a:rPr>
+              <a:t>Flat and half an inch thick.</a:t>
+            </a:r>
+            <a:pPr indent="0" marL="0">
               <a:buNone/>
             </a:pPr>
             <a:r>
               <a:rPr lang="en-US" sz="1600" dirty="0">
                 <a:solidFill>
-                  <a:srgbClr val="0E1C42"/>
-                </a:solidFill>
-                <a:latin typeface="Calibri" pitchFamily="34" charset="0"/>
-                <a:ea typeface="Calibri" pitchFamily="34" charset="-122"/>
-                <a:cs typeface="Calibri" pitchFamily="34" charset="-120"/>
-              </a:rPr>
-              <a:t>flat     bed     not     bump     wake     home     like     huge</a:t>
+                  <a:srgbClr val="1E293B"/>
+                </a:solidFill>
+                <a:latin typeface="Calibri" pitchFamily="34" charset="0"/>
+                <a:ea typeface="Calibri" pitchFamily="34" charset="-122"/>
+                <a:cs typeface="Calibri" pitchFamily="34" charset="-120"/>
+              </a:rPr>
+              <a:t>   |   Stanley was half an inch thick.</a:t>
             </a:r>
             <a:endParaRPr lang="en-US" sz="1600" dirty="0"/>
           </a:p>
@@ -3431,22 +3478,22 @@
       </p:sp>
       <p:sp>
         <p:nvSpPr>
-          <p:cNvPr id="9" name="Shape 7"/>
-          <p:cNvSpPr/>
-          <p:nvPr/>
-        </p:nvSpPr>
-        <p:spPr>
-          <a:xfrm>
-            <a:off x="457200" y="2468880"/>
-            <a:ext cx="3794760" cy="457200"/>
+          <p:cNvPr id="7" name="Shape 5"/>
+          <p:cNvSpPr/>
+          <p:nvPr/>
+        </p:nvSpPr>
+        <p:spPr>
+          <a:xfrm>
+            <a:off x="365760" y="1810512"/>
+            <a:ext cx="8412480" cy="658368"/>
           </a:xfrm>
           <a:prstGeom prst="roundRect">
             <a:avLst>
-              <a:gd name="adj" fmla="val 20000"/>
+              <a:gd name="adj" fmla="val 13889"/>
             </a:avLst>
           </a:prstGeom>
           <a:solidFill>
-            <a:srgbClr val="F0E8FF"/>
+            <a:srgbClr val="FFFFFF"/>
           </a:solidFill>
           <a:ln/>
           <a:effectLst>
@@ -3460,61 +3507,75 @@
       </p:sp>
       <p:sp>
         <p:nvSpPr>
-          <p:cNvPr id="10" name="Text 8"/>
-          <p:cNvSpPr/>
-          <p:nvPr/>
-        </p:nvSpPr>
-        <p:spPr>
-          <a:xfrm>
-            <a:off x="548640" y="2514600"/>
-            <a:ext cx="3611880" cy="365760"/>
-          </a:xfrm>
-          <a:prstGeom prst="rect">
-            <a:avLst/>
-          </a:prstGeom>
-          <a:noFill/>
-          <a:ln/>
-        </p:spPr>
-        <p:txBody>
-          <a:bodyPr wrap="square" lIns="0" tIns="0" rIns="0" bIns="0" rtlCol="0" anchor="ctr"/>
-          <a:lstStyle/>
-          <a:p>
-            <a:pPr algn="ctr" indent="0" marL="0">
-              <a:buNone/>
-            </a:pPr>
-            <a:r>
-              <a:rPr lang="en-US" sz="1400" b="1" dirty="0">
-                <a:solidFill>
-                  <a:srgbClr val="0E1C42"/>
-                </a:solidFill>
-                <a:latin typeface="Calibri" pitchFamily="34" charset="0"/>
-                <a:ea typeface="Calibri" pitchFamily="34" charset="-122"/>
-                <a:cs typeface="Calibri" pitchFamily="34" charset="-120"/>
-              </a:rPr>
-              <a:t>closed</a:t>
-            </a:r>
-            <a:endParaRPr lang="en-US" sz="1400" dirty="0"/>
-          </a:p>
-        </p:txBody>
-      </p:sp>
-      <p:sp>
-        <p:nvSpPr>
-          <p:cNvPr id="11" name="Shape 9"/>
-          <p:cNvSpPr/>
-          <p:nvPr/>
-        </p:nvSpPr>
-        <p:spPr>
-          <a:xfrm>
-            <a:off x="4480560" y="2468880"/>
-            <a:ext cx="3794760" cy="457200"/>
+          <p:cNvPr id="8" name="Text 6"/>
+          <p:cNvSpPr/>
+          <p:nvPr/>
+        </p:nvSpPr>
+        <p:spPr>
+          <a:xfrm>
+            <a:off x="594360" y="1956816"/>
+            <a:ext cx="7863840" cy="402336"/>
+          </a:xfrm>
+          <a:prstGeom prst="rect">
+            <a:avLst/>
+          </a:prstGeom>
+          <a:noFill/>
+          <a:ln/>
+        </p:spPr>
+        <p:txBody>
+          <a:bodyPr wrap="square" lIns="0" tIns="0" rIns="0" bIns="0" rtlCol="0" anchor="ctr"/>
+          <a:lstStyle/>
+          <a:p>
+            <a:pPr indent="0" marL="0">
+              <a:buNone/>
+            </a:pPr>
+            <a:r>
+              <a:rPr lang="en-US" sz="1600" dirty="0">
+                <a:solidFill>
+                  <a:srgbClr val="1E293B"/>
+                </a:solidFill>
+                <a:latin typeface="Calibri" pitchFamily="34" charset="0"/>
+                <a:ea typeface="Calibri" pitchFamily="34" charset="-122"/>
+                <a:cs typeface="Calibri" pitchFamily="34" charset="-120"/>
+              </a:rPr>
+              <a:t>The doctor examined Stanley.   |   </a:t>
+            </a:r>
+            <a:pPr indent="0" marL="0">
+              <a:buNone/>
+            </a:pPr>
+            <a:r>
+              <a:rPr lang="en-US" sz="1600" b="1" dirty="0">
+                <a:solidFill>
+                  <a:srgbClr val="34B76F"/>
+                </a:solidFill>
+                <a:latin typeface="Calibri" pitchFamily="34" charset="0"/>
+                <a:ea typeface="Calibri" pitchFamily="34" charset="-122"/>
+                <a:cs typeface="Calibri" pitchFamily="34" charset="-120"/>
+              </a:rPr>
+              <a:t>The doctor in his office.</a:t>
+            </a:r>
+            <a:endParaRPr lang="en-US" sz="1600" dirty="0"/>
+          </a:p>
+        </p:txBody>
+      </p:sp>
+      <p:sp>
+        <p:nvSpPr>
+          <p:cNvPr id="9" name="Shape 7"/>
+          <p:cNvSpPr/>
+          <p:nvPr/>
+        </p:nvSpPr>
+        <p:spPr>
+          <a:xfrm>
+            <a:off x="365760" y="2542032"/>
+            <a:ext cx="8412480" cy="658368"/>
           </a:xfrm>
           <a:prstGeom prst="roundRect">
             <a:avLst>
-              <a:gd name="adj" fmla="val 20000"/>
+              <a:gd name="adj" fmla="val 13889"/>
             </a:avLst>
           </a:prstGeom>
           <a:solidFill>
-            <a:srgbClr val="F0E8FF"/>
+            <a:srgbClr val="FEF6E8"/>
           </a:solidFill>
           <a:ln/>
           <a:effectLst>
@@ -3528,40 +3589,175 @@
       </p:sp>
       <p:sp>
         <p:nvSpPr>
+          <p:cNvPr id="10" name="Text 8"/>
+          <p:cNvSpPr/>
+          <p:nvPr/>
+        </p:nvSpPr>
+        <p:spPr>
+          <a:xfrm>
+            <a:off x="594360" y="2688336"/>
+            <a:ext cx="7863840" cy="402336"/>
+          </a:xfrm>
+          <a:prstGeom prst="rect">
+            <a:avLst/>
+          </a:prstGeom>
+          <a:noFill/>
+          <a:ln/>
+        </p:spPr>
+        <p:txBody>
+          <a:bodyPr wrap="square" lIns="0" tIns="0" rIns="0" bIns="0" rtlCol="0" anchor="ctr"/>
+          <a:lstStyle/>
+          <a:p>
+            <a:pPr indent="0" marL="0">
+              <a:buNone/>
+            </a:pPr>
+            <a:r>
+              <a:rPr lang="en-US" sz="1600" b="1" dirty="0">
+                <a:solidFill>
+                  <a:srgbClr val="34B76F"/>
+                </a:solidFill>
+                <a:latin typeface="Calibri" pitchFamily="34" charset="0"/>
+                <a:ea typeface="Calibri" pitchFamily="34" charset="-122"/>
+                <a:cs typeface="Calibri" pitchFamily="34" charset="-120"/>
+              </a:rPr>
+              <a:t>A kite in the park.</a:t>
+            </a:r>
+            <a:pPr indent="0" marL="0">
+              <a:buNone/>
+            </a:pPr>
+            <a:r>
+              <a:rPr lang="en-US" sz="1600" dirty="0">
+                <a:solidFill>
+                  <a:srgbClr val="1E293B"/>
+                </a:solidFill>
+                <a:latin typeface="Calibri" pitchFamily="34" charset="0"/>
+                <a:ea typeface="Calibri" pitchFamily="34" charset="-122"/>
+                <a:cs typeface="Calibri" pitchFamily="34" charset="-120"/>
+              </a:rPr>
+              <a:t>   |   Stanley flew like a kite.</a:t>
+            </a:r>
+            <a:endParaRPr lang="en-US" sz="1600" dirty="0"/>
+          </a:p>
+        </p:txBody>
+      </p:sp>
+      <p:sp>
+        <p:nvSpPr>
+          <p:cNvPr id="11" name="Shape 9"/>
+          <p:cNvSpPr/>
+          <p:nvPr/>
+        </p:nvSpPr>
+        <p:spPr>
+          <a:xfrm>
+            <a:off x="365760" y="3273552"/>
+            <a:ext cx="8412480" cy="658368"/>
+          </a:xfrm>
+          <a:prstGeom prst="roundRect">
+            <a:avLst>
+              <a:gd name="adj" fmla="val 13889"/>
+            </a:avLst>
+          </a:prstGeom>
+          <a:solidFill>
+            <a:srgbClr val="FFFFFF"/>
+          </a:solidFill>
+          <a:ln/>
+          <a:effectLst>
+            <a:outerShdw sx="100000" sy="100000" kx="0" ky="0" algn="bl" rotWithShape="0" blurRad="101600" dist="38100" dir="2700000">
+              <a:srgbClr val="000000">
+                <a:alpha val="12000"/>
+              </a:srgbClr>
+            </a:outerShdw>
+          </a:effectLst>
+        </p:spPr>
+      </p:sp>
+      <p:sp>
+        <p:nvSpPr>
           <p:cNvPr id="12" name="Text 10"/>
           <p:cNvSpPr/>
           <p:nvPr/>
         </p:nvSpPr>
         <p:spPr>
           <a:xfrm>
-            <a:off x="4572000" y="2514600"/>
-            <a:ext cx="3611880" cy="365760"/>
-          </a:xfrm>
-          <a:prstGeom prst="rect">
-            <a:avLst/>
-          </a:prstGeom>
-          <a:noFill/>
-          <a:ln/>
-        </p:spPr>
-        <p:txBody>
-          <a:bodyPr wrap="square" lIns="0" tIns="0" rIns="0" bIns="0" rtlCol="0" anchor="ctr"/>
-          <a:lstStyle/>
-          <a:p>
-            <a:pPr algn="ctr" indent="0" marL="0">
-              <a:buNone/>
-            </a:pPr>
-            <a:r>
-              <a:rPr lang="en-US" sz="1400" b="1" dirty="0">
-                <a:solidFill>
-                  <a:srgbClr val="0E1C42"/>
-                </a:solidFill>
-                <a:latin typeface="Calibri" pitchFamily="34" charset="0"/>
-                <a:ea typeface="Calibri" pitchFamily="34" charset="-122"/>
-                <a:cs typeface="Calibri" pitchFamily="34" charset="-120"/>
-              </a:rPr>
-              <a:t>not closed</a:t>
-            </a:r>
-            <a:endParaRPr lang="en-US" sz="1400" dirty="0"/>
+            <a:off x="594360" y="3419856"/>
+            <a:ext cx="7863840" cy="402336"/>
+          </a:xfrm>
+          <a:prstGeom prst="rect">
+            <a:avLst/>
+          </a:prstGeom>
+          <a:noFill/>
+          <a:ln/>
+        </p:spPr>
+        <p:txBody>
+          <a:bodyPr wrap="square" lIns="0" tIns="0" rIns="0" bIns="0" rtlCol="0" anchor="ctr"/>
+          <a:lstStyle/>
+          <a:p>
+            <a:pPr indent="0" marL="0">
+              <a:buNone/>
+            </a:pPr>
+            <a:r>
+              <a:rPr lang="en-US" sz="1600" dirty="0">
+                <a:solidFill>
+                  <a:srgbClr val="1E293B"/>
+                </a:solidFill>
+                <a:latin typeface="Calibri" pitchFamily="34" charset="0"/>
+                <a:ea typeface="Calibri" pitchFamily="34" charset="-122"/>
+                <a:cs typeface="Calibri" pitchFamily="34" charset="-120"/>
+              </a:rPr>
+              <a:t>Arthur blew his brother up.   |   </a:t>
+            </a:r>
+            <a:pPr indent="0" marL="0">
+              <a:buNone/>
+            </a:pPr>
+            <a:r>
+              <a:rPr lang="en-US" sz="1600" b="1" dirty="0">
+                <a:solidFill>
+                  <a:srgbClr val="34B76F"/>
+                </a:solidFill>
+                <a:latin typeface="Calibri" pitchFamily="34" charset="0"/>
+                <a:ea typeface="Calibri" pitchFamily="34" charset="-122"/>
+                <a:cs typeface="Calibri" pitchFamily="34" charset="-120"/>
+              </a:rPr>
+              <a:t>Arthur with the bicycle pump.</a:t>
+            </a:r>
+            <a:endParaRPr lang="en-US" sz="1600" dirty="0"/>
+          </a:p>
+        </p:txBody>
+      </p:sp>
+      <p:sp>
+        <p:nvSpPr>
+          <p:cNvPr id="13" name="Text 11"/>
+          <p:cNvSpPr/>
+          <p:nvPr/>
+        </p:nvSpPr>
+        <p:spPr>
+          <a:xfrm>
+            <a:off x="365760" y="4050792"/>
+            <a:ext cx="8412480" cy="365760"/>
+          </a:xfrm>
+          <a:prstGeom prst="rect">
+            <a:avLst/>
+          </a:prstGeom>
+          <a:noFill/>
+          <a:ln/>
+        </p:spPr>
+        <p:txBody>
+          <a:bodyPr wrap="square" lIns="0" tIns="0" rIns="0" bIns="0" rtlCol="0" anchor="ctr"/>
+          <a:lstStyle/>
+          <a:p>
+            <a:pPr indent="0" marL="0">
+              <a:buNone/>
+            </a:pPr>
+            <a:r>
+              <a:rPr lang="en-US" sz="1500" b="1" dirty="0">
+                <a:solidFill>
+                  <a:srgbClr val="34B76F"/>
+                </a:solidFill>
+                <a:latin typeface="Calibri" pitchFamily="34" charset="0"/>
+                <a:ea typeface="Calibri" pitchFamily="34" charset="-122"/>
+                <a:cs typeface="Calibri" pitchFamily="34" charset="-120"/>
+              </a:rPr>
+              <a:t>✅  Answers revealed</a:t>
+            </a:r>
+            <a:endParaRPr lang="en-US" sz="1500" dirty="0"/>
           </a:p>
         </p:txBody>
       </p:sp>
@@ -3579,7 +3775,7 @@
     <p:bg>
       <p:bgPr>
         <a:solidFill>
-          <a:srgbClr val="E5F7FC"/>
+          <a:srgbClr val="F8FAFC"/>
         </a:solidFill>
       </p:bgPr>
     </p:bg>
@@ -3599,30 +3795,89 @@
       </p:grpSpPr>
       <p:sp>
         <p:nvSpPr>
-          <p:cNvPr id="2" name="Text 0"/>
-          <p:cNvSpPr/>
-          <p:nvPr/>
-        </p:nvSpPr>
-        <p:spPr>
-          <a:xfrm>
-            <a:off x="365760" y="164592"/>
-            <a:ext cx="5943600" cy="566928"/>
-          </a:xfrm>
-          <a:prstGeom prst="rect">
-            <a:avLst/>
-          </a:prstGeom>
-          <a:noFill/>
-          <a:ln/>
-        </p:spPr>
-        <p:txBody>
-          <a:bodyPr wrap="square" lIns="0" tIns="0" rIns="0" bIns="0" rtlCol="0" anchor="ctr"/>
-          <a:lstStyle/>
-          <a:p>
-            <a:pPr algn="l" indent="0" marL="0">
-              <a:buNone/>
-            </a:pPr>
-            <a:r>
-              <a:rPr lang="en-US" sz="2800" b="1" dirty="0">
+          <p:cNvPr id="2" name="Shape 0"/>
+          <p:cNvSpPr/>
+          <p:nvPr/>
+        </p:nvSpPr>
+        <p:spPr>
+          <a:xfrm>
+            <a:off x="0" y="0"/>
+            <a:ext cx="9144000" cy="566928"/>
+          </a:xfrm>
+          <a:prstGeom prst="rect">
+            <a:avLst/>
+          </a:prstGeom>
+          <a:solidFill>
+            <a:srgbClr val="0E1C42"/>
+          </a:solidFill>
+          <a:ln/>
+        </p:spPr>
+      </p:sp>
+      <p:sp>
+        <p:nvSpPr>
+          <p:cNvPr id="3" name="Text 1"/>
+          <p:cNvSpPr/>
+          <p:nvPr/>
+        </p:nvSpPr>
+        <p:spPr>
+          <a:xfrm>
+            <a:off x="365760" y="54864"/>
+            <a:ext cx="8412480" cy="457200"/>
+          </a:xfrm>
+          <a:prstGeom prst="rect">
+            <a:avLst/>
+          </a:prstGeom>
+          <a:noFill/>
+          <a:ln/>
+        </p:spPr>
+        <p:txBody>
+          <a:bodyPr wrap="square" lIns="0" tIns="0" rIns="0" bIns="0" rtlCol="0" anchor="ctr"/>
+          <a:lstStyle/>
+          <a:p>
+            <a:pPr indent="0" marL="0">
+              <a:buNone/>
+            </a:pPr>
+            <a:r>
+              <a:rPr lang="en-US" sz="2200" b="1" dirty="0">
+                <a:solidFill>
+                  <a:srgbClr val="FFFFFF"/>
+                </a:solidFill>
+                <a:latin typeface="Calibri" pitchFamily="34" charset="0"/>
+                <a:ea typeface="Calibri" pitchFamily="34" charset="-122"/>
+                <a:cs typeface="Calibri" pitchFamily="34" charset="-120"/>
+              </a:rPr>
+              <a:t>🔠  Spelling</a:t>
+            </a:r>
+            <a:endParaRPr lang="en-US" sz="2200" dirty="0"/>
+          </a:p>
+        </p:txBody>
+      </p:sp>
+      <p:sp>
+        <p:nvSpPr>
+          <p:cNvPr id="4" name="Text 2"/>
+          <p:cNvSpPr/>
+          <p:nvPr/>
+        </p:nvSpPr>
+        <p:spPr>
+          <a:xfrm>
+            <a:off x="365760" y="777240"/>
+            <a:ext cx="8229600" cy="237744"/>
+          </a:xfrm>
+          <a:prstGeom prst="rect">
+            <a:avLst/>
+          </a:prstGeom>
+          <a:noFill/>
+          <a:ln/>
+        </p:spPr>
+        <p:txBody>
+          <a:bodyPr wrap="square" lIns="0" tIns="0" rIns="0" bIns="0" rtlCol="0" anchor="ctr"/>
+          <a:lstStyle/>
+          <a:p>
+            <a:pPr indent="0" marL="0">
+              <a:buNone/>
+            </a:pPr>
+            <a:r>
+              <a:rPr lang="en-US" sz="1100" b="1" spc="100" kern="0" dirty="0">
                 <a:solidFill>
                   <a:srgbClr val="0E1C42"/>
                 </a:solidFill>
@@ -3630,116 +3885,76 @@
                 <a:ea typeface="Calibri" pitchFamily="34" charset="-122"/>
                 <a:cs typeface="Calibri" pitchFamily="34" charset="-120"/>
               </a:rPr>
-              <a:t>🔠 Spelling: Closed syllables and short vowels review — Sorted</a:t>
-            </a:r>
-            <a:endParaRPr lang="en-US" sz="2800" dirty="0"/>
-          </a:p>
-        </p:txBody>
-      </p:sp>
-      <p:sp>
-        <p:nvSpPr>
-          <p:cNvPr id="3" name="Shape 1"/>
-          <p:cNvSpPr/>
-          <p:nvPr/>
-        </p:nvSpPr>
-        <p:spPr>
-          <a:xfrm>
-            <a:off x="365760" y="749808"/>
-            <a:ext cx="8412480" cy="0"/>
-          </a:xfrm>
-          <a:prstGeom prst="line">
-            <a:avLst/>
-          </a:prstGeom>
-          <a:noFill/>
+              <a:t>CLOSED SYLLABLES AND SHORT VOWELS REVIEW</a:t>
+            </a:r>
+            <a:endParaRPr lang="en-US" sz="1100" dirty="0"/>
+          </a:p>
+        </p:txBody>
+      </p:sp>
+      <p:sp>
+        <p:nvSpPr>
+          <p:cNvPr id="5" name="Text 3"/>
+          <p:cNvSpPr/>
+          <p:nvPr/>
+        </p:nvSpPr>
+        <p:spPr>
+          <a:xfrm>
+            <a:off x="365760" y="1078992"/>
+            <a:ext cx="8229600" cy="237744"/>
+          </a:xfrm>
+          <a:prstGeom prst="rect">
+            <a:avLst/>
+          </a:prstGeom>
+          <a:noFill/>
+          <a:ln/>
+        </p:spPr>
+        <p:txBody>
+          <a:bodyPr wrap="square" lIns="0" tIns="0" rIns="0" bIns="0" rtlCol="0" anchor="ctr"/>
+          <a:lstStyle/>
+          <a:p>
+            <a:pPr indent="0" marL="0">
+              <a:buNone/>
+            </a:pPr>
+            <a:r>
+              <a:rPr lang="en-US" sz="1100" b="1" spc="100" kern="0" dirty="0">
+                <a:solidFill>
+                  <a:srgbClr val="64748B"/>
+                </a:solidFill>
+                <a:latin typeface="Calibri" pitchFamily="34" charset="0"/>
+                <a:ea typeface="Calibri" pitchFamily="34" charset="-122"/>
+                <a:cs typeface="Calibri" pitchFamily="34" charset="-120"/>
+              </a:rPr>
+              <a:t>WORD BANK</a:t>
+            </a:r>
+            <a:endParaRPr lang="en-US" sz="1100" dirty="0"/>
+          </a:p>
+        </p:txBody>
+      </p:sp>
+      <p:sp>
+        <p:nvSpPr>
+          <p:cNvPr id="6" name="Shape 4"/>
+          <p:cNvSpPr/>
+          <p:nvPr/>
+        </p:nvSpPr>
+        <p:spPr>
+          <a:xfrm>
+            <a:off x="365760" y="1353312"/>
+            <a:ext cx="8412480" cy="1005840"/>
+          </a:xfrm>
+          <a:prstGeom prst="roundRect">
+            <a:avLst>
+              <a:gd name="adj" fmla="val 9091"/>
+            </a:avLst>
+          </a:prstGeom>
+          <a:solidFill>
+            <a:srgbClr val="FFFFFF"/>
+          </a:solidFill>
           <a:ln w="19050">
             <a:solidFill>
-              <a:srgbClr val="55C8E8"/>
+              <a:srgbClr val="0E1C42"/>
             </a:solidFill>
             <a:prstDash val="solid"/>
           </a:ln>
-        </p:spPr>
-      </p:sp>
-      <p:sp>
-        <p:nvSpPr>
-          <p:cNvPr id="4" name="Shape 2"/>
-          <p:cNvSpPr/>
-          <p:nvPr/>
-        </p:nvSpPr>
-        <p:spPr>
-          <a:xfrm>
-            <a:off x="6492240" y="173736"/>
-            <a:ext cx="2286000" cy="502920"/>
-          </a:xfrm>
-          <a:prstGeom prst="roundRect">
-            <a:avLst>
-              <a:gd name="adj" fmla="val 21818"/>
-            </a:avLst>
-          </a:prstGeom>
-          <a:solidFill>
-            <a:srgbClr val="55C8E8"/>
-          </a:solidFill>
-          <a:ln/>
-        </p:spPr>
-      </p:sp>
-      <p:sp>
-        <p:nvSpPr>
-          <p:cNvPr id="5" name="Text 3"/>
-          <p:cNvSpPr/>
-          <p:nvPr/>
-        </p:nvSpPr>
-        <p:spPr>
-          <a:xfrm>
-            <a:off x="6492240" y="173736"/>
-            <a:ext cx="2286000" cy="502920"/>
-          </a:xfrm>
-          <a:prstGeom prst="rect">
-            <a:avLst/>
-          </a:prstGeom>
-          <a:noFill/>
-          <a:ln/>
-        </p:spPr>
-        <p:txBody>
-          <a:bodyPr wrap="square" lIns="0" tIns="0" rIns="0" bIns="0" rtlCol="0" anchor="ctr"/>
-          <a:lstStyle/>
-          <a:p>
-            <a:pPr algn="ctr" indent="0" marL="0">
-              <a:buNone/>
-            </a:pPr>
-            <a:r>
-              <a:rPr lang="en-US" sz="1100" b="1" dirty="0">
-                <a:solidFill>
-                  <a:srgbClr val="0E1C42"/>
-                </a:solidFill>
-                <a:latin typeface="Calibri" pitchFamily="34" charset="0"/>
-                <a:ea typeface="Calibri" pitchFamily="34" charset="-122"/>
-                <a:cs typeface="Calibri" pitchFamily="34" charset="-120"/>
-              </a:rPr>
-              <a:t>CHAT PROMPT</a:t>
-            </a:r>
-            <a:endParaRPr lang="en-US" sz="1100" dirty="0"/>
-          </a:p>
-        </p:txBody>
-      </p:sp>
-      <p:sp>
-        <p:nvSpPr>
-          <p:cNvPr id="6" name="Shape 4"/>
-          <p:cNvSpPr/>
-          <p:nvPr/>
-        </p:nvSpPr>
-        <p:spPr>
-          <a:xfrm>
-            <a:off x="457200" y="1005840"/>
-            <a:ext cx="3794760" cy="457200"/>
-          </a:xfrm>
-          <a:prstGeom prst="roundRect">
-            <a:avLst>
-              <a:gd name="adj" fmla="val 20000"/>
-            </a:avLst>
-          </a:prstGeom>
-          <a:solidFill>
-            <a:srgbClr val="F0E8FF"/>
-          </a:solidFill>
-          <a:ln/>
           <a:effectLst>
             <a:outerShdw sx="100000" sy="100000" kx="0" ky="0" algn="bl" rotWithShape="0" blurRad="101600" dist="38100" dir="2700000">
               <a:srgbClr val="000000">
@@ -3757,24 +3972,24 @@
         </p:nvSpPr>
         <p:spPr>
           <a:xfrm>
-            <a:off x="548640" y="1051560"/>
-            <a:ext cx="3611880" cy="365760"/>
-          </a:xfrm>
-          <a:prstGeom prst="rect">
-            <a:avLst/>
-          </a:prstGeom>
-          <a:noFill/>
-          <a:ln/>
-        </p:spPr>
-        <p:txBody>
-          <a:bodyPr wrap="square" lIns="0" tIns="0" rIns="0" bIns="0" rtlCol="0" anchor="ctr"/>
-          <a:lstStyle/>
-          <a:p>
-            <a:pPr algn="ctr" indent="0" marL="0">
-              <a:buNone/>
-            </a:pPr>
-            <a:r>
-              <a:rPr lang="en-US" sz="1400" b="1" dirty="0">
+            <a:off x="594360" y="1481328"/>
+            <a:ext cx="7955280" cy="749808"/>
+          </a:xfrm>
+          <a:prstGeom prst="rect">
+            <a:avLst/>
+          </a:prstGeom>
+          <a:noFill/>
+          <a:ln/>
+        </p:spPr>
+        <p:txBody>
+          <a:bodyPr wrap="square" lIns="0" tIns="0" rIns="0" bIns="0" rtlCol="0" anchor="ctr"/>
+          <a:lstStyle/>
+          <a:p>
+            <a:pPr indent="0" marL="0">
+              <a:buNone/>
+            </a:pPr>
+            <a:r>
+              <a:rPr lang="en-US" sz="1700" dirty="0">
                 <a:solidFill>
                   <a:srgbClr val="0E1C42"/>
                 </a:solidFill>
@@ -3782,9 +3997,9 @@
                 <a:ea typeface="Calibri" pitchFamily="34" charset="-122"/>
                 <a:cs typeface="Calibri" pitchFamily="34" charset="-120"/>
               </a:rPr>
-              <a:t>closed</a:t>
-            </a:r>
-            <a:endParaRPr lang="en-US" sz="1400" dirty="0"/>
+              <a:t>flat   ·   bed   ·   not   ·   bump   ·   wake   ·   home   ·   like   ·   huge</a:t>
+            </a:r>
+            <a:endParaRPr lang="en-US" sz="1700" dirty="0"/>
           </a:p>
         </p:txBody>
       </p:sp>
@@ -3796,375 +4011,34 @@
         </p:nvSpPr>
         <p:spPr>
           <a:xfrm>
-            <a:off x="548640" y="1554480"/>
-            <a:ext cx="3611880" cy="320040"/>
-          </a:xfrm>
-          <a:prstGeom prst="rect">
-            <a:avLst/>
-          </a:prstGeom>
-          <a:noFill/>
-          <a:ln/>
-        </p:spPr>
-        <p:txBody>
-          <a:bodyPr wrap="square" lIns="0" tIns="0" rIns="0" bIns="0" rtlCol="0" anchor="ctr"/>
-          <a:lstStyle/>
-          <a:p>
-            <a:pPr algn="ctr" indent="0" marL="0">
-              <a:buNone/>
-            </a:pPr>
-            <a:r>
-              <a:rPr lang="en-US" sz="1400" b="1" dirty="0">
-                <a:solidFill>
-                  <a:srgbClr val="34B76F"/>
-                </a:solidFill>
-                <a:latin typeface="Calibri" pitchFamily="34" charset="0"/>
-                <a:ea typeface="Calibri" pitchFamily="34" charset="-122"/>
-                <a:cs typeface="Calibri" pitchFamily="34" charset="-120"/>
-              </a:rPr>
-              <a:t>flat</a:t>
-            </a:r>
-            <a:endParaRPr lang="en-US" sz="1400" dirty="0"/>
-          </a:p>
-        </p:txBody>
-      </p:sp>
-      <p:sp>
-        <p:nvSpPr>
-          <p:cNvPr id="9" name="Text 7"/>
-          <p:cNvSpPr/>
-          <p:nvPr/>
-        </p:nvSpPr>
-        <p:spPr>
-          <a:xfrm>
-            <a:off x="548640" y="1901952"/>
-            <a:ext cx="3611880" cy="320040"/>
-          </a:xfrm>
-          <a:prstGeom prst="rect">
-            <a:avLst/>
-          </a:prstGeom>
-          <a:noFill/>
-          <a:ln/>
-        </p:spPr>
-        <p:txBody>
-          <a:bodyPr wrap="square" lIns="0" tIns="0" rIns="0" bIns="0" rtlCol="0" anchor="ctr"/>
-          <a:lstStyle/>
-          <a:p>
-            <a:pPr algn="ctr" indent="0" marL="0">
-              <a:buNone/>
-            </a:pPr>
-            <a:r>
-              <a:rPr lang="en-US" sz="1400" b="1" dirty="0">
-                <a:solidFill>
-                  <a:srgbClr val="34B76F"/>
-                </a:solidFill>
-                <a:latin typeface="Calibri" pitchFamily="34" charset="0"/>
-                <a:ea typeface="Calibri" pitchFamily="34" charset="-122"/>
-                <a:cs typeface="Calibri" pitchFamily="34" charset="-120"/>
-              </a:rPr>
-              <a:t>bed</a:t>
-            </a:r>
-            <a:endParaRPr lang="en-US" sz="1400" dirty="0"/>
-          </a:p>
-        </p:txBody>
-      </p:sp>
-      <p:sp>
-        <p:nvSpPr>
-          <p:cNvPr id="10" name="Text 8"/>
-          <p:cNvSpPr/>
-          <p:nvPr/>
-        </p:nvSpPr>
-        <p:spPr>
-          <a:xfrm>
-            <a:off x="548640" y="2249424"/>
-            <a:ext cx="3611880" cy="320040"/>
-          </a:xfrm>
-          <a:prstGeom prst="rect">
-            <a:avLst/>
-          </a:prstGeom>
-          <a:noFill/>
-          <a:ln/>
-        </p:spPr>
-        <p:txBody>
-          <a:bodyPr wrap="square" lIns="0" tIns="0" rIns="0" bIns="0" rtlCol="0" anchor="ctr"/>
-          <a:lstStyle/>
-          <a:p>
-            <a:pPr algn="ctr" indent="0" marL="0">
-              <a:buNone/>
-            </a:pPr>
-            <a:r>
-              <a:rPr lang="en-US" sz="1400" b="1" dirty="0">
-                <a:solidFill>
-                  <a:srgbClr val="34B76F"/>
-                </a:solidFill>
-                <a:latin typeface="Calibri" pitchFamily="34" charset="0"/>
-                <a:ea typeface="Calibri" pitchFamily="34" charset="-122"/>
-                <a:cs typeface="Calibri" pitchFamily="34" charset="-120"/>
-              </a:rPr>
-              <a:t>not</a:t>
-            </a:r>
-            <a:endParaRPr lang="en-US" sz="1400" dirty="0"/>
-          </a:p>
-        </p:txBody>
-      </p:sp>
-      <p:sp>
-        <p:nvSpPr>
-          <p:cNvPr id="11" name="Text 9"/>
-          <p:cNvSpPr/>
-          <p:nvPr/>
-        </p:nvSpPr>
-        <p:spPr>
-          <a:xfrm>
-            <a:off x="548640" y="2596896"/>
-            <a:ext cx="3611880" cy="320040"/>
-          </a:xfrm>
-          <a:prstGeom prst="rect">
-            <a:avLst/>
-          </a:prstGeom>
-          <a:noFill/>
-          <a:ln/>
-        </p:spPr>
-        <p:txBody>
-          <a:bodyPr wrap="square" lIns="0" tIns="0" rIns="0" bIns="0" rtlCol="0" anchor="ctr"/>
-          <a:lstStyle/>
-          <a:p>
-            <a:pPr algn="ctr" indent="0" marL="0">
-              <a:buNone/>
-            </a:pPr>
-            <a:r>
-              <a:rPr lang="en-US" sz="1400" b="1" dirty="0">
-                <a:solidFill>
-                  <a:srgbClr val="34B76F"/>
-                </a:solidFill>
-                <a:latin typeface="Calibri" pitchFamily="34" charset="0"/>
-                <a:ea typeface="Calibri" pitchFamily="34" charset="-122"/>
-                <a:cs typeface="Calibri" pitchFamily="34" charset="-120"/>
-              </a:rPr>
-              <a:t>bump</a:t>
-            </a:r>
-            <a:endParaRPr lang="en-US" sz="1400" dirty="0"/>
-          </a:p>
-        </p:txBody>
-      </p:sp>
-      <p:sp>
-        <p:nvSpPr>
-          <p:cNvPr id="12" name="Shape 10"/>
-          <p:cNvSpPr/>
-          <p:nvPr/>
-        </p:nvSpPr>
-        <p:spPr>
-          <a:xfrm>
-            <a:off x="4480560" y="1005840"/>
-            <a:ext cx="3794760" cy="457200"/>
-          </a:xfrm>
-          <a:prstGeom prst="roundRect">
-            <a:avLst>
-              <a:gd name="adj" fmla="val 20000"/>
-            </a:avLst>
-          </a:prstGeom>
-          <a:solidFill>
-            <a:srgbClr val="F0E8FF"/>
-          </a:solidFill>
-          <a:ln/>
-          <a:effectLst>
-            <a:outerShdw sx="100000" sy="100000" kx="0" ky="0" algn="bl" rotWithShape="0" blurRad="101600" dist="38100" dir="2700000">
-              <a:srgbClr val="000000">
-                <a:alpha val="12000"/>
-              </a:srgbClr>
-            </a:outerShdw>
-          </a:effectLst>
-        </p:spPr>
-      </p:sp>
-      <p:sp>
-        <p:nvSpPr>
-          <p:cNvPr id="13" name="Text 11"/>
-          <p:cNvSpPr/>
-          <p:nvPr/>
-        </p:nvSpPr>
-        <p:spPr>
-          <a:xfrm>
-            <a:off x="4572000" y="1051560"/>
-            <a:ext cx="3611880" cy="365760"/>
-          </a:xfrm>
-          <a:prstGeom prst="rect">
-            <a:avLst/>
-          </a:prstGeom>
-          <a:noFill/>
-          <a:ln/>
-        </p:spPr>
-        <p:txBody>
-          <a:bodyPr wrap="square" lIns="0" tIns="0" rIns="0" bIns="0" rtlCol="0" anchor="ctr"/>
-          <a:lstStyle/>
-          <a:p>
-            <a:pPr algn="ctr" indent="0" marL="0">
-              <a:buNone/>
-            </a:pPr>
-            <a:r>
-              <a:rPr lang="en-US" sz="1400" b="1" dirty="0">
-                <a:solidFill>
-                  <a:srgbClr val="0E1C42"/>
-                </a:solidFill>
-                <a:latin typeface="Calibri" pitchFamily="34" charset="0"/>
-                <a:ea typeface="Calibri" pitchFamily="34" charset="-122"/>
-                <a:cs typeface="Calibri" pitchFamily="34" charset="-120"/>
-              </a:rPr>
-              <a:t>not closed</a:t>
-            </a:r>
-            <a:endParaRPr lang="en-US" sz="1400" dirty="0"/>
-          </a:p>
-        </p:txBody>
-      </p:sp>
-      <p:sp>
-        <p:nvSpPr>
-          <p:cNvPr id="14" name="Text 12"/>
-          <p:cNvSpPr/>
-          <p:nvPr/>
-        </p:nvSpPr>
-        <p:spPr>
-          <a:xfrm>
-            <a:off x="4572000" y="1554480"/>
-            <a:ext cx="3611880" cy="320040"/>
-          </a:xfrm>
-          <a:prstGeom prst="rect">
-            <a:avLst/>
-          </a:prstGeom>
-          <a:noFill/>
-          <a:ln/>
-        </p:spPr>
-        <p:txBody>
-          <a:bodyPr wrap="square" lIns="0" tIns="0" rIns="0" bIns="0" rtlCol="0" anchor="ctr"/>
-          <a:lstStyle/>
-          <a:p>
-            <a:pPr algn="ctr" indent="0" marL="0">
-              <a:buNone/>
-            </a:pPr>
-            <a:r>
-              <a:rPr lang="en-US" sz="1400" b="1" dirty="0">
-                <a:solidFill>
-                  <a:srgbClr val="34B76F"/>
-                </a:solidFill>
-                <a:latin typeface="Calibri" pitchFamily="34" charset="0"/>
-                <a:ea typeface="Calibri" pitchFamily="34" charset="-122"/>
-                <a:cs typeface="Calibri" pitchFamily="34" charset="-120"/>
-              </a:rPr>
-              <a:t>wake</a:t>
-            </a:r>
-            <a:endParaRPr lang="en-US" sz="1400" dirty="0"/>
-          </a:p>
-        </p:txBody>
-      </p:sp>
-      <p:sp>
-        <p:nvSpPr>
-          <p:cNvPr id="15" name="Text 13"/>
-          <p:cNvSpPr/>
-          <p:nvPr/>
-        </p:nvSpPr>
-        <p:spPr>
-          <a:xfrm>
-            <a:off x="4572000" y="1901952"/>
-            <a:ext cx="3611880" cy="320040"/>
-          </a:xfrm>
-          <a:prstGeom prst="rect">
-            <a:avLst/>
-          </a:prstGeom>
-          <a:noFill/>
-          <a:ln/>
-        </p:spPr>
-        <p:txBody>
-          <a:bodyPr wrap="square" lIns="0" tIns="0" rIns="0" bIns="0" rtlCol="0" anchor="ctr"/>
-          <a:lstStyle/>
-          <a:p>
-            <a:pPr algn="ctr" indent="0" marL="0">
-              <a:buNone/>
-            </a:pPr>
-            <a:r>
-              <a:rPr lang="en-US" sz="1400" b="1" dirty="0">
-                <a:solidFill>
-                  <a:srgbClr val="34B76F"/>
-                </a:solidFill>
-                <a:latin typeface="Calibri" pitchFamily="34" charset="0"/>
-                <a:ea typeface="Calibri" pitchFamily="34" charset="-122"/>
-                <a:cs typeface="Calibri" pitchFamily="34" charset="-120"/>
-              </a:rPr>
-              <a:t>home</a:t>
-            </a:r>
-            <a:endParaRPr lang="en-US" sz="1400" dirty="0"/>
-          </a:p>
-        </p:txBody>
-      </p:sp>
-      <p:sp>
-        <p:nvSpPr>
-          <p:cNvPr id="16" name="Text 14"/>
-          <p:cNvSpPr/>
-          <p:nvPr/>
-        </p:nvSpPr>
-        <p:spPr>
-          <a:xfrm>
-            <a:off x="4572000" y="2249424"/>
-            <a:ext cx="3611880" cy="320040"/>
-          </a:xfrm>
-          <a:prstGeom prst="rect">
-            <a:avLst/>
-          </a:prstGeom>
-          <a:noFill/>
-          <a:ln/>
-        </p:spPr>
-        <p:txBody>
-          <a:bodyPr wrap="square" lIns="0" tIns="0" rIns="0" bIns="0" rtlCol="0" anchor="ctr"/>
-          <a:lstStyle/>
-          <a:p>
-            <a:pPr algn="ctr" indent="0" marL="0">
-              <a:buNone/>
-            </a:pPr>
-            <a:r>
-              <a:rPr lang="en-US" sz="1400" b="1" dirty="0">
-                <a:solidFill>
-                  <a:srgbClr val="34B76F"/>
-                </a:solidFill>
-                <a:latin typeface="Calibri" pitchFamily="34" charset="0"/>
-                <a:ea typeface="Calibri" pitchFamily="34" charset="-122"/>
-                <a:cs typeface="Calibri" pitchFamily="34" charset="-120"/>
-              </a:rPr>
-              <a:t>like</a:t>
-            </a:r>
-            <a:endParaRPr lang="en-US" sz="1400" dirty="0"/>
-          </a:p>
-        </p:txBody>
-      </p:sp>
-      <p:sp>
-        <p:nvSpPr>
-          <p:cNvPr id="17" name="Text 15"/>
-          <p:cNvSpPr/>
-          <p:nvPr/>
-        </p:nvSpPr>
-        <p:spPr>
-          <a:xfrm>
-            <a:off x="4572000" y="2596896"/>
-            <a:ext cx="3611880" cy="320040"/>
-          </a:xfrm>
-          <a:prstGeom prst="rect">
-            <a:avLst/>
-          </a:prstGeom>
-          <a:noFill/>
-          <a:ln/>
-        </p:spPr>
-        <p:txBody>
-          <a:bodyPr wrap="square" lIns="0" tIns="0" rIns="0" bIns="0" rtlCol="0" anchor="ctr"/>
-          <a:lstStyle/>
-          <a:p>
-            <a:pPr algn="ctr" indent="0" marL="0">
-              <a:buNone/>
-            </a:pPr>
-            <a:r>
-              <a:rPr lang="en-US" sz="1400" b="1" dirty="0">
-                <a:solidFill>
-                  <a:srgbClr val="34B76F"/>
-                </a:solidFill>
-                <a:latin typeface="Calibri" pitchFamily="34" charset="0"/>
-                <a:ea typeface="Calibri" pitchFamily="34" charset="-122"/>
-                <a:cs typeface="Calibri" pitchFamily="34" charset="-120"/>
-              </a:rPr>
-              <a:t>huge</a:t>
-            </a:r>
-            <a:endParaRPr lang="en-US" sz="1400" dirty="0"/>
+            <a:off x="365760" y="2514600"/>
+            <a:ext cx="8412480" cy="457200"/>
+          </a:xfrm>
+          <a:prstGeom prst="rect">
+            <a:avLst/>
+          </a:prstGeom>
+          <a:noFill/>
+          <a:ln/>
+        </p:spPr>
+        <p:txBody>
+          <a:bodyPr wrap="square" lIns="0" tIns="0" rIns="0" bIns="0" rtlCol="0" anchor="ctr"/>
+          <a:lstStyle/>
+          <a:p>
+            <a:pPr indent="0" marL="0">
+              <a:buNone/>
+            </a:pPr>
+            <a:r>
+              <a:rPr lang="en-US" sz="1500" i="1" dirty="0">
+                <a:solidFill>
+                  <a:srgbClr val="64748B"/>
+                </a:solidFill>
+                <a:latin typeface="Calibri" pitchFamily="34" charset="0"/>
+                <a:ea typeface="Calibri" pitchFamily="34" charset="-122"/>
+                <a:cs typeface="Calibri" pitchFamily="34" charset="-120"/>
+              </a:rPr>
+              <a:t>Which column does each word belong in?  Columns: closed  |  not closed</a:t>
+            </a:r>
+            <a:endParaRPr lang="en-US" sz="1500" dirty="0"/>
           </a:p>
         </p:txBody>
       </p:sp>
@@ -4182,7 +4056,7 @@
     <p:bg>
       <p:bgPr>
         <a:solidFill>
-          <a:srgbClr val="FFFFFF"/>
+          <a:srgbClr val="F8FAFC"/>
         </a:solidFill>
       </p:bgPr>
     </p:bg>
@@ -4202,30 +4076,89 @@
       </p:grpSpPr>
       <p:sp>
         <p:nvSpPr>
-          <p:cNvPr id="2" name="Text 0"/>
-          <p:cNvSpPr/>
-          <p:nvPr/>
-        </p:nvSpPr>
-        <p:spPr>
-          <a:xfrm>
-            <a:off x="365760" y="164592"/>
-            <a:ext cx="8412480" cy="566928"/>
-          </a:xfrm>
-          <a:prstGeom prst="rect">
-            <a:avLst/>
-          </a:prstGeom>
-          <a:noFill/>
-          <a:ln/>
-        </p:spPr>
-        <p:txBody>
-          <a:bodyPr wrap="square" lIns="0" tIns="0" rIns="0" bIns="0" rtlCol="0" anchor="ctr"/>
-          <a:lstStyle/>
-          <a:p>
-            <a:pPr algn="l" indent="0" marL="0">
-              <a:buNone/>
-            </a:pPr>
-            <a:r>
-              <a:rPr lang="en-US" sz="2800" b="1" dirty="0">
+          <p:cNvPr id="2" name="Shape 0"/>
+          <p:cNvSpPr/>
+          <p:nvPr/>
+        </p:nvSpPr>
+        <p:spPr>
+          <a:xfrm>
+            <a:off x="0" y="0"/>
+            <a:ext cx="9144000" cy="566928"/>
+          </a:xfrm>
+          <a:prstGeom prst="rect">
+            <a:avLst/>
+          </a:prstGeom>
+          <a:solidFill>
+            <a:srgbClr val="0E1C42"/>
+          </a:solidFill>
+          <a:ln/>
+        </p:spPr>
+      </p:sp>
+      <p:sp>
+        <p:nvSpPr>
+          <p:cNvPr id="3" name="Text 1"/>
+          <p:cNvSpPr/>
+          <p:nvPr/>
+        </p:nvSpPr>
+        <p:spPr>
+          <a:xfrm>
+            <a:off x="365760" y="54864"/>
+            <a:ext cx="8412480" cy="457200"/>
+          </a:xfrm>
+          <a:prstGeom prst="rect">
+            <a:avLst/>
+          </a:prstGeom>
+          <a:noFill/>
+          <a:ln/>
+        </p:spPr>
+        <p:txBody>
+          <a:bodyPr wrap="square" lIns="0" tIns="0" rIns="0" bIns="0" rtlCol="0" anchor="ctr"/>
+          <a:lstStyle/>
+          <a:p>
+            <a:pPr indent="0" marL="0">
+              <a:buNone/>
+            </a:pPr>
+            <a:r>
+              <a:rPr lang="en-US" sz="2200" b="1" dirty="0">
+                <a:solidFill>
+                  <a:srgbClr val="FFFFFF"/>
+                </a:solidFill>
+                <a:latin typeface="Calibri" pitchFamily="34" charset="0"/>
+                <a:ea typeface="Calibri" pitchFamily="34" charset="-122"/>
+                <a:cs typeface="Calibri" pitchFamily="34" charset="-120"/>
+              </a:rPr>
+              <a:t>🔠  Spelling</a:t>
+            </a:r>
+            <a:endParaRPr lang="en-US" sz="2200" dirty="0"/>
+          </a:p>
+        </p:txBody>
+      </p:sp>
+      <p:sp>
+        <p:nvSpPr>
+          <p:cNvPr id="4" name="Text 2"/>
+          <p:cNvSpPr/>
+          <p:nvPr/>
+        </p:nvSpPr>
+        <p:spPr>
+          <a:xfrm>
+            <a:off x="365760" y="777240"/>
+            <a:ext cx="8229600" cy="237744"/>
+          </a:xfrm>
+          <a:prstGeom prst="rect">
+            <a:avLst/>
+          </a:prstGeom>
+          <a:noFill/>
+          <a:ln/>
+        </p:spPr>
+        <p:txBody>
+          <a:bodyPr wrap="square" lIns="0" tIns="0" rIns="0" bIns="0" rtlCol="0" anchor="ctr"/>
+          <a:lstStyle/>
+          <a:p>
+            <a:pPr indent="0" marL="0">
+              <a:buNone/>
+            </a:pPr>
+            <a:r>
+              <a:rPr lang="en-US" sz="1100" b="1" spc="100" kern="0" dirty="0">
                 <a:solidFill>
                   <a:srgbClr val="0E1C42"/>
                 </a:solidFill>
@@ -4233,34 +4166,371 @@
                 <a:ea typeface="Calibri" pitchFamily="34" charset="-122"/>
                 <a:cs typeface="Calibri" pitchFamily="34" charset="-120"/>
               </a:rPr>
-              <a:t>📕 Read: Chapter 1</a:t>
-            </a:r>
-            <a:endParaRPr lang="en-US" sz="2800" dirty="0"/>
-          </a:p>
-        </p:txBody>
-      </p:sp>
-      <p:sp>
-        <p:nvSpPr>
-          <p:cNvPr id="3" name="Shape 1"/>
-          <p:cNvSpPr/>
-          <p:nvPr/>
-        </p:nvSpPr>
-        <p:spPr>
-          <a:xfrm>
-            <a:off x="365760" y="749808"/>
-            <a:ext cx="8412480" cy="0"/>
-          </a:xfrm>
-          <a:prstGeom prst="line">
-            <a:avLst/>
-          </a:prstGeom>
-          <a:noFill/>
-          <a:ln w="19050">
-            <a:solidFill>
-              <a:srgbClr val="55C8E8"/>
-            </a:solidFill>
-            <a:prstDash val="solid"/>
-          </a:ln>
-        </p:spPr>
+              <a:t>CLOSED SYLLABLES AND SHORT VOWELS REVIEW</a:t>
+            </a:r>
+            <a:endParaRPr lang="en-US" sz="1100" dirty="0"/>
+          </a:p>
+        </p:txBody>
+      </p:sp>
+      <p:sp>
+        <p:nvSpPr>
+          <p:cNvPr id="5" name="Shape 3"/>
+          <p:cNvSpPr/>
+          <p:nvPr/>
+        </p:nvSpPr>
+        <p:spPr>
+          <a:xfrm>
+            <a:off x="411480" y="1078992"/>
+            <a:ext cx="4114800" cy="457200"/>
+          </a:xfrm>
+          <a:prstGeom prst="roundRect">
+            <a:avLst>
+              <a:gd name="adj" fmla="val 16000"/>
+            </a:avLst>
+          </a:prstGeom>
+          <a:solidFill>
+            <a:srgbClr val="0E1C42"/>
+          </a:solidFill>
+          <a:ln/>
+        </p:spPr>
+      </p:sp>
+      <p:sp>
+        <p:nvSpPr>
+          <p:cNvPr id="6" name="Text 4"/>
+          <p:cNvSpPr/>
+          <p:nvPr/>
+        </p:nvSpPr>
+        <p:spPr>
+          <a:xfrm>
+            <a:off x="457200" y="1133856"/>
+            <a:ext cx="4023360" cy="347472"/>
+          </a:xfrm>
+          <a:prstGeom prst="rect">
+            <a:avLst/>
+          </a:prstGeom>
+          <a:noFill/>
+          <a:ln/>
+        </p:spPr>
+        <p:txBody>
+          <a:bodyPr wrap="square" lIns="0" tIns="0" rIns="0" bIns="0" rtlCol="0" anchor="ctr"/>
+          <a:lstStyle/>
+          <a:p>
+            <a:pPr algn="ctr" indent="0" marL="0">
+              <a:buNone/>
+            </a:pPr>
+            <a:r>
+              <a:rPr lang="en-US" sz="1300" b="1" dirty="0">
+                <a:solidFill>
+                  <a:srgbClr val="FFFFFF"/>
+                </a:solidFill>
+                <a:latin typeface="Calibri" pitchFamily="34" charset="0"/>
+                <a:ea typeface="Calibri" pitchFamily="34" charset="-122"/>
+                <a:cs typeface="Calibri" pitchFamily="34" charset="-120"/>
+              </a:rPr>
+              <a:t>closed</a:t>
+            </a:r>
+            <a:endParaRPr lang="en-US" sz="1300" dirty="0"/>
+          </a:p>
+        </p:txBody>
+      </p:sp>
+      <p:sp>
+        <p:nvSpPr>
+          <p:cNvPr id="7" name="Shape 5"/>
+          <p:cNvSpPr/>
+          <p:nvPr/>
+        </p:nvSpPr>
+        <p:spPr>
+          <a:xfrm>
+            <a:off x="411480" y="1591056"/>
+            <a:ext cx="4114800" cy="2103120"/>
+          </a:xfrm>
+          <a:prstGeom prst="roundRect">
+            <a:avLst>
+              <a:gd name="adj" fmla="val 4348"/>
+            </a:avLst>
+          </a:prstGeom>
+          <a:solidFill>
+            <a:srgbClr val="FFFFFF"/>
+          </a:solidFill>
+          <a:ln/>
+          <a:effectLst>
+            <a:outerShdw sx="100000" sy="100000" kx="0" ky="0" algn="bl" rotWithShape="0" blurRad="101600" dist="38100" dir="2700000">
+              <a:srgbClr val="000000">
+                <a:alpha val="12000"/>
+              </a:srgbClr>
+            </a:outerShdw>
+          </a:effectLst>
+        </p:spPr>
+      </p:sp>
+      <p:sp>
+        <p:nvSpPr>
+          <p:cNvPr id="8" name="Text 6"/>
+          <p:cNvSpPr/>
+          <p:nvPr/>
+        </p:nvSpPr>
+        <p:spPr>
+          <a:xfrm>
+            <a:off x="502920" y="1700784"/>
+            <a:ext cx="3931920" cy="1883664"/>
+          </a:xfrm>
+          <a:prstGeom prst="rect">
+            <a:avLst/>
+          </a:prstGeom>
+          <a:noFill/>
+          <a:ln/>
+        </p:spPr>
+        <p:txBody>
+          <a:bodyPr wrap="square" lIns="0" tIns="0" rIns="0" bIns="0" rtlCol="0" anchor="ctr"/>
+          <a:lstStyle/>
+          <a:p>
+            <a:pPr algn="ctr" indent="0" marL="0">
+              <a:buNone/>
+            </a:pPr>
+            <a:r>
+              <a:rPr lang="en-US" sz="1400" dirty="0">
+                <a:solidFill>
+                  <a:srgbClr val="1E293B"/>
+                </a:solidFill>
+                <a:latin typeface="Calibri" pitchFamily="34" charset="0"/>
+                <a:ea typeface="Calibri" pitchFamily="34" charset="-122"/>
+                <a:cs typeface="Calibri" pitchFamily="34" charset="-120"/>
+              </a:rPr>
+              <a:t>flat</a:t>
+            </a:r>
+            <a:endParaRPr lang="en-US" sz="1400" dirty="0"/>
+          </a:p>
+          <a:p>
+            <a:pPr algn="ctr" indent="0" marL="0">
+              <a:buNone/>
+            </a:pPr>
+            <a:r>
+              <a:rPr lang="en-US" sz="1400" dirty="0">
+                <a:solidFill>
+                  <a:srgbClr val="1E293B"/>
+                </a:solidFill>
+                <a:latin typeface="Calibri" pitchFamily="34" charset="0"/>
+                <a:ea typeface="Calibri" pitchFamily="34" charset="-122"/>
+                <a:cs typeface="Calibri" pitchFamily="34" charset="-120"/>
+              </a:rPr>
+              <a:t>bed</a:t>
+            </a:r>
+            <a:endParaRPr lang="en-US" sz="1400" dirty="0"/>
+          </a:p>
+          <a:p>
+            <a:pPr algn="ctr" indent="0" marL="0">
+              <a:buNone/>
+            </a:pPr>
+            <a:r>
+              <a:rPr lang="en-US" sz="1400" dirty="0">
+                <a:solidFill>
+                  <a:srgbClr val="1E293B"/>
+                </a:solidFill>
+                <a:latin typeface="Calibri" pitchFamily="34" charset="0"/>
+                <a:ea typeface="Calibri" pitchFamily="34" charset="-122"/>
+                <a:cs typeface="Calibri" pitchFamily="34" charset="-120"/>
+              </a:rPr>
+              <a:t>not</a:t>
+            </a:r>
+            <a:endParaRPr lang="en-US" sz="1400" dirty="0"/>
+          </a:p>
+          <a:p>
+            <a:pPr algn="ctr" indent="0" marL="0">
+              <a:buNone/>
+            </a:pPr>
+            <a:r>
+              <a:rPr lang="en-US" sz="1400" dirty="0">
+                <a:solidFill>
+                  <a:srgbClr val="1E293B"/>
+                </a:solidFill>
+                <a:latin typeface="Calibri" pitchFamily="34" charset="0"/>
+                <a:ea typeface="Calibri" pitchFamily="34" charset="-122"/>
+                <a:cs typeface="Calibri" pitchFamily="34" charset="-120"/>
+              </a:rPr>
+              <a:t>bump</a:t>
+            </a:r>
+            <a:endParaRPr lang="en-US" sz="1400" dirty="0"/>
+          </a:p>
+        </p:txBody>
+      </p:sp>
+      <p:sp>
+        <p:nvSpPr>
+          <p:cNvPr id="9" name="Shape 7"/>
+          <p:cNvSpPr/>
+          <p:nvPr/>
+        </p:nvSpPr>
+        <p:spPr>
+          <a:xfrm>
+            <a:off x="4617720" y="1078992"/>
+            <a:ext cx="4114800" cy="457200"/>
+          </a:xfrm>
+          <a:prstGeom prst="roundRect">
+            <a:avLst>
+              <a:gd name="adj" fmla="val 16000"/>
+            </a:avLst>
+          </a:prstGeom>
+          <a:solidFill>
+            <a:srgbClr val="0E1C42"/>
+          </a:solidFill>
+          <a:ln/>
+        </p:spPr>
+      </p:sp>
+      <p:sp>
+        <p:nvSpPr>
+          <p:cNvPr id="10" name="Text 8"/>
+          <p:cNvSpPr/>
+          <p:nvPr/>
+        </p:nvSpPr>
+        <p:spPr>
+          <a:xfrm>
+            <a:off x="4663440" y="1133856"/>
+            <a:ext cx="4023360" cy="347472"/>
+          </a:xfrm>
+          <a:prstGeom prst="rect">
+            <a:avLst/>
+          </a:prstGeom>
+          <a:noFill/>
+          <a:ln/>
+        </p:spPr>
+        <p:txBody>
+          <a:bodyPr wrap="square" lIns="0" tIns="0" rIns="0" bIns="0" rtlCol="0" anchor="ctr"/>
+          <a:lstStyle/>
+          <a:p>
+            <a:pPr algn="ctr" indent="0" marL="0">
+              <a:buNone/>
+            </a:pPr>
+            <a:r>
+              <a:rPr lang="en-US" sz="1300" b="1" dirty="0">
+                <a:solidFill>
+                  <a:srgbClr val="FFFFFF"/>
+                </a:solidFill>
+                <a:latin typeface="Calibri" pitchFamily="34" charset="0"/>
+                <a:ea typeface="Calibri" pitchFamily="34" charset="-122"/>
+                <a:cs typeface="Calibri" pitchFamily="34" charset="-120"/>
+              </a:rPr>
+              <a:t>not closed</a:t>
+            </a:r>
+            <a:endParaRPr lang="en-US" sz="1300" dirty="0"/>
+          </a:p>
+        </p:txBody>
+      </p:sp>
+      <p:sp>
+        <p:nvSpPr>
+          <p:cNvPr id="11" name="Shape 9"/>
+          <p:cNvSpPr/>
+          <p:nvPr/>
+        </p:nvSpPr>
+        <p:spPr>
+          <a:xfrm>
+            <a:off x="4617720" y="1591056"/>
+            <a:ext cx="4114800" cy="2103120"/>
+          </a:xfrm>
+          <a:prstGeom prst="roundRect">
+            <a:avLst>
+              <a:gd name="adj" fmla="val 4348"/>
+            </a:avLst>
+          </a:prstGeom>
+          <a:solidFill>
+            <a:srgbClr val="FFFFFF"/>
+          </a:solidFill>
+          <a:ln/>
+          <a:effectLst>
+            <a:outerShdw sx="100000" sy="100000" kx="0" ky="0" algn="bl" rotWithShape="0" blurRad="101600" dist="38100" dir="2700000">
+              <a:srgbClr val="000000">
+                <a:alpha val="12000"/>
+              </a:srgbClr>
+            </a:outerShdw>
+          </a:effectLst>
+        </p:spPr>
+      </p:sp>
+      <p:sp>
+        <p:nvSpPr>
+          <p:cNvPr id="12" name="Text 10"/>
+          <p:cNvSpPr/>
+          <p:nvPr/>
+        </p:nvSpPr>
+        <p:spPr>
+          <a:xfrm>
+            <a:off x="4709160" y="1700784"/>
+            <a:ext cx="3931920" cy="1883664"/>
+          </a:xfrm>
+          <a:prstGeom prst="rect">
+            <a:avLst/>
+          </a:prstGeom>
+          <a:noFill/>
+          <a:ln/>
+        </p:spPr>
+        <p:txBody>
+          <a:bodyPr wrap="square" lIns="0" tIns="0" rIns="0" bIns="0" rtlCol="0" anchor="ctr"/>
+          <a:lstStyle/>
+          <a:p>
+            <a:pPr algn="ctr" indent="0" marL="0">
+              <a:buNone/>
+            </a:pPr>
+            <a:r>
+              <a:rPr lang="en-US" sz="1400" dirty="0">
+                <a:solidFill>
+                  <a:srgbClr val="1E293B"/>
+                </a:solidFill>
+                <a:latin typeface="Calibri" pitchFamily="34" charset="0"/>
+                <a:ea typeface="Calibri" pitchFamily="34" charset="-122"/>
+                <a:cs typeface="Calibri" pitchFamily="34" charset="-120"/>
+              </a:rPr>
+              <a:t>wake</a:t>
+            </a:r>
+            <a:endParaRPr lang="en-US" sz="1400" dirty="0"/>
+          </a:p>
+          <a:p>
+            <a:pPr algn="ctr" indent="0" marL="0">
+              <a:buNone/>
+            </a:pPr>
+            <a:r>
+              <a:rPr lang="en-US" sz="1400" dirty="0">
+                <a:solidFill>
+                  <a:srgbClr val="1E293B"/>
+                </a:solidFill>
+                <a:latin typeface="Calibri" pitchFamily="34" charset="0"/>
+                <a:ea typeface="Calibri" pitchFamily="34" charset="-122"/>
+                <a:cs typeface="Calibri" pitchFamily="34" charset="-120"/>
+              </a:rPr>
+              <a:t>home</a:t>
+            </a:r>
+            <a:endParaRPr lang="en-US" sz="1400" dirty="0"/>
+          </a:p>
+          <a:p>
+            <a:pPr algn="ctr" indent="0" marL="0">
+              <a:buNone/>
+            </a:pPr>
+            <a:r>
+              <a:rPr lang="en-US" sz="1400" dirty="0">
+                <a:solidFill>
+                  <a:srgbClr val="1E293B"/>
+                </a:solidFill>
+                <a:latin typeface="Calibri" pitchFamily="34" charset="0"/>
+                <a:ea typeface="Calibri" pitchFamily="34" charset="-122"/>
+                <a:cs typeface="Calibri" pitchFamily="34" charset="-120"/>
+              </a:rPr>
+              <a:t>like</a:t>
+            </a:r>
+            <a:endParaRPr lang="en-US" sz="1400" dirty="0"/>
+          </a:p>
+          <a:p>
+            <a:pPr algn="ctr" indent="0" marL="0">
+              <a:buNone/>
+            </a:pPr>
+            <a:r>
+              <a:rPr lang="en-US" sz="1400" dirty="0">
+                <a:solidFill>
+                  <a:srgbClr val="1E293B"/>
+                </a:solidFill>
+                <a:latin typeface="Calibri" pitchFamily="34" charset="0"/>
+                <a:ea typeface="Calibri" pitchFamily="34" charset="-122"/>
+                <a:cs typeface="Calibri" pitchFamily="34" charset="-120"/>
+              </a:rPr>
+              <a:t>huge</a:t>
+            </a:r>
+            <a:endParaRPr lang="en-US" sz="1400" dirty="0"/>
+          </a:p>
+        </p:txBody>
       </p:sp>
     </p:spTree>
   </p:cSld>
@@ -4296,30 +4566,89 @@
       </p:grpSpPr>
       <p:sp>
         <p:nvSpPr>
-          <p:cNvPr id="2" name="Text 0"/>
-          <p:cNvSpPr/>
-          <p:nvPr/>
-        </p:nvSpPr>
-        <p:spPr>
-          <a:xfrm>
-            <a:off x="365760" y="164592"/>
-            <a:ext cx="8412480" cy="566928"/>
-          </a:xfrm>
-          <a:prstGeom prst="rect">
-            <a:avLst/>
-          </a:prstGeom>
-          <a:noFill/>
-          <a:ln/>
-        </p:spPr>
-        <p:txBody>
-          <a:bodyPr wrap="square" lIns="0" tIns="0" rIns="0" bIns="0" rtlCol="0" anchor="ctr"/>
-          <a:lstStyle/>
-          <a:p>
-            <a:pPr algn="l" indent="0" marL="0">
-              <a:buNone/>
-            </a:pPr>
-            <a:r>
-              <a:rPr lang="en-US" sz="2800" b="1" dirty="0">
+          <p:cNvPr id="2" name="Shape 0"/>
+          <p:cNvSpPr/>
+          <p:nvPr/>
+        </p:nvSpPr>
+        <p:spPr>
+          <a:xfrm>
+            <a:off x="0" y="0"/>
+            <a:ext cx="9144000" cy="566928"/>
+          </a:xfrm>
+          <a:prstGeom prst="rect">
+            <a:avLst/>
+          </a:prstGeom>
+          <a:solidFill>
+            <a:srgbClr val="55C8E8"/>
+          </a:solidFill>
+          <a:ln/>
+        </p:spPr>
+      </p:sp>
+      <p:sp>
+        <p:nvSpPr>
+          <p:cNvPr id="3" name="Text 1"/>
+          <p:cNvSpPr/>
+          <p:nvPr/>
+        </p:nvSpPr>
+        <p:spPr>
+          <a:xfrm>
+            <a:off x="365760" y="54864"/>
+            <a:ext cx="8412480" cy="457200"/>
+          </a:xfrm>
+          <a:prstGeom prst="rect">
+            <a:avLst/>
+          </a:prstGeom>
+          <a:noFill/>
+          <a:ln/>
+        </p:spPr>
+        <p:txBody>
+          <a:bodyPr wrap="square" lIns="0" tIns="0" rIns="0" bIns="0" rtlCol="0" anchor="ctr"/>
+          <a:lstStyle/>
+          <a:p>
+            <a:pPr indent="0" marL="0">
+              <a:buNone/>
+            </a:pPr>
+            <a:r>
+              <a:rPr lang="en-US" sz="2200" b="1" dirty="0">
+                <a:solidFill>
+                  <a:srgbClr val="FFFFFF"/>
+                </a:solidFill>
+                <a:latin typeface="Calibri" pitchFamily="34" charset="0"/>
+                <a:ea typeface="Calibri" pitchFamily="34" charset="-122"/>
+                <a:cs typeface="Calibri" pitchFamily="34" charset="-120"/>
+              </a:rPr>
+              <a:t>📕  Read</a:t>
+            </a:r>
+            <a:endParaRPr lang="en-US" sz="2200" dirty="0"/>
+          </a:p>
+        </p:txBody>
+      </p:sp>
+      <p:sp>
+        <p:nvSpPr>
+          <p:cNvPr id="4" name="Text 2"/>
+          <p:cNvSpPr/>
+          <p:nvPr/>
+        </p:nvSpPr>
+        <p:spPr>
+          <a:xfrm>
+            <a:off x="365760" y="868680"/>
+            <a:ext cx="8412480" cy="502920"/>
+          </a:xfrm>
+          <a:prstGeom prst="rect">
+            <a:avLst/>
+          </a:prstGeom>
+          <a:noFill/>
+          <a:ln/>
+        </p:spPr>
+        <p:txBody>
+          <a:bodyPr wrap="square" lIns="0" tIns="0" rIns="0" bIns="0" rtlCol="0" anchor="ctr"/>
+          <a:lstStyle/>
+          <a:p>
+            <a:pPr indent="0" marL="0">
+              <a:buNone/>
+            </a:pPr>
+            <a:r>
+              <a:rPr lang="en-US" sz="2600" b="1" dirty="0">
                 <a:solidFill>
                   <a:srgbClr val="0E1C42"/>
                 </a:solidFill>
@@ -4327,34 +4656,197 @@
                 <a:ea typeface="Calibri" pitchFamily="34" charset="-122"/>
                 <a:cs typeface="Calibri" pitchFamily="34" charset="-120"/>
               </a:rPr>
-              <a:t>📝 Reading-Writing Connection (RWM)</a:t>
-            </a:r>
-            <a:endParaRPr lang="en-US" sz="2800" dirty="0"/>
-          </a:p>
-        </p:txBody>
-      </p:sp>
-      <p:sp>
-        <p:nvSpPr>
-          <p:cNvPr id="3" name="Shape 1"/>
-          <p:cNvSpPr/>
-          <p:nvPr/>
-        </p:nvSpPr>
-        <p:spPr>
-          <a:xfrm>
-            <a:off x="365760" y="749808"/>
-            <a:ext cx="8412480" cy="0"/>
-          </a:xfrm>
-          <a:prstGeom prst="line">
-            <a:avLst/>
-          </a:prstGeom>
-          <a:noFill/>
-          <a:ln w="19050">
-            <a:solidFill>
-              <a:srgbClr val="34B76F"/>
-            </a:solidFill>
-            <a:prstDash val="solid"/>
-          </a:ln>
-        </p:spPr>
+              <a:t>Chapter 1</a:t>
+            </a:r>
+            <a:endParaRPr lang="en-US" sz="2600" dirty="0"/>
+          </a:p>
+        </p:txBody>
+      </p:sp>
+      <p:sp>
+        <p:nvSpPr>
+          <p:cNvPr id="5" name="Text 3"/>
+          <p:cNvSpPr/>
+          <p:nvPr/>
+        </p:nvSpPr>
+        <p:spPr>
+          <a:xfrm>
+            <a:off x="365760" y="1463040"/>
+            <a:ext cx="8229600" cy="237744"/>
+          </a:xfrm>
+          <a:prstGeom prst="rect">
+            <a:avLst/>
+          </a:prstGeom>
+          <a:noFill/>
+          <a:ln/>
+        </p:spPr>
+        <p:txBody>
+          <a:bodyPr wrap="square" lIns="0" tIns="0" rIns="0" bIns="0" rtlCol="0" anchor="ctr"/>
+          <a:lstStyle/>
+          <a:p>
+            <a:pPr indent="0" marL="0">
+              <a:buNone/>
+            </a:pPr>
+            <a:r>
+              <a:rPr lang="en-US" sz="1100" b="1" spc="100" kern="0" dirty="0">
+                <a:solidFill>
+                  <a:srgbClr val="C7922C"/>
+                </a:solidFill>
+                <a:latin typeface="Calibri" pitchFamily="34" charset="0"/>
+                <a:ea typeface="Calibri" pitchFamily="34" charset="-122"/>
+                <a:cs typeface="Calibri" pitchFamily="34" charset="-120"/>
+              </a:rPr>
+              <a:t>PAUSE &amp; THINK</a:t>
+            </a:r>
+            <a:endParaRPr lang="en-US" sz="1100" dirty="0"/>
+          </a:p>
+        </p:txBody>
+      </p:sp>
+      <p:sp>
+        <p:nvSpPr>
+          <p:cNvPr id="6" name="Text 4"/>
+          <p:cNvSpPr/>
+          <p:nvPr/>
+        </p:nvSpPr>
+        <p:spPr>
+          <a:xfrm>
+            <a:off x="365760" y="1719072"/>
+            <a:ext cx="8412480" cy="914400"/>
+          </a:xfrm>
+          <a:prstGeom prst="rect">
+            <a:avLst/>
+          </a:prstGeom>
+          <a:noFill/>
+          <a:ln/>
+        </p:spPr>
+        <p:txBody>
+          <a:bodyPr wrap="square" lIns="0" tIns="0" rIns="0" bIns="0" rtlCol="0" anchor="ctr"/>
+          <a:lstStyle/>
+          <a:p>
+            <a:pPr indent="0" marL="0">
+              <a:buNone/>
+            </a:pPr>
+            <a:r>
+              <a:rPr lang="en-US" sz="1500" dirty="0">
+                <a:solidFill>
+                  <a:srgbClr val="1E293B"/>
+                </a:solidFill>
+                <a:latin typeface="Calibri" pitchFamily="34" charset="0"/>
+                <a:ea typeface="Calibri" pitchFamily="34" charset="-122"/>
+                <a:cs typeface="Calibri" pitchFamily="34" charset="-120"/>
+              </a:rPr>
+              <a:t>•  Dr. Dan says he’ll keep an eye on Stanley. How do you think Stanley feels about being flat?</a:t>
+            </a:r>
+            <a:endParaRPr lang="en-US" sz="1500" dirty="0"/>
+          </a:p>
+          <a:p>
+            <a:pPr indent="0" marL="0">
+              <a:buNone/>
+            </a:pPr>
+            <a:r>
+              <a:rPr lang="en-US" sz="1500" dirty="0">
+                <a:solidFill>
+                  <a:srgbClr val="1E293B"/>
+                </a:solidFill>
+                <a:latin typeface="Calibri" pitchFamily="34" charset="0"/>
+                <a:ea typeface="Calibri" pitchFamily="34" charset="-122"/>
+                <a:cs typeface="Calibri" pitchFamily="34" charset="-120"/>
+              </a:rPr>
+              <a:t>•  Dr. Dan has examined Stanley and says he is fine — just flat. If you were Stanley's friend, what would you say to make him feel better? What questions would you ask him?</a:t>
+            </a:r>
+            <a:endParaRPr lang="en-US" sz="1500" dirty="0"/>
+          </a:p>
+        </p:txBody>
+      </p:sp>
+    </p:spTree>
+  </p:cSld>
+  <p:clrMapOvr>
+    <a:masterClrMapping/>
+  </p:clrMapOvr>
+</p:sld>
+</file>
+
+<file path=ppt/slides/slide16.xml><?xml version="1.0" encoding="utf-8"?>
+<p:sld xmlns:a="http://schemas.openxmlformats.org/drawingml/2006/main" xmlns:r="http://schemas.openxmlformats.org/officeDocument/2006/relationships" xmlns:p="http://schemas.openxmlformats.org/presentationml/2006/main">
+  <p:cSld name="Slide 16">
+    <p:bg>
+      <p:bgPr>
+        <a:solidFill>
+          <a:srgbClr val="FFFFFF"/>
+        </a:solidFill>
+      </p:bgPr>
+    </p:bg>
+    <p:spTree>
+      <p:nvGrpSpPr>
+        <p:cNvPr id="1" name=""/>
+        <p:cNvGrpSpPr/>
+        <p:nvPr/>
+      </p:nvGrpSpPr>
+      <p:grpSpPr>
+        <a:xfrm>
+          <a:off x="0" y="0"/>
+          <a:ext cx="0" cy="0"/>
+          <a:chOff x="0" y="0"/>
+          <a:chExt cx="0" cy="0"/>
+        </a:xfrm>
+      </p:grpSpPr>
+      <p:sp>
+        <p:nvSpPr>
+          <p:cNvPr id="2" name="Shape 0"/>
+          <p:cNvSpPr/>
+          <p:nvPr/>
+        </p:nvSpPr>
+        <p:spPr>
+          <a:xfrm>
+            <a:off x="0" y="0"/>
+            <a:ext cx="9144000" cy="566928"/>
+          </a:xfrm>
+          <a:prstGeom prst="rect">
+            <a:avLst/>
+          </a:prstGeom>
+          <a:solidFill>
+            <a:srgbClr val="34B76F"/>
+          </a:solidFill>
+          <a:ln/>
+        </p:spPr>
+      </p:sp>
+      <p:sp>
+        <p:nvSpPr>
+          <p:cNvPr id="3" name="Text 1"/>
+          <p:cNvSpPr/>
+          <p:nvPr/>
+        </p:nvSpPr>
+        <p:spPr>
+          <a:xfrm>
+            <a:off x="365760" y="54864"/>
+            <a:ext cx="8412480" cy="457200"/>
+          </a:xfrm>
+          <a:prstGeom prst="rect">
+            <a:avLst/>
+          </a:prstGeom>
+          <a:noFill/>
+          <a:ln/>
+        </p:spPr>
+        <p:txBody>
+          <a:bodyPr wrap="square" lIns="0" tIns="0" rIns="0" bIns="0" rtlCol="0" anchor="ctr"/>
+          <a:lstStyle/>
+          <a:p>
+            <a:pPr indent="0" marL="0">
+              <a:buNone/>
+            </a:pPr>
+            <a:r>
+              <a:rPr lang="en-US" sz="2200" b="1" dirty="0">
+                <a:solidFill>
+                  <a:srgbClr val="FFFFFF"/>
+                </a:solidFill>
+                <a:latin typeface="Calibri" pitchFamily="34" charset="0"/>
+                <a:ea typeface="Calibri" pitchFamily="34" charset="-122"/>
+                <a:cs typeface="Calibri" pitchFamily="34" charset="-120"/>
+              </a:rPr>
+              <a:t>🪶  Writer’s Workshop</a:t>
+            </a:r>
+            <a:endParaRPr lang="en-US" sz="2200" dirty="0"/>
+          </a:p>
+        </p:txBody>
       </p:sp>
       <p:sp>
         <p:nvSpPr>
@@ -4364,24 +4856,102 @@
         </p:nvSpPr>
         <p:spPr>
           <a:xfrm>
-            <a:off x="640080" y="1371600"/>
-            <a:ext cx="7863840" cy="457200"/>
-          </a:xfrm>
-          <a:prstGeom prst="rect">
-            <a:avLst/>
-          </a:prstGeom>
-          <a:noFill/>
-          <a:ln/>
-        </p:spPr>
-        <p:txBody>
-          <a:bodyPr wrap="square" lIns="0" tIns="0" rIns="0" bIns="0" rtlCol="0" anchor="ctr"/>
-          <a:lstStyle/>
-          <a:p>
-            <a:pPr indent="0" marL="0">
-              <a:buNone/>
-            </a:pPr>
-            <a:r>
-              <a:rPr lang="en-US" sz="1600" dirty="0">
+            <a:off x="365760" y="822960"/>
+            <a:ext cx="8229600" cy="237744"/>
+          </a:xfrm>
+          <a:prstGeom prst="rect">
+            <a:avLst/>
+          </a:prstGeom>
+          <a:noFill/>
+          <a:ln/>
+        </p:spPr>
+        <p:txBody>
+          <a:bodyPr wrap="square" lIns="0" tIns="0" rIns="0" bIns="0" rtlCol="0" anchor="ctr"/>
+          <a:lstStyle/>
+          <a:p>
+            <a:pPr indent="0" marL="0">
+              <a:buNone/>
+            </a:pPr>
+            <a:r>
+              <a:rPr lang="en-US" sz="1100" b="1" spc="100" kern="0" dirty="0">
+                <a:solidFill>
+                  <a:srgbClr val="34B76F"/>
+                </a:solidFill>
+                <a:latin typeface="Calibri" pitchFamily="34" charset="0"/>
+                <a:ea typeface="Calibri" pitchFamily="34" charset="-122"/>
+                <a:cs typeface="Calibri" pitchFamily="34" charset="-120"/>
+              </a:rPr>
+              <a:t>THIS WEEK’S STAGE</a:t>
+            </a:r>
+            <a:endParaRPr lang="en-US" sz="1100" dirty="0"/>
+          </a:p>
+        </p:txBody>
+      </p:sp>
+      <p:sp>
+        <p:nvSpPr>
+          <p:cNvPr id="5" name="Text 3"/>
+          <p:cNvSpPr/>
+          <p:nvPr/>
+        </p:nvSpPr>
+        <p:spPr>
+          <a:xfrm>
+            <a:off x="365760" y="1078992"/>
+            <a:ext cx="8412480" cy="548640"/>
+          </a:xfrm>
+          <a:prstGeom prst="rect">
+            <a:avLst/>
+          </a:prstGeom>
+          <a:noFill/>
+          <a:ln/>
+        </p:spPr>
+        <p:txBody>
+          <a:bodyPr wrap="square" lIns="0" tIns="0" rIns="0" bIns="0" rtlCol="0" anchor="ctr"/>
+          <a:lstStyle/>
+          <a:p>
+            <a:pPr indent="0" marL="0">
+              <a:buNone/>
+            </a:pPr>
+            <a:r>
+              <a:rPr lang="en-US" sz="3000" b="1" dirty="0">
+                <a:solidFill>
+                  <a:srgbClr val="0E1C42"/>
+                </a:solidFill>
+                <a:latin typeface="Calibri" pitchFamily="34" charset="0"/>
+                <a:ea typeface="Calibri" pitchFamily="34" charset="-122"/>
+                <a:cs typeface="Calibri" pitchFamily="34" charset="-120"/>
+              </a:rPr>
+              <a:t>SEED IDEAS</a:t>
+            </a:r>
+            <a:endParaRPr lang="en-US" sz="3000" dirty="0"/>
+          </a:p>
+        </p:txBody>
+      </p:sp>
+      <p:sp>
+        <p:nvSpPr>
+          <p:cNvPr id="6" name="Text 4"/>
+          <p:cNvSpPr/>
+          <p:nvPr/>
+        </p:nvSpPr>
+        <p:spPr>
+          <a:xfrm>
+            <a:off x="365760" y="1691640"/>
+            <a:ext cx="8412480" cy="457200"/>
+          </a:xfrm>
+          <a:prstGeom prst="rect">
+            <a:avLst/>
+          </a:prstGeom>
+          <a:noFill/>
+          <a:ln/>
+        </p:spPr>
+        <p:txBody>
+          <a:bodyPr wrap="square" lIns="0" tIns="0" rIns="0" bIns="0" rtlCol="0" anchor="ctr"/>
+          <a:lstStyle/>
+          <a:p>
+            <a:pPr indent="0" marL="0">
+              <a:buNone/>
+            </a:pPr>
+            <a:r>
+              <a:rPr lang="en-US" sz="1800" dirty="0">
                 <a:solidFill>
                   <a:srgbClr val="1E293B"/>
                 </a:solidFill>
@@ -4389,48 +4959,9 @@
                 <a:ea typeface="Calibri" pitchFamily="34" charset="-122"/>
                 <a:cs typeface="Calibri" pitchFamily="34" charset="-120"/>
               </a:rPr>
-              <a:t>Open your writing assignment in Canvas.</a:t>
-            </a:r>
-            <a:endParaRPr lang="en-US" sz="1600" dirty="0"/>
-          </a:p>
-        </p:txBody>
-      </p:sp>
-      <p:sp>
-        <p:nvSpPr>
-          <p:cNvPr id="5" name="Text 3"/>
-          <p:cNvSpPr/>
-          <p:nvPr/>
-        </p:nvSpPr>
-        <p:spPr>
-          <a:xfrm>
-            <a:off x="640080" y="2011680"/>
-            <a:ext cx="7863840" cy="457200"/>
-          </a:xfrm>
-          <a:prstGeom prst="rect">
-            <a:avLst/>
-          </a:prstGeom>
-          <a:noFill/>
-          <a:ln/>
-        </p:spPr>
-        <p:txBody>
-          <a:bodyPr wrap="square" lIns="0" tIns="0" rIns="0" bIns="0" rtlCol="0" anchor="ctr"/>
-          <a:lstStyle/>
-          <a:p>
-            <a:pPr indent="0" marL="0">
-              <a:buNone/>
-            </a:pPr>
-            <a:r>
-              <a:rPr lang="en-US" sz="1400" dirty="0">
-                <a:solidFill>
-                  <a:srgbClr val="64748B"/>
-                </a:solidFill>
-                <a:latin typeface="Calibri" pitchFamily="34" charset="0"/>
-                <a:ea typeface="Calibri" pitchFamily="34" charset="-122"/>
-                <a:cs typeface="Calibri" pitchFamily="34" charset="-120"/>
-              </a:rPr>
-              <a:t>Follow the writing prompt for today's workshop.</a:t>
-            </a:r>
-            <a:endParaRPr lang="en-US" sz="1400" dirty="0"/>
+              <a:t>Zoom in on the moment</a:t>
+            </a:r>
+            <a:endParaRPr lang="en-US" sz="1800" dirty="0"/>
           </a:p>
         </p:txBody>
       </p:sp>
@@ -4468,65 +4999,62 @@
       </p:grpSpPr>
       <p:sp>
         <p:nvSpPr>
-          <p:cNvPr id="2" name="Text 0"/>
-          <p:cNvSpPr/>
-          <p:nvPr/>
-        </p:nvSpPr>
-        <p:spPr>
-          <a:xfrm>
-            <a:off x="365760" y="164592"/>
-            <a:ext cx="8412480" cy="566928"/>
-          </a:xfrm>
-          <a:prstGeom prst="rect">
-            <a:avLst/>
-          </a:prstGeom>
-          <a:noFill/>
-          <a:ln/>
-        </p:spPr>
-        <p:txBody>
-          <a:bodyPr wrap="square" lIns="0" tIns="0" rIns="0" bIns="0" rtlCol="0" anchor="ctr"/>
-          <a:lstStyle/>
-          <a:p>
-            <a:pPr algn="l" indent="0" marL="0">
-              <a:buNone/>
-            </a:pPr>
-            <a:r>
-              <a:rPr lang="en-US" sz="2800" b="1" dirty="0">
-                <a:solidFill>
-                  <a:srgbClr val="0E1C42"/>
-                </a:solidFill>
-                <a:latin typeface="Calibri" pitchFamily="34" charset="0"/>
-                <a:ea typeface="Calibri" pitchFamily="34" charset="-122"/>
-                <a:cs typeface="Calibri" pitchFamily="34" charset="-120"/>
-              </a:rPr>
-              <a:t>✏️ 10-Minute Write</a:t>
-            </a:r>
-            <a:endParaRPr lang="en-US" sz="2800" dirty="0"/>
-          </a:p>
-        </p:txBody>
-      </p:sp>
-      <p:sp>
-        <p:nvSpPr>
-          <p:cNvPr id="3" name="Shape 1"/>
-          <p:cNvSpPr/>
-          <p:nvPr/>
-        </p:nvSpPr>
-        <p:spPr>
-          <a:xfrm>
-            <a:off x="365760" y="749808"/>
-            <a:ext cx="8412480" cy="0"/>
-          </a:xfrm>
-          <a:prstGeom prst="line">
-            <a:avLst/>
-          </a:prstGeom>
-          <a:noFill/>
-          <a:ln w="19050">
-            <a:solidFill>
-              <a:srgbClr val="C7922C"/>
-            </a:solidFill>
-            <a:prstDash val="solid"/>
-          </a:ln>
-        </p:spPr>
+          <p:cNvPr id="2" name="Shape 0"/>
+          <p:cNvSpPr/>
+          <p:nvPr/>
+        </p:nvSpPr>
+        <p:spPr>
+          <a:xfrm>
+            <a:off x="0" y="0"/>
+            <a:ext cx="9144000" cy="566928"/>
+          </a:xfrm>
+          <a:prstGeom prst="rect">
+            <a:avLst/>
+          </a:prstGeom>
+          <a:solidFill>
+            <a:srgbClr val="C7922C"/>
+          </a:solidFill>
+          <a:ln/>
+        </p:spPr>
+      </p:sp>
+      <p:sp>
+        <p:nvSpPr>
+          <p:cNvPr id="3" name="Text 1"/>
+          <p:cNvSpPr/>
+          <p:nvPr/>
+        </p:nvSpPr>
+        <p:spPr>
+          <a:xfrm>
+            <a:off x="365760" y="54864"/>
+            <a:ext cx="8412480" cy="457200"/>
+          </a:xfrm>
+          <a:prstGeom prst="rect">
+            <a:avLst/>
+          </a:prstGeom>
+          <a:noFill/>
+          <a:ln/>
+        </p:spPr>
+        <p:txBody>
+          <a:bodyPr wrap="square" lIns="0" tIns="0" rIns="0" bIns="0" rtlCol="0" anchor="ctr"/>
+          <a:lstStyle/>
+          <a:p>
+            <a:pPr indent="0" marL="0">
+              <a:buNone/>
+            </a:pPr>
+            <a:r>
+              <a:rPr lang="en-US" sz="2200" b="1" dirty="0">
+                <a:solidFill>
+                  <a:srgbClr val="FFFFFF"/>
+                </a:solidFill>
+                <a:latin typeface="Calibri" pitchFamily="34" charset="0"/>
+                <a:ea typeface="Calibri" pitchFamily="34" charset="-122"/>
+                <a:cs typeface="Calibri" pitchFamily="34" charset="-120"/>
+              </a:rPr>
+              <a:t>✍️  10-Minute Write</a:t>
+            </a:r>
+            <a:endParaRPr lang="en-US" sz="2200" dirty="0"/>
+          </a:p>
+        </p:txBody>
       </p:sp>
       <p:sp>
         <p:nvSpPr>
@@ -4536,24 +5064,24 @@
         </p:nvSpPr>
         <p:spPr>
           <a:xfrm>
-            <a:off x="457200" y="1005840"/>
-            <a:ext cx="8046720" cy="292608"/>
-          </a:xfrm>
-          <a:prstGeom prst="rect">
-            <a:avLst/>
-          </a:prstGeom>
-          <a:noFill/>
-          <a:ln/>
-        </p:spPr>
-        <p:txBody>
-          <a:bodyPr wrap="square" lIns="0" tIns="0" rIns="0" bIns="0" rtlCol="0" anchor="ctr"/>
-          <a:lstStyle/>
-          <a:p>
-            <a:pPr indent="0" marL="0">
-              <a:buNone/>
-            </a:pPr>
-            <a:r>
-              <a:rPr lang="en-US" sz="1100" b="1" spc="200" kern="0" dirty="0">
+            <a:off x="365760" y="822960"/>
+            <a:ext cx="8229600" cy="237744"/>
+          </a:xfrm>
+          <a:prstGeom prst="rect">
+            <a:avLst/>
+          </a:prstGeom>
+          <a:noFill/>
+          <a:ln/>
+        </p:spPr>
+        <p:txBody>
+          <a:bodyPr wrap="square" lIns="0" tIns="0" rIns="0" bIns="0" rtlCol="0" anchor="ctr"/>
+          <a:lstStyle/>
+          <a:p>
+            <a:pPr indent="0" marL="0">
+              <a:buNone/>
+            </a:pPr>
+            <a:r>
+              <a:rPr lang="en-US" sz="1100" b="1" spc="100" kern="0" dirty="0">
                 <a:solidFill>
                   <a:srgbClr val="C7922C"/>
                 </a:solidFill>
@@ -4561,7 +5089,7 @@
                 <a:ea typeface="Calibri" pitchFamily="34" charset="-122"/>
                 <a:cs typeface="Calibri" pitchFamily="34" charset="-120"/>
               </a:rPr>
-              <a:t>📖 READ THE PROMPT — 1 MINUTE</a:t>
+              <a:t>READ THE PROMPT — 1 MINUTE</a:t>
             </a:r>
             <a:endParaRPr lang="en-US" sz="1100" dirty="0"/>
           </a:p>
@@ -4575,18 +5103,18 @@
         </p:nvSpPr>
         <p:spPr>
           <a:xfrm>
-            <a:off x="457200" y="1417320"/>
-            <a:ext cx="8229600" cy="1645920"/>
+            <a:off x="365760" y="1143000"/>
+            <a:ext cx="8412480" cy="1737360"/>
           </a:xfrm>
           <a:prstGeom prst="roundRect">
             <a:avLst>
-              <a:gd name="adj" fmla="val 5556"/>
+              <a:gd name="adj" fmla="val 5263"/>
             </a:avLst>
           </a:prstGeom>
           <a:solidFill>
             <a:srgbClr val="FEF6E8"/>
           </a:solidFill>
-          <a:ln w="12700">
+          <a:ln w="19050">
             <a:solidFill>
               <a:srgbClr val="C7922C"/>
             </a:solidFill>
@@ -4609,24 +5137,24 @@
         </p:nvSpPr>
         <p:spPr>
           <a:xfrm>
-            <a:off x="640080" y="1527048"/>
-            <a:ext cx="7863840" cy="1417320"/>
-          </a:xfrm>
-          <a:prstGeom prst="rect">
-            <a:avLst/>
-          </a:prstGeom>
-          <a:noFill/>
-          <a:ln/>
-        </p:spPr>
-        <p:txBody>
-          <a:bodyPr wrap="square" lIns="0" tIns="0" rIns="0" bIns="0" rtlCol="0" anchor="ctr"/>
-          <a:lstStyle/>
-          <a:p>
-            <a:pPr indent="0" marL="0">
-              <a:buNone/>
-            </a:pPr>
-            <a:r>
-              <a:rPr lang="en-US" sz="1800" i="1" dirty="0">
+            <a:off x="594360" y="1271016"/>
+            <a:ext cx="7955280" cy="1481328"/>
+          </a:xfrm>
+          <a:prstGeom prst="rect">
+            <a:avLst/>
+          </a:prstGeom>
+          <a:noFill/>
+          <a:ln/>
+        </p:spPr>
+        <p:txBody>
+          <a:bodyPr wrap="square" lIns="0" tIns="0" rIns="0" bIns="0" rtlCol="0" anchor="ctr"/>
+          <a:lstStyle/>
+          <a:p>
+            <a:pPr indent="0" marL="0">
+              <a:buNone/>
+            </a:pPr>
+            <a:r>
+              <a:rPr lang="en-US" sz="1700" dirty="0">
                 <a:solidFill>
                   <a:srgbClr val="1E293B"/>
                 </a:solidFill>
@@ -4634,9 +5162,9 @@
                 <a:ea typeface="Calibri" pitchFamily="34" charset="-122"/>
                 <a:cs typeface="Calibri" pitchFamily="34" charset="-120"/>
               </a:rPr>
-              <a:t>Stanley's brother Arthur was right there when the bulletin board fell. Write about a time you saw something surprising or scary happen to someone you care about. What did you do? How did you feel?</a:t>
-            </a:r>
-            <a:endParaRPr lang="en-US" sz="1800" dirty="0"/>
+              <a:t>If you woke up tomorrow and something about you had changed overnight, what would you want it to be? Why?</a:t>
+            </a:r>
+            <a:endParaRPr lang="en-US" sz="1700" dirty="0"/>
           </a:p>
         </p:txBody>
       </p:sp>
@@ -4648,76 +5176,34 @@
         </p:nvSpPr>
         <p:spPr>
           <a:xfrm>
-            <a:off x="640080" y="3246120"/>
-            <a:ext cx="7863840" cy="457200"/>
-          </a:xfrm>
-          <a:prstGeom prst="rect">
-            <a:avLst/>
-          </a:prstGeom>
-          <a:noFill/>
-          <a:ln/>
-        </p:spPr>
-        <p:txBody>
-          <a:bodyPr wrap="square" lIns="0" tIns="0" rIns="0" bIns="0" rtlCol="0" anchor="ctr"/>
-          <a:lstStyle/>
-          <a:p>
-            <a:pPr indent="0" marL="0">
-              <a:buNone/>
-            </a:pPr>
-            <a:r>
-              <a:rPr lang="en-US" sz="1400" b="1" dirty="0">
-                <a:solidFill>
-                  <a:srgbClr val="0E1C42"/>
-                </a:solidFill>
-                <a:latin typeface="Calibri" pitchFamily="34" charset="0"/>
-                <a:ea typeface="Calibri" pitchFamily="34" charset="-122"/>
-                <a:cs typeface="Calibri" pitchFamily="34" charset="-120"/>
-              </a:rPr>
-              <a:t>Type in the chat </a:t>
-            </a:r>
-            <a:pPr indent="0" marL="0">
-              <a:buNone/>
-            </a:pPr>
-            <a:r>
-              <a:rPr lang="en-US" sz="1400" dirty="0">
-                <a:solidFill>
-                  <a:srgbClr val="1E293B"/>
-                </a:solidFill>
-                <a:latin typeface="Calibri" pitchFamily="34" charset="0"/>
-                <a:ea typeface="Calibri" pitchFamily="34" charset="-122"/>
-                <a:cs typeface="Calibri" pitchFamily="34" charset="-120"/>
-              </a:rPr>
-              <a:t>or </a:t>
-            </a:r>
-            <a:pPr indent="0" marL="0">
-              <a:buNone/>
-            </a:pPr>
-            <a:r>
-              <a:rPr lang="en-US" sz="1400" b="1" dirty="0">
-                <a:solidFill>
-                  <a:srgbClr val="0E1C42"/>
-                </a:solidFill>
-                <a:latin typeface="Calibri" pitchFamily="34" charset="0"/>
-                <a:ea typeface="Calibri" pitchFamily="34" charset="-122"/>
-                <a:cs typeface="Calibri" pitchFamily="34" charset="-120"/>
-              </a:rPr>
-              <a:t>write on paper</a:t>
-            </a:r>
-            <a:pPr indent="0" marL="0">
-              <a:buNone/>
-            </a:pPr>
-            <a:r>
-              <a:rPr lang="en-US" sz="1400" dirty="0">
-                <a:solidFill>
-                  <a:srgbClr val="1E293B"/>
-                </a:solidFill>
-                <a:latin typeface="Calibri" pitchFamily="34" charset="0"/>
-                <a:ea typeface="Calibri" pitchFamily="34" charset="-122"/>
-                <a:cs typeface="Calibri" pitchFamily="34" charset="-120"/>
-              </a:rPr>
-              <a:t> to hold up when we share.</a:t>
-            </a:r>
-            <a:endParaRPr lang="en-US" sz="1400" dirty="0"/>
+            <a:off x="365760" y="3063240"/>
+            <a:ext cx="8412480" cy="365760"/>
+          </a:xfrm>
+          <a:prstGeom prst="rect">
+            <a:avLst/>
+          </a:prstGeom>
+          <a:noFill/>
+          <a:ln/>
+        </p:spPr>
+        <p:txBody>
+          <a:bodyPr wrap="square" lIns="0" tIns="0" rIns="0" bIns="0" rtlCol="0" anchor="ctr"/>
+          <a:lstStyle/>
+          <a:p>
+            <a:pPr indent="0" marL="0">
+              <a:buNone/>
+            </a:pPr>
+            <a:r>
+              <a:rPr lang="en-US" sz="1600" i="1" dirty="0">
+                <a:solidFill>
+                  <a:srgbClr val="64748B"/>
+                </a:solidFill>
+                <a:latin typeface="Calibri" pitchFamily="34" charset="0"/>
+                <a:ea typeface="Calibri" pitchFamily="34" charset="-122"/>
+                <a:cs typeface="Calibri" pitchFamily="34" charset="-120"/>
+              </a:rPr>
+              <a:t>Think first. You will have five minutes to write.</a:t>
+            </a:r>
+            <a:endParaRPr lang="en-US" sz="1600" dirty="0"/>
           </a:p>
         </p:txBody>
       </p:sp>
@@ -4755,30 +5241,89 @@
       </p:grpSpPr>
       <p:sp>
         <p:nvSpPr>
-          <p:cNvPr id="2" name="Text 0"/>
-          <p:cNvSpPr/>
-          <p:nvPr/>
-        </p:nvSpPr>
-        <p:spPr>
-          <a:xfrm>
-            <a:off x="457200" y="228600"/>
-            <a:ext cx="8229600" cy="640080"/>
-          </a:xfrm>
-          <a:prstGeom prst="rect">
-            <a:avLst/>
-          </a:prstGeom>
-          <a:noFill/>
-          <a:ln/>
-        </p:spPr>
-        <p:txBody>
-          <a:bodyPr wrap="square" lIns="0" tIns="0" rIns="0" bIns="0" rtlCol="0" anchor="ctr"/>
-          <a:lstStyle/>
-          <a:p>
-            <a:pPr algn="ctr" indent="0" marL="0">
-              <a:buNone/>
-            </a:pPr>
-            <a:r>
-              <a:rPr lang="en-US" sz="3200" b="1" dirty="0">
+          <p:cNvPr id="2" name="Shape 0"/>
+          <p:cNvSpPr/>
+          <p:nvPr/>
+        </p:nvSpPr>
+        <p:spPr>
+          <a:xfrm>
+            <a:off x="0" y="0"/>
+            <a:ext cx="9144000" cy="566928"/>
+          </a:xfrm>
+          <a:prstGeom prst="rect">
+            <a:avLst/>
+          </a:prstGeom>
+          <a:solidFill>
+            <a:srgbClr val="C7922C"/>
+          </a:solidFill>
+          <a:ln/>
+        </p:spPr>
+      </p:sp>
+      <p:sp>
+        <p:nvSpPr>
+          <p:cNvPr id="3" name="Text 1"/>
+          <p:cNvSpPr/>
+          <p:nvPr/>
+        </p:nvSpPr>
+        <p:spPr>
+          <a:xfrm>
+            <a:off x="365760" y="54864"/>
+            <a:ext cx="8412480" cy="457200"/>
+          </a:xfrm>
+          <a:prstGeom prst="rect">
+            <a:avLst/>
+          </a:prstGeom>
+          <a:noFill/>
+          <a:ln/>
+        </p:spPr>
+        <p:txBody>
+          <a:bodyPr wrap="square" lIns="0" tIns="0" rIns="0" bIns="0" rtlCol="0" anchor="ctr"/>
+          <a:lstStyle/>
+          <a:p>
+            <a:pPr indent="0" marL="0">
+              <a:buNone/>
+            </a:pPr>
+            <a:r>
+              <a:rPr lang="en-US" sz="2200" b="1" dirty="0">
+                <a:solidFill>
+                  <a:srgbClr val="FFFFFF"/>
+                </a:solidFill>
+                <a:latin typeface="Calibri" pitchFamily="34" charset="0"/>
+                <a:ea typeface="Calibri" pitchFamily="34" charset="-122"/>
+                <a:cs typeface="Calibri" pitchFamily="34" charset="-120"/>
+              </a:rPr>
+              <a:t>✍️  Writing Time</a:t>
+            </a:r>
+            <a:endParaRPr lang="en-US" sz="2200" dirty="0"/>
+          </a:p>
+        </p:txBody>
+      </p:sp>
+      <p:sp>
+        <p:nvSpPr>
+          <p:cNvPr id="4" name="Text 2"/>
+          <p:cNvSpPr/>
+          <p:nvPr/>
+        </p:nvSpPr>
+        <p:spPr>
+          <a:xfrm>
+            <a:off x="365760" y="868680"/>
+            <a:ext cx="8412480" cy="502920"/>
+          </a:xfrm>
+          <a:prstGeom prst="rect">
+            <a:avLst/>
+          </a:prstGeom>
+          <a:noFill/>
+          <a:ln/>
+        </p:spPr>
+        <p:txBody>
+          <a:bodyPr wrap="square" lIns="0" tIns="0" rIns="0" bIns="0" rtlCol="0" anchor="ctr"/>
+          <a:lstStyle/>
+          <a:p>
+            <a:pPr indent="0" marL="0">
+              <a:buNone/>
+            </a:pPr>
+            <a:r>
+              <a:rPr lang="en-US" sz="2600" b="1" dirty="0">
                 <a:solidFill>
                   <a:srgbClr val="0E1C42"/>
                 </a:solidFill>
@@ -4786,38 +5331,38 @@
                 <a:ea typeface="Calibri" pitchFamily="34" charset="-122"/>
                 <a:cs typeface="Calibri" pitchFamily="34" charset="-120"/>
               </a:rPr>
-              <a:t>✏️  Writing Time</a:t>
-            </a:r>
-            <a:endParaRPr lang="en-US" sz="3200" dirty="0"/>
-          </a:p>
-        </p:txBody>
-      </p:sp>
-      <p:sp>
-        <p:nvSpPr>
-          <p:cNvPr id="3" name="Text 1"/>
-          <p:cNvSpPr/>
-          <p:nvPr/>
-        </p:nvSpPr>
-        <p:spPr>
-          <a:xfrm>
-            <a:off x="914400" y="822960"/>
-            <a:ext cx="7315200" cy="365760"/>
-          </a:xfrm>
-          <a:prstGeom prst="rect">
-            <a:avLst/>
-          </a:prstGeom>
-          <a:noFill/>
-          <a:ln/>
-        </p:spPr>
-        <p:txBody>
-          <a:bodyPr wrap="square" lIns="0" tIns="0" rIns="0" bIns="0" rtlCol="0" anchor="ctr"/>
-          <a:lstStyle/>
-          <a:p>
-            <a:pPr algn="ctr" indent="0" marL="0">
-              <a:buNone/>
-            </a:pPr>
-            <a:r>
-              <a:rPr lang="en-US" sz="1600" dirty="0">
+              <a:t>5 minutes — keep your pencil moving!</a:t>
+            </a:r>
+            <a:endParaRPr lang="en-US" sz="2600" dirty="0"/>
+          </a:p>
+        </p:txBody>
+      </p:sp>
+      <p:sp>
+        <p:nvSpPr>
+          <p:cNvPr id="5" name="Text 3"/>
+          <p:cNvSpPr/>
+          <p:nvPr/>
+        </p:nvSpPr>
+        <p:spPr>
+          <a:xfrm>
+            <a:off x="365760" y="1463040"/>
+            <a:ext cx="8229600" cy="237744"/>
+          </a:xfrm>
+          <a:prstGeom prst="rect">
+            <a:avLst/>
+          </a:prstGeom>
+          <a:noFill/>
+          <a:ln/>
+        </p:spPr>
+        <p:txBody>
+          <a:bodyPr wrap="square" lIns="0" tIns="0" rIns="0" bIns="0" rtlCol="0" anchor="ctr"/>
+          <a:lstStyle/>
+          <a:p>
+            <a:pPr indent="0" marL="0">
+              <a:buNone/>
+            </a:pPr>
+            <a:r>
+              <a:rPr lang="en-US" sz="1100" b="1" spc="100" kern="0" dirty="0">
                 <a:solidFill>
                   <a:srgbClr val="C7922C"/>
                 </a:solidFill>
@@ -4825,32 +5370,32 @@
                 <a:ea typeface="Calibri" pitchFamily="34" charset="-122"/>
                 <a:cs typeface="Calibri" pitchFamily="34" charset="-120"/>
               </a:rPr>
-              <a:t>5 minutes — keep your pencil moving!</a:t>
-            </a:r>
-            <a:endParaRPr lang="en-US" sz="1600" dirty="0"/>
-          </a:p>
-        </p:txBody>
-      </p:sp>
-      <p:sp>
-        <p:nvSpPr>
-          <p:cNvPr id="4" name="Shape 2"/>
-          <p:cNvSpPr/>
-          <p:nvPr/>
-        </p:nvSpPr>
-        <p:spPr>
-          <a:xfrm>
-            <a:off x="457200" y="1371600"/>
-            <a:ext cx="8229600" cy="1280160"/>
+              <a:t>YOUR PROMPT</a:t>
+            </a:r>
+            <a:endParaRPr lang="en-US" sz="1100" dirty="0"/>
+          </a:p>
+        </p:txBody>
+      </p:sp>
+      <p:sp>
+        <p:nvSpPr>
+          <p:cNvPr id="6" name="Shape 4"/>
+          <p:cNvSpPr/>
+          <p:nvPr/>
+        </p:nvSpPr>
+        <p:spPr>
+          <a:xfrm>
+            <a:off x="365760" y="1737360"/>
+            <a:ext cx="8412480" cy="1417320"/>
           </a:xfrm>
           <a:prstGeom prst="roundRect">
             <a:avLst>
-              <a:gd name="adj" fmla="val 7143"/>
+              <a:gd name="adj" fmla="val 6452"/>
             </a:avLst>
           </a:prstGeom>
           <a:solidFill>
             <a:srgbClr val="FFFFFF"/>
           </a:solidFill>
-          <a:ln w="12700">
+          <a:ln w="19050">
             <a:solidFill>
               <a:srgbClr val="C7922C"/>
             </a:solidFill>
@@ -4867,44 +5412,30 @@
       </p:sp>
       <p:sp>
         <p:nvSpPr>
-          <p:cNvPr id="5" name="Text 3"/>
-          <p:cNvSpPr/>
-          <p:nvPr/>
-        </p:nvSpPr>
-        <p:spPr>
-          <a:xfrm>
-            <a:off x="640080" y="1417320"/>
-            <a:ext cx="7863840" cy="1188720"/>
-          </a:xfrm>
-          <a:prstGeom prst="rect">
-            <a:avLst/>
-          </a:prstGeom>
-          <a:noFill/>
-          <a:ln/>
-        </p:spPr>
-        <p:txBody>
-          <a:bodyPr wrap="square" lIns="0" tIns="0" rIns="0" bIns="0" rtlCol="0" anchor="t"/>
-          <a:lstStyle/>
-          <a:p>
-            <a:pPr indent="0" marL="0">
-              <a:buNone/>
-            </a:pPr>
-            <a:r>
-              <a:rPr lang="en-US" sz="1200" b="1" dirty="0">
-                <a:solidFill>
-                  <a:srgbClr val="C7922C"/>
-                </a:solidFill>
-                <a:latin typeface="Calibri" pitchFamily="34" charset="0"/>
-                <a:ea typeface="Calibri" pitchFamily="34" charset="-122"/>
-                <a:cs typeface="Calibri" pitchFamily="34" charset="-120"/>
-              </a:rPr>
-              <a:t>📖 Prompt: </a:t>
-            </a:r>
-            <a:pPr indent="0" marL="0">
-              <a:buNone/>
-            </a:pPr>
-            <a:r>
-              <a:rPr lang="en-US" sz="1200" i="1" dirty="0">
+          <p:cNvPr id="7" name="Text 5"/>
+          <p:cNvSpPr/>
+          <p:nvPr/>
+        </p:nvSpPr>
+        <p:spPr>
+          <a:xfrm>
+            <a:off x="594360" y="1865376"/>
+            <a:ext cx="7955280" cy="1161288"/>
+          </a:xfrm>
+          <a:prstGeom prst="rect">
+            <a:avLst/>
+          </a:prstGeom>
+          <a:noFill/>
+          <a:ln/>
+        </p:spPr>
+        <p:txBody>
+          <a:bodyPr wrap="square" lIns="0" tIns="0" rIns="0" bIns="0" rtlCol="0" anchor="ctr"/>
+          <a:lstStyle/>
+          <a:p>
+            <a:pPr indent="0" marL="0">
+              <a:buNone/>
+            </a:pPr>
+            <a:r>
+              <a:rPr lang="en-US" sz="1700" dirty="0">
                 <a:solidFill>
                   <a:srgbClr val="1E293B"/>
                 </a:solidFill>
@@ -4912,122 +5443,48 @@
                 <a:ea typeface="Calibri" pitchFamily="34" charset="-122"/>
                 <a:cs typeface="Calibri" pitchFamily="34" charset="-120"/>
               </a:rPr>
-              <a:t>Stanley's brother Arthur was right there when the bulletin board fell. Write about a time you saw something surprising or scary happen to someone you care about. What did you do? How did you feel?</a:t>
-            </a:r>
-            <a:endParaRPr lang="en-US" sz="1200" dirty="0"/>
-          </a:p>
-        </p:txBody>
-      </p:sp>
-      <p:sp>
-        <p:nvSpPr>
-          <p:cNvPr id="6" name="Shape 4"/>
-          <p:cNvSpPr/>
-          <p:nvPr/>
-        </p:nvSpPr>
-        <p:spPr>
-          <a:xfrm>
-            <a:off x="2286000" y="2926080"/>
-            <a:ext cx="4572000" cy="1280160"/>
-          </a:xfrm>
-          <a:prstGeom prst="roundRect">
-            <a:avLst>
-              <a:gd name="adj" fmla="val 8571"/>
-            </a:avLst>
-          </a:prstGeom>
-          <a:solidFill>
-            <a:srgbClr val="FFFFFF"/>
-          </a:solidFill>
-          <a:ln/>
-          <a:effectLst>
-            <a:outerShdw sx="100000" sy="100000" kx="0" ky="0" algn="bl" rotWithShape="0" blurRad="101600" dist="38100" dir="2700000">
-              <a:srgbClr val="000000">
-                <a:alpha val="12000"/>
-              </a:srgbClr>
-            </a:outerShdw>
-          </a:effectLst>
-        </p:spPr>
-      </p:sp>
-      <p:sp>
-        <p:nvSpPr>
-          <p:cNvPr id="7" name="Text 5"/>
-          <p:cNvSpPr/>
-          <p:nvPr/>
-        </p:nvSpPr>
-        <p:spPr>
-          <a:xfrm>
-            <a:off x="2468880" y="3017520"/>
-            <a:ext cx="4206240" cy="1097280"/>
-          </a:xfrm>
-          <a:prstGeom prst="rect">
-            <a:avLst/>
-          </a:prstGeom>
-          <a:noFill/>
-          <a:ln/>
-        </p:spPr>
-        <p:txBody>
-          <a:bodyPr wrap="square" lIns="0" tIns="0" rIns="0" bIns="0" rtlCol="0" anchor="t"/>
-          <a:lstStyle/>
-          <a:p>
-            <a:pPr indent="0" marL="0">
-              <a:buNone/>
-            </a:pPr>
-            <a:r>
-              <a:rPr lang="en-US" sz="1400" b="1" dirty="0">
-                <a:solidFill>
-                  <a:srgbClr val="0E1C42"/>
-                </a:solidFill>
-                <a:latin typeface="Calibri" pitchFamily="34" charset="0"/>
-                <a:ea typeface="Calibri" pitchFamily="34" charset="-122"/>
-                <a:cs typeface="Calibri" pitchFamily="34" charset="-120"/>
-              </a:rPr>
-              <a:t>If you get stuck:
-</a:t>
-            </a:r>
-            <a:pPr indent="0" marL="0">
-              <a:buNone/>
-            </a:pPr>
-            <a:r>
-              <a:rPr lang="en-US" sz="1300" dirty="0">
-                <a:solidFill>
-                  <a:srgbClr val="1E293B"/>
-                </a:solidFill>
-                <a:latin typeface="Calibri" pitchFamily="34" charset="0"/>
-                <a:ea typeface="Calibri" pitchFamily="34" charset="-122"/>
-                <a:cs typeface="Calibri" pitchFamily="34" charset="-120"/>
-              </a:rPr>
-              <a:t>• Reread the prompt above
-</a:t>
-            </a:r>
-            <a:pPr indent="0" marL="0">
-              <a:buNone/>
-            </a:pPr>
-            <a:r>
-              <a:rPr lang="en-US" sz="1300" dirty="0">
-                <a:solidFill>
-                  <a:srgbClr val="1E293B"/>
-                </a:solidFill>
-                <a:latin typeface="Calibri" pitchFamily="34" charset="0"/>
-                <a:ea typeface="Calibri" pitchFamily="34" charset="-122"/>
-                <a:cs typeface="Calibri" pitchFamily="34" charset="-120"/>
-              </a:rPr>
-              <a:t>• Write "I'm thinking..." until a new idea comes
-</a:t>
-            </a:r>
-            <a:pPr indent="0" marL="0">
-              <a:buNone/>
-            </a:pPr>
-            <a:r>
-              <a:rPr lang="en-US" sz="1300" dirty="0">
-                <a:solidFill>
-                  <a:srgbClr val="1E293B"/>
-                </a:solidFill>
-                <a:latin typeface="Calibri" pitchFamily="34" charset="0"/>
-                <a:ea typeface="Calibri" pitchFamily="34" charset="-122"/>
-                <a:cs typeface="Calibri" pitchFamily="34" charset="-120"/>
-              </a:rPr>
-              <a:t>• Keep going — don't erase!</a:t>
-            </a:r>
-            <a:endParaRPr lang="en-US" sz="1400" dirty="0"/>
+              <a:t>If you woke up tomorrow and something about you had changed overnight, what would you want it to be? Why?</a:t>
+            </a:r>
+            <a:endParaRPr lang="en-US" sz="1700" dirty="0"/>
+          </a:p>
+        </p:txBody>
+      </p:sp>
+      <p:sp>
+        <p:nvSpPr>
+          <p:cNvPr id="8" name="Text 6"/>
+          <p:cNvSpPr/>
+          <p:nvPr/>
+        </p:nvSpPr>
+        <p:spPr>
+          <a:xfrm>
+            <a:off x="365760" y="3291840"/>
+            <a:ext cx="8412480" cy="365760"/>
+          </a:xfrm>
+          <a:prstGeom prst="rect">
+            <a:avLst/>
+          </a:prstGeom>
+          <a:noFill/>
+          <a:ln/>
+        </p:spPr>
+        <p:txBody>
+          <a:bodyPr wrap="square" lIns="0" tIns="0" rIns="0" bIns="0" rtlCol="0" anchor="ctr"/>
+          <a:lstStyle/>
+          <a:p>
+            <a:pPr indent="0" marL="0">
+              <a:buNone/>
+            </a:pPr>
+            <a:r>
+              <a:rPr lang="en-US" sz="1500" i="1" dirty="0">
+                <a:solidFill>
+                  <a:srgbClr val="64748B"/>
+                </a:solidFill>
+                <a:latin typeface="Calibri" pitchFamily="34" charset="0"/>
+                <a:ea typeface="Calibri" pitchFamily="34" charset="-122"/>
+                <a:cs typeface="Calibri" pitchFamily="34" charset="-120"/>
+              </a:rPr>
+              <a:t>Do not stop to erase. If you get stuck, write the last word again and keep going.</a:t>
+            </a:r>
+            <a:endParaRPr lang="en-US" sz="1500" dirty="0"/>
           </a:p>
         </p:txBody>
       </p:sp>
@@ -5065,39 +5522,23 @@
       </p:grpSpPr>
       <p:sp>
         <p:nvSpPr>
-          <p:cNvPr id="2" name="Text 0"/>
-          <p:cNvSpPr/>
-          <p:nvPr/>
-        </p:nvSpPr>
-        <p:spPr>
-          <a:xfrm>
-            <a:off x="3657600" y="365760"/>
-            <a:ext cx="1828800" cy="640080"/>
-          </a:xfrm>
-          <a:prstGeom prst="rect">
-            <a:avLst/>
-          </a:prstGeom>
-          <a:noFill/>
-          <a:ln/>
-        </p:spPr>
-        <p:txBody>
-          <a:bodyPr wrap="square" lIns="0" tIns="0" rIns="0" bIns="0" rtlCol="0" anchor="ctr"/>
-          <a:lstStyle/>
-          <a:p>
-            <a:pPr algn="ctr" indent="0" marL="0">
-              <a:buNone/>
-            </a:pPr>
-            <a:r>
-              <a:rPr lang="en-US" sz="4000" dirty="0">
-                <a:solidFill>
-                  <a:srgbClr val="000000"/>
-                </a:solidFill>
-              </a:rPr>
-              <a:t>🔍</a:t>
-            </a:r>
-            <a:endParaRPr lang="en-US" sz="4000" dirty="0"/>
-          </a:p>
-        </p:txBody>
+          <p:cNvPr id="2" name="Shape 0"/>
+          <p:cNvSpPr/>
+          <p:nvPr/>
+        </p:nvSpPr>
+        <p:spPr>
+          <a:xfrm>
+            <a:off x="0" y="0"/>
+            <a:ext cx="9144000" cy="566928"/>
+          </a:xfrm>
+          <a:prstGeom prst="rect">
+            <a:avLst/>
+          </a:prstGeom>
+          <a:solidFill>
+            <a:srgbClr val="34B76F"/>
+          </a:solidFill>
+          <a:ln/>
+        </p:spPr>
       </p:sp>
       <p:sp>
         <p:nvSpPr>
@@ -5107,24 +5548,63 @@
         </p:nvSpPr>
         <p:spPr>
           <a:xfrm>
-            <a:off x="914400" y="914400"/>
-            <a:ext cx="7315200" cy="640080"/>
-          </a:xfrm>
-          <a:prstGeom prst="rect">
-            <a:avLst/>
-          </a:prstGeom>
-          <a:noFill/>
-          <a:ln/>
-        </p:spPr>
-        <p:txBody>
-          <a:bodyPr wrap="square" lIns="0" tIns="0" rIns="0" bIns="0" rtlCol="0" anchor="ctr"/>
-          <a:lstStyle/>
-          <a:p>
-            <a:pPr algn="ctr" indent="0" marL="0">
-              <a:buNone/>
-            </a:pPr>
-            <a:r>
-              <a:rPr lang="en-US" sz="3200" b="1" dirty="0">
+            <a:off x="365760" y="54864"/>
+            <a:ext cx="8412480" cy="457200"/>
+          </a:xfrm>
+          <a:prstGeom prst="rect">
+            <a:avLst/>
+          </a:prstGeom>
+          <a:noFill/>
+          <a:ln/>
+        </p:spPr>
+        <p:txBody>
+          <a:bodyPr wrap="square" lIns="0" tIns="0" rIns="0" bIns="0" rtlCol="0" anchor="ctr"/>
+          <a:lstStyle/>
+          <a:p>
+            <a:pPr indent="0" marL="0">
+              <a:buNone/>
+            </a:pPr>
+            <a:r>
+              <a:rPr lang="en-US" sz="2200" b="1" dirty="0">
+                <a:solidFill>
+                  <a:srgbClr val="FFFFFF"/>
+                </a:solidFill>
+                <a:latin typeface="Calibri" pitchFamily="34" charset="0"/>
+                <a:ea typeface="Calibri" pitchFamily="34" charset="-122"/>
+                <a:cs typeface="Calibri" pitchFamily="34" charset="-120"/>
+              </a:rPr>
+              <a:t>🔍  Edit &amp; Revise</a:t>
+            </a:r>
+            <a:endParaRPr lang="en-US" sz="2200" dirty="0"/>
+          </a:p>
+        </p:txBody>
+      </p:sp>
+      <p:sp>
+        <p:nvSpPr>
+          <p:cNvPr id="4" name="Text 2"/>
+          <p:cNvSpPr/>
+          <p:nvPr/>
+        </p:nvSpPr>
+        <p:spPr>
+          <a:xfrm>
+            <a:off x="365760" y="868680"/>
+            <a:ext cx="8412480" cy="457200"/>
+          </a:xfrm>
+          <a:prstGeom prst="rect">
+            <a:avLst/>
+          </a:prstGeom>
+          <a:noFill/>
+          <a:ln/>
+        </p:spPr>
+        <p:txBody>
+          <a:bodyPr wrap="square" lIns="0" tIns="0" rIns="0" bIns="0" rtlCol="0" anchor="ctr"/>
+          <a:lstStyle/>
+          <a:p>
+            <a:pPr indent="0" marL="0">
+              <a:buNone/>
+            </a:pPr>
+            <a:r>
+              <a:rPr lang="en-US" sz="2400" b="1" dirty="0">
                 <a:solidFill>
                   <a:srgbClr val="0E1C42"/>
                 </a:solidFill>
@@ -5132,38 +5612,38 @@
                 <a:ea typeface="Calibri" pitchFamily="34" charset="-122"/>
                 <a:cs typeface="Calibri" pitchFamily="34" charset="-120"/>
               </a:rPr>
-              <a:t>Edit &amp; Revise</a:t>
-            </a:r>
-            <a:endParaRPr lang="en-US" sz="3200" dirty="0"/>
-          </a:p>
-        </p:txBody>
-      </p:sp>
-      <p:sp>
-        <p:nvSpPr>
-          <p:cNvPr id="4" name="Text 2"/>
-          <p:cNvSpPr/>
-          <p:nvPr/>
-        </p:nvSpPr>
-        <p:spPr>
-          <a:xfrm>
-            <a:off x="914400" y="1508760"/>
-            <a:ext cx="7315200" cy="457200"/>
-          </a:xfrm>
-          <a:prstGeom prst="rect">
-            <a:avLst/>
-          </a:prstGeom>
-          <a:noFill/>
-          <a:ln/>
-        </p:spPr>
-        <p:txBody>
-          <a:bodyPr wrap="square" lIns="0" tIns="0" rIns="0" bIns="0" rtlCol="0" anchor="ctr"/>
-          <a:lstStyle/>
-          <a:p>
-            <a:pPr algn="ctr" indent="0" marL="0">
-              <a:buNone/>
-            </a:pPr>
-            <a:r>
-              <a:rPr lang="en-US" sz="1600" dirty="0">
+              <a:t>1 minute — pick ONE thing to fix.</a:t>
+            </a:r>
+            <a:endParaRPr lang="en-US" sz="2400" dirty="0"/>
+          </a:p>
+        </p:txBody>
+      </p:sp>
+      <p:sp>
+        <p:nvSpPr>
+          <p:cNvPr id="5" name="Text 3"/>
+          <p:cNvSpPr/>
+          <p:nvPr/>
+        </p:nvSpPr>
+        <p:spPr>
+          <a:xfrm>
+            <a:off x="365760" y="1417320"/>
+            <a:ext cx="8229600" cy="237744"/>
+          </a:xfrm>
+          <a:prstGeom prst="rect">
+            <a:avLst/>
+          </a:prstGeom>
+          <a:noFill/>
+          <a:ln/>
+        </p:spPr>
+        <p:txBody>
+          <a:bodyPr wrap="square" lIns="0" tIns="0" rIns="0" bIns="0" rtlCol="0" anchor="ctr"/>
+          <a:lstStyle/>
+          <a:p>
+            <a:pPr indent="0" marL="0">
+              <a:buNone/>
+            </a:pPr>
+            <a:r>
+              <a:rPr lang="en-US" sz="1100" b="1" spc="100" kern="0" dirty="0">
                 <a:solidFill>
                   <a:srgbClr val="34B76F"/>
                 </a:solidFill>
@@ -5171,26 +5651,26 @@
                 <a:ea typeface="Calibri" pitchFamily="34" charset="-122"/>
                 <a:cs typeface="Calibri" pitchFamily="34" charset="-120"/>
               </a:rPr>
-              <a:t>1 minute — pick ONE thing to fix</a:t>
-            </a:r>
-            <a:endParaRPr lang="en-US" sz="1600" dirty="0"/>
-          </a:p>
-        </p:txBody>
-      </p:sp>
-      <p:sp>
-        <p:nvSpPr>
-          <p:cNvPr id="5" name="Shape 3"/>
-          <p:cNvSpPr/>
-          <p:nvPr/>
-        </p:nvSpPr>
-        <p:spPr>
-          <a:xfrm>
-            <a:off x="1371600" y="2103120"/>
-            <a:ext cx="6400800" cy="640080"/>
+              <a:t>TODAY'S EDIT FOCUS</a:t>
+            </a:r>
+            <a:endParaRPr lang="en-US" sz="1100" dirty="0"/>
+          </a:p>
+        </p:txBody>
+      </p:sp>
+      <p:sp>
+        <p:nvSpPr>
+          <p:cNvPr id="6" name="Shape 4"/>
+          <p:cNvSpPr/>
+          <p:nvPr/>
+        </p:nvSpPr>
+        <p:spPr>
+          <a:xfrm>
+            <a:off x="365760" y="1691640"/>
+            <a:ext cx="8412480" cy="777240"/>
           </a:xfrm>
           <a:prstGeom prst="roundRect">
             <a:avLst>
-              <a:gd name="adj" fmla="val 14286"/>
+              <a:gd name="adj" fmla="val 11765"/>
             </a:avLst>
           </a:prstGeom>
           <a:solidFill>
@@ -5213,44 +5693,30 @@
       </p:sp>
       <p:sp>
         <p:nvSpPr>
-          <p:cNvPr id="6" name="Text 4"/>
-          <p:cNvSpPr/>
-          <p:nvPr/>
-        </p:nvSpPr>
-        <p:spPr>
-          <a:xfrm>
-            <a:off x="1554480" y="2148840"/>
-            <a:ext cx="6035040" cy="548640"/>
-          </a:xfrm>
-          <a:prstGeom prst="rect">
-            <a:avLst/>
-          </a:prstGeom>
-          <a:noFill/>
-          <a:ln/>
-        </p:spPr>
-        <p:txBody>
-          <a:bodyPr wrap="square" lIns="0" tIns="0" rIns="0" bIns="0" rtlCol="0" anchor="ctr"/>
-          <a:lstStyle/>
-          <a:p>
-            <a:pPr indent="0" marL="0">
-              <a:buNone/>
-            </a:pPr>
-            <a:r>
-              <a:rPr lang="en-US" sz="1400" b="1" dirty="0">
-                <a:solidFill>
-                  <a:srgbClr val="34B76F"/>
-                </a:solidFill>
-                <a:latin typeface="Calibri" pitchFamily="34" charset="0"/>
-                <a:ea typeface="Calibri" pitchFamily="34" charset="-122"/>
-                <a:cs typeface="Calibri" pitchFamily="34" charset="-120"/>
-              </a:rPr>
-              <a:t>Today's check: </a:t>
-            </a:r>
-            <a:pPr indent="0" marL="0">
-              <a:buNone/>
-            </a:pPr>
-            <a:r>
-              <a:rPr lang="en-US" sz="1400" dirty="0">
+          <p:cNvPr id="7" name="Text 5"/>
+          <p:cNvSpPr/>
+          <p:nvPr/>
+        </p:nvSpPr>
+        <p:spPr>
+          <a:xfrm>
+            <a:off x="594360" y="1819656"/>
+            <a:ext cx="7955280" cy="521208"/>
+          </a:xfrm>
+          <a:prstGeom prst="rect">
+            <a:avLst/>
+          </a:prstGeom>
+          <a:noFill/>
+          <a:ln/>
+        </p:spPr>
+        <p:txBody>
+          <a:bodyPr wrap="square" lIns="0" tIns="0" rIns="0" bIns="0" rtlCol="0" anchor="ctr"/>
+          <a:lstStyle/>
+          <a:p>
+            <a:pPr indent="0" marL="0">
+              <a:buNone/>
+            </a:pPr>
+            <a:r>
+              <a:rPr lang="en-US" sz="1700" dirty="0">
                 <a:solidFill>
                   <a:srgbClr val="1E293B"/>
                 </a:solidFill>
@@ -5258,40 +5724,11 @@
                 <a:ea typeface="Calibri" pitchFamily="34" charset="-122"/>
                 <a:cs typeface="Calibri" pitchFamily="34" charset="-120"/>
               </a:rPr>
-              <a:t>Did I include how I felt, not just what happened?</a:t>
-            </a:r>
-            <a:endParaRPr lang="en-US" sz="1400" dirty="0"/>
-          </a:p>
-        </p:txBody>
-      </p:sp>
-      <p:sp>
-        <p:nvSpPr>
-          <p:cNvPr id="7" name="Shape 5"/>
-          <p:cNvSpPr/>
-          <p:nvPr/>
-        </p:nvSpPr>
-        <p:spPr>
-          <a:xfrm>
-            <a:off x="1371600" y="2926080"/>
-            <a:ext cx="6400800" cy="1463040"/>
-          </a:xfrm>
-          <a:prstGeom prst="roundRect">
-            <a:avLst>
-              <a:gd name="adj" fmla="val 6250"/>
-            </a:avLst>
-          </a:prstGeom>
-          <a:solidFill>
-            <a:srgbClr val="FFFFFF"/>
-          </a:solidFill>
-          <a:ln/>
-          <a:effectLst>
-            <a:outerShdw sx="100000" sy="100000" kx="0" ky="0" algn="bl" rotWithShape="0" blurRad="101600" dist="38100" dir="2700000">
-              <a:srgbClr val="000000">
-                <a:alpha val="12000"/>
-              </a:srgbClr>
-            </a:outerShdw>
-          </a:effectLst>
-        </p:spPr>
+              <a:t>Did I end each sentence with a period, question mark, or exclamation point?</a:t>
+            </a:r>
+            <a:endParaRPr lang="en-US" sz="1700" dirty="0"/>
+          </a:p>
+        </p:txBody>
       </p:sp>
       <p:sp>
         <p:nvSpPr>
@@ -5301,45 +5738,24 @@
         </p:nvSpPr>
         <p:spPr>
           <a:xfrm>
-            <a:off x="1554480" y="3017520"/>
-            <a:ext cx="6035040" cy="1280160"/>
-          </a:xfrm>
-          <a:prstGeom prst="rect">
-            <a:avLst/>
-          </a:prstGeom>
-          <a:noFill/>
-          <a:ln/>
-        </p:spPr>
-        <p:txBody>
-          <a:bodyPr wrap="square" lIns="0" tIns="0" rIns="0" bIns="0" rtlCol="0" anchor="t"/>
-          <a:lstStyle/>
-          <a:p>
-            <a:pPr indent="0" marL="0">
-              <a:spcAft>
-                <a:spcPts val="200"/>
-              </a:spcAft>
-              <a:buNone/>
-            </a:pPr>
-            <a:r>
-              <a:rPr lang="en-US" sz="1300" b="1" dirty="0">
-                <a:solidFill>
-                  <a:srgbClr val="0E1C42"/>
-                </a:solidFill>
-                <a:latin typeface="Calibri" pitchFamily="34" charset="0"/>
-                <a:ea typeface="Calibri" pitchFamily="34" charset="-122"/>
-                <a:cs typeface="Calibri" pitchFamily="34" charset="-120"/>
-              </a:rPr>
-              <a:t>Quick check:
-</a:t>
-            </a:r>
-            <a:pPr indent="0" marL="0">
-              <a:spcAft>
-                <a:spcPts val="200"/>
-              </a:spcAft>
-              <a:buNone/>
-            </a:pPr>
-            <a:r>
-              <a:rPr lang="en-US" sz="1200" dirty="0">
+            <a:off x="365760" y="2651760"/>
+            <a:ext cx="8412480" cy="365760"/>
+          </a:xfrm>
+          <a:prstGeom prst="rect">
+            <a:avLst/>
+          </a:prstGeom>
+          <a:noFill/>
+          <a:ln/>
+        </p:spPr>
+        <p:txBody>
+          <a:bodyPr wrap="square" lIns="0" tIns="0" rIns="0" bIns="0" rtlCol="0" anchor="ctr"/>
+          <a:lstStyle/>
+          <a:p>
+            <a:pPr indent="0" marL="0">
+              <a:buNone/>
+            </a:pPr>
+            <a:r>
+              <a:rPr lang="en-US" sz="1500" b="1" dirty="0">
                 <a:solidFill>
                   <a:srgbClr val="1E293B"/>
                 </a:solidFill>
@@ -5347,17 +5763,13 @@
                 <a:ea typeface="Calibri" pitchFamily="34" charset="-122"/>
                 <a:cs typeface="Calibri" pitchFamily="34" charset="-120"/>
               </a:rPr>
-              <a:t>□ Capital letters at the start of every sentence
-</a:t>
-            </a:r>
-            <a:pPr indent="0" marL="0">
-              <a:spcAft>
-                <a:spcPts val="200"/>
-              </a:spcAft>
-              <a:buNone/>
-            </a:pPr>
-            <a:r>
-              <a:rPr lang="en-US" sz="1200" dirty="0">
+              <a:t>Quick check:  </a:t>
+            </a:r>
+            <a:pPr indent="0" marL="0">
+              <a:buNone/>
+            </a:pPr>
+            <a:r>
+              <a:rPr lang="en-US" sz="1500" dirty="0">
                 <a:solidFill>
                   <a:srgbClr val="1E293B"/>
                 </a:solidFill>
@@ -5365,45 +5777,9 @@
                 <a:ea typeface="Calibri" pitchFamily="34" charset="-122"/>
                 <a:cs typeface="Calibri" pitchFamily="34" charset="-120"/>
               </a:rPr>
-              <a:t>□ End punctuation ( .  ?  ! )
-</a:t>
-            </a:r>
-            <a:pPr indent="0" marL="0">
-              <a:spcAft>
-                <a:spcPts val="200"/>
-              </a:spcAft>
-              <a:buNone/>
-            </a:pPr>
-            <a:r>
-              <a:rPr lang="en-US" sz="1200" dirty="0">
-                <a:solidFill>
-                  <a:srgbClr val="1E293B"/>
-                </a:solidFill>
-                <a:latin typeface="Calibri" pitchFamily="34" charset="0"/>
-                <a:ea typeface="Calibri" pitchFamily="34" charset="-122"/>
-                <a:cs typeface="Calibri" pitchFamily="34" charset="-120"/>
-              </a:rPr>
-              <a:t>□ Spelling — circle any words that look wrong
-</a:t>
-            </a:r>
-            <a:pPr indent="0" marL="0">
-              <a:spcAft>
-                <a:spcPts val="200"/>
-              </a:spcAft>
-              <a:buNone/>
-            </a:pPr>
-            <a:r>
-              <a:rPr lang="en-US" sz="1200" dirty="0">
-                <a:solidFill>
-                  <a:srgbClr val="1E293B"/>
-                </a:solidFill>
-                <a:latin typeface="Calibri" pitchFamily="34" charset="0"/>
-                <a:ea typeface="Calibri" pitchFamily="34" charset="-122"/>
-                <a:cs typeface="Calibri" pitchFamily="34" charset="-120"/>
-              </a:rPr>
-              <a:t>□ Read it quietly to yourself — does it sound right?</a:t>
-            </a:r>
-            <a:endParaRPr lang="en-US" sz="1300" dirty="0"/>
+              <a:t>capitals  ·  end punctuation  ·  circle a word you are unsure of  ·  read it aloud</a:t>
+            </a:r>
+            <a:endParaRPr lang="en-US" sz="1500" dirty="0"/>
           </a:p>
         </p:txBody>
       </p:sp>
@@ -5441,39 +5817,23 @@
       </p:grpSpPr>
       <p:sp>
         <p:nvSpPr>
-          <p:cNvPr id="2" name="Text 0"/>
-          <p:cNvSpPr/>
-          <p:nvPr/>
-        </p:nvSpPr>
-        <p:spPr>
-          <a:xfrm>
-            <a:off x="3657600" y="457200"/>
-            <a:ext cx="1828800" cy="731520"/>
-          </a:xfrm>
-          <a:prstGeom prst="rect">
-            <a:avLst/>
-          </a:prstGeom>
-          <a:noFill/>
-          <a:ln/>
-        </p:spPr>
-        <p:txBody>
-          <a:bodyPr wrap="square" lIns="0" tIns="0" rIns="0" bIns="0" rtlCol="0" anchor="ctr"/>
-          <a:lstStyle/>
-          <a:p>
-            <a:pPr algn="ctr" indent="0" marL="0">
-              <a:buNone/>
-            </a:pPr>
-            <a:r>
-              <a:rPr lang="en-US" sz="4400" dirty="0">
-                <a:solidFill>
-                  <a:srgbClr val="000000"/>
-                </a:solidFill>
-              </a:rPr>
-              <a:t>🗣️</a:t>
-            </a:r>
-            <a:endParaRPr lang="en-US" sz="4400" dirty="0"/>
-          </a:p>
-        </p:txBody>
+          <p:cNvPr id="2" name="Shape 0"/>
+          <p:cNvSpPr/>
+          <p:nvPr/>
+        </p:nvSpPr>
+        <p:spPr>
+          <a:xfrm>
+            <a:off x="0" y="0"/>
+            <a:ext cx="9144000" cy="566928"/>
+          </a:xfrm>
+          <a:prstGeom prst="rect">
+            <a:avLst/>
+          </a:prstGeom>
+          <a:solidFill>
+            <a:srgbClr val="55C8E8"/>
+          </a:solidFill>
+          <a:ln/>
+        </p:spPr>
       </p:sp>
       <p:sp>
         <p:nvSpPr>
@@ -5483,24 +5843,63 @@
         </p:nvSpPr>
         <p:spPr>
           <a:xfrm>
-            <a:off x="914400" y="1097280"/>
-            <a:ext cx="7315200" cy="640080"/>
-          </a:xfrm>
-          <a:prstGeom prst="rect">
-            <a:avLst/>
-          </a:prstGeom>
-          <a:noFill/>
-          <a:ln/>
-        </p:spPr>
-        <p:txBody>
-          <a:bodyPr wrap="square" lIns="0" tIns="0" rIns="0" bIns="0" rtlCol="0" anchor="ctr"/>
-          <a:lstStyle/>
-          <a:p>
-            <a:pPr algn="ctr" indent="0" marL="0">
-              <a:buNone/>
-            </a:pPr>
-            <a:r>
-              <a:rPr lang="en-US" sz="3400" b="1" dirty="0">
+            <a:off x="365760" y="54864"/>
+            <a:ext cx="8412480" cy="457200"/>
+          </a:xfrm>
+          <a:prstGeom prst="rect">
+            <a:avLst/>
+          </a:prstGeom>
+          <a:noFill/>
+          <a:ln/>
+        </p:spPr>
+        <p:txBody>
+          <a:bodyPr wrap="square" lIns="0" tIns="0" rIns="0" bIns="0" rtlCol="0" anchor="ctr"/>
+          <a:lstStyle/>
+          <a:p>
+            <a:pPr indent="0" marL="0">
+              <a:buNone/>
+            </a:pPr>
+            <a:r>
+              <a:rPr lang="en-US" sz="2200" b="1" dirty="0">
+                <a:solidFill>
+                  <a:srgbClr val="FFFFFF"/>
+                </a:solidFill>
+                <a:latin typeface="Calibri" pitchFamily="34" charset="0"/>
+                <a:ea typeface="Calibri" pitchFamily="34" charset="-122"/>
+                <a:cs typeface="Calibri" pitchFamily="34" charset="-120"/>
+              </a:rPr>
+              <a:t>🗣️  Share Time</a:t>
+            </a:r>
+            <a:endParaRPr lang="en-US" sz="2200" dirty="0"/>
+          </a:p>
+        </p:txBody>
+      </p:sp>
+      <p:sp>
+        <p:nvSpPr>
+          <p:cNvPr id="4" name="Text 2"/>
+          <p:cNvSpPr/>
+          <p:nvPr/>
+        </p:nvSpPr>
+        <p:spPr>
+          <a:xfrm>
+            <a:off x="365760" y="1005840"/>
+            <a:ext cx="8412480" cy="548640"/>
+          </a:xfrm>
+          <a:prstGeom prst="rect">
+            <a:avLst/>
+          </a:prstGeom>
+          <a:noFill/>
+          <a:ln/>
+        </p:spPr>
+        <p:txBody>
+          <a:bodyPr wrap="square" lIns="0" tIns="0" rIns="0" bIns="0" rtlCol="0" anchor="ctr"/>
+          <a:lstStyle/>
+          <a:p>
+            <a:pPr indent="0" marL="0">
+              <a:buNone/>
+            </a:pPr>
+            <a:r>
+              <a:rPr lang="en-US" sz="2600" b="1" dirty="0">
                 <a:solidFill>
                   <a:srgbClr val="0E1C42"/>
                 </a:solidFill>
@@ -5508,191 +5907,48 @@
                 <a:ea typeface="Calibri" pitchFamily="34" charset="-122"/>
                 <a:cs typeface="Calibri" pitchFamily="34" charset="-120"/>
               </a:rPr>
-              <a:t>Share Time</a:t>
-            </a:r>
-            <a:endParaRPr lang="en-US" sz="3400" dirty="0"/>
-          </a:p>
-        </p:txBody>
-      </p:sp>
-      <p:sp>
-        <p:nvSpPr>
-          <p:cNvPr id="4" name="Text 2"/>
-          <p:cNvSpPr/>
-          <p:nvPr/>
-        </p:nvSpPr>
-        <p:spPr>
-          <a:xfrm>
-            <a:off x="914400" y="1737360"/>
-            <a:ext cx="7315200" cy="457200"/>
-          </a:xfrm>
-          <a:prstGeom prst="rect">
-            <a:avLst/>
-          </a:prstGeom>
-          <a:noFill/>
-          <a:ln/>
-        </p:spPr>
-        <p:txBody>
-          <a:bodyPr wrap="square" lIns="0" tIns="0" rIns="0" bIns="0" rtlCol="0" anchor="ctr"/>
-          <a:lstStyle/>
-          <a:p>
-            <a:pPr algn="ctr" indent="0" marL="0">
+              <a:t>3 minutes — let's hear your writing!</a:t>
+            </a:r>
+            <a:endParaRPr lang="en-US" sz="2600" dirty="0"/>
+          </a:p>
+        </p:txBody>
+      </p:sp>
+      <p:sp>
+        <p:nvSpPr>
+          <p:cNvPr id="5" name="Text 3"/>
+          <p:cNvSpPr/>
+          <p:nvPr/>
+        </p:nvSpPr>
+        <p:spPr>
+          <a:xfrm>
+            <a:off x="365760" y="1691640"/>
+            <a:ext cx="8412480" cy="457200"/>
+          </a:xfrm>
+          <a:prstGeom prst="rect">
+            <a:avLst/>
+          </a:prstGeom>
+          <a:noFill/>
+          <a:ln/>
+        </p:spPr>
+        <p:txBody>
+          <a:bodyPr wrap="square" lIns="0" tIns="0" rIns="0" bIns="0" rtlCol="0" anchor="ctr"/>
+          <a:lstStyle/>
+          <a:p>
+            <a:pPr indent="0" marL="0">
               <a:buNone/>
             </a:pPr>
             <a:r>
               <a:rPr lang="en-US" sz="1700" dirty="0">
                 <a:solidFill>
-                  <a:srgbClr val="55C8E8"/>
-                </a:solidFill>
-                <a:latin typeface="Calibri" pitchFamily="34" charset="0"/>
-                <a:ea typeface="Calibri" pitchFamily="34" charset="-122"/>
-                <a:cs typeface="Calibri" pitchFamily="34" charset="-120"/>
-              </a:rPr>
-              <a:t>3 minutes — let's hear your writing!</a:t>
+                  <a:srgbClr val="1E293B"/>
+                </a:solidFill>
+                <a:latin typeface="Calibri" pitchFamily="34" charset="0"/>
+                <a:ea typeface="Calibri" pitchFamily="34" charset="-122"/>
+                <a:cs typeface="Calibri" pitchFamily="34" charset="-120"/>
+              </a:rPr>
+              <a:t>Raise your hand  ·  paste it in the chat  ·  or hold your paper up to the camera</a:t>
             </a:r>
             <a:endParaRPr lang="en-US" sz="1700" dirty="0"/>
-          </a:p>
-        </p:txBody>
-      </p:sp>
-      <p:sp>
-        <p:nvSpPr>
-          <p:cNvPr id="5" name="Shape 3"/>
-          <p:cNvSpPr/>
-          <p:nvPr/>
-        </p:nvSpPr>
-        <p:spPr>
-          <a:xfrm>
-            <a:off x="1828800" y="2468880"/>
-            <a:ext cx="5486400" cy="1645920"/>
-          </a:xfrm>
-          <a:prstGeom prst="roundRect">
-            <a:avLst>
-              <a:gd name="adj" fmla="val 6667"/>
-            </a:avLst>
-          </a:prstGeom>
-          <a:solidFill>
-            <a:srgbClr val="FFFFFF"/>
-          </a:solidFill>
-          <a:ln/>
-          <a:effectLst>
-            <a:outerShdw sx="100000" sy="100000" kx="0" ky="0" algn="bl" rotWithShape="0" blurRad="101600" dist="38100" dir="2700000">
-              <a:srgbClr val="000000">
-                <a:alpha val="12000"/>
-              </a:srgbClr>
-            </a:outerShdw>
-          </a:effectLst>
-        </p:spPr>
-      </p:sp>
-      <p:sp>
-        <p:nvSpPr>
-          <p:cNvPr id="6" name="Text 4"/>
-          <p:cNvSpPr/>
-          <p:nvPr/>
-        </p:nvSpPr>
-        <p:spPr>
-          <a:xfrm>
-            <a:off x="2103120" y="2560320"/>
-            <a:ext cx="4937760" cy="1463040"/>
-          </a:xfrm>
-          <a:prstGeom prst="rect">
-            <a:avLst/>
-          </a:prstGeom>
-          <a:noFill/>
-          <a:ln/>
-        </p:spPr>
-        <p:txBody>
-          <a:bodyPr wrap="square" lIns="0" tIns="0" rIns="0" bIns="0" rtlCol="0" anchor="t"/>
-          <a:lstStyle/>
-          <a:p>
-            <a:pPr indent="0" marL="0">
-              <a:spcAft>
-                <a:spcPts val="200"/>
-              </a:spcAft>
-              <a:buNone/>
-            </a:pPr>
-            <a:r>
-              <a:rPr lang="en-US" sz="1400" b="1" dirty="0">
-                <a:solidFill>
-                  <a:srgbClr val="0E1C42"/>
-                </a:solidFill>
-                <a:latin typeface="Calibri" pitchFamily="34" charset="0"/>
-                <a:ea typeface="Calibri" pitchFamily="34" charset="-122"/>
-                <a:cs typeface="Calibri" pitchFamily="34" charset="-120"/>
-              </a:rPr>
-              <a:t>How to share:
-</a:t>
-            </a:r>
-            <a:pPr indent="0" marL="0">
-              <a:spcAft>
-                <a:spcPts val="200"/>
-              </a:spcAft>
-              <a:buNone/>
-            </a:pPr>
-            <a:r>
-              <a:rPr lang="en-US" sz="1300" dirty="0">
-                <a:solidFill>
-                  <a:srgbClr val="1E293B"/>
-                </a:solidFill>
-                <a:latin typeface="Calibri" pitchFamily="34" charset="0"/>
-                <a:ea typeface="Calibri" pitchFamily="34" charset="-122"/>
-                <a:cs typeface="Calibri" pitchFamily="34" charset="-120"/>
-              </a:rPr>
-              <a:t>✋ Raise your hand if you want to read yours aloud
-</a:t>
-            </a:r>
-            <a:pPr indent="0" marL="0">
-              <a:spcAft>
-                <a:spcPts val="200"/>
-              </a:spcAft>
-              <a:buNone/>
-            </a:pPr>
-            <a:r>
-              <a:rPr lang="en-US" sz="1300" dirty="0">
-                <a:solidFill>
-                  <a:srgbClr val="1E293B"/>
-                </a:solidFill>
-                <a:latin typeface="Calibri" pitchFamily="34" charset="0"/>
-                <a:ea typeface="Calibri" pitchFamily="34" charset="-122"/>
-                <a:cs typeface="Calibri" pitchFamily="34" charset="-120"/>
-              </a:rPr>
-              <a:t>💬 Or paste your writing in the chat
-</a:t>
-            </a:r>
-            <a:pPr indent="0" marL="0">
-              <a:spcAft>
-                <a:spcPts val="200"/>
-              </a:spcAft>
-              <a:buNone/>
-            </a:pPr>
-            <a:r>
-              <a:rPr lang="en-US" sz="1300" dirty="0">
-                <a:solidFill>
-                  <a:srgbClr val="1E293B"/>
-                </a:solidFill>
-                <a:latin typeface="Calibri" pitchFamily="34" charset="0"/>
-                <a:ea typeface="Calibri" pitchFamily="34" charset="-122"/>
-                <a:cs typeface="Calibri" pitchFamily="34" charset="-120"/>
-              </a:rPr>
-              <a:t>👂 Listen respectfully when others share
-</a:t>
-            </a:r>
-            <a:pPr indent="0" marL="0">
-              <a:spcAft>
-                <a:spcPts val="200"/>
-              </a:spcAft>
-              <a:buNone/>
-            </a:pPr>
-            <a:r>
-              <a:rPr lang="en-US" sz="1200" i="1" dirty="0">
-                <a:solidFill>
-                  <a:srgbClr val="64748B"/>
-                </a:solidFill>
-                <a:latin typeface="Calibri" pitchFamily="34" charset="0"/>
-                <a:ea typeface="Calibri" pitchFamily="34" charset="-122"/>
-                <a:cs typeface="Calibri" pitchFamily="34" charset="-120"/>
-              </a:rPr>
-              <a:t>Every writer's ideas matter — there are no wrong answers.</a:t>
-            </a:r>
-            <a:endParaRPr lang="en-US" sz="1400" dirty="0"/>
           </a:p>
         </p:txBody>
       </p:sp>
@@ -5710,7 +5966,7 @@
     <p:bg>
       <p:bgPr>
         <a:solidFill>
-          <a:srgbClr val="E5F7FC"/>
+          <a:srgbClr val="F8FAFC"/>
         </a:solidFill>
       </p:bgPr>
     </p:bg>
@@ -5730,81 +5986,17 @@
       </p:grpSpPr>
       <p:sp>
         <p:nvSpPr>
-          <p:cNvPr id="2" name="Text 0"/>
-          <p:cNvSpPr/>
-          <p:nvPr/>
-        </p:nvSpPr>
-        <p:spPr>
-          <a:xfrm>
-            <a:off x="365760" y="164592"/>
-            <a:ext cx="5943600" cy="566928"/>
-          </a:xfrm>
-          <a:prstGeom prst="rect">
-            <a:avLst/>
-          </a:prstGeom>
-          <a:noFill/>
-          <a:ln/>
-        </p:spPr>
-        <p:txBody>
-          <a:bodyPr wrap="square" lIns="0" tIns="0" rIns="0" bIns="0" rtlCol="0" anchor="ctr"/>
-          <a:lstStyle/>
-          <a:p>
-            <a:pPr algn="l" indent="0" marL="0">
-              <a:buNone/>
-            </a:pPr>
-            <a:r>
-              <a:rPr lang="en-US" sz="2800" b="1" dirty="0">
-                <a:solidFill>
-                  <a:srgbClr val="0E1C42"/>
-                </a:solidFill>
-                <a:latin typeface="Calibri" pitchFamily="34" charset="0"/>
-                <a:ea typeface="Calibri" pitchFamily="34" charset="-122"/>
-                <a:cs typeface="Calibri" pitchFamily="34" charset="-120"/>
-              </a:rPr>
-              <a:t>💡 Today's Focus</a:t>
-            </a:r>
-            <a:endParaRPr lang="en-US" sz="2800" dirty="0"/>
-          </a:p>
-        </p:txBody>
-      </p:sp>
-      <p:sp>
-        <p:nvSpPr>
-          <p:cNvPr id="3" name="Shape 1"/>
-          <p:cNvSpPr/>
-          <p:nvPr/>
-        </p:nvSpPr>
-        <p:spPr>
-          <a:xfrm>
-            <a:off x="365760" y="749808"/>
-            <a:ext cx="8412480" cy="0"/>
-          </a:xfrm>
-          <a:prstGeom prst="line">
-            <a:avLst/>
-          </a:prstGeom>
-          <a:noFill/>
-          <a:ln w="19050">
-            <a:solidFill>
-              <a:srgbClr val="55C8E8"/>
-            </a:solidFill>
-            <a:prstDash val="solid"/>
-          </a:ln>
-        </p:spPr>
-      </p:sp>
-      <p:sp>
-        <p:nvSpPr>
-          <p:cNvPr id="4" name="Shape 2"/>
-          <p:cNvSpPr/>
-          <p:nvPr/>
-        </p:nvSpPr>
-        <p:spPr>
-          <a:xfrm>
-            <a:off x="6492240" y="173736"/>
-            <a:ext cx="2286000" cy="502920"/>
-          </a:xfrm>
-          <a:prstGeom prst="roundRect">
-            <a:avLst>
-              <a:gd name="adj" fmla="val 21818"/>
-            </a:avLst>
+          <p:cNvPr id="2" name="Shape 0"/>
+          <p:cNvSpPr/>
+          <p:nvPr/>
+        </p:nvSpPr>
+        <p:spPr>
+          <a:xfrm>
+            <a:off x="0" y="0"/>
+            <a:ext cx="9144000" cy="566928"/>
+          </a:xfrm>
+          <a:prstGeom prst="rect">
+            <a:avLst/>
           </a:prstGeom>
           <a:solidFill>
             <a:srgbClr val="55C8E8"/>
@@ -5814,30 +6006,108 @@
       </p:sp>
       <p:sp>
         <p:nvSpPr>
+          <p:cNvPr id="3" name="Text 1"/>
+          <p:cNvSpPr/>
+          <p:nvPr/>
+        </p:nvSpPr>
+        <p:spPr>
+          <a:xfrm>
+            <a:off x="365760" y="54864"/>
+            <a:ext cx="8412480" cy="457200"/>
+          </a:xfrm>
+          <a:prstGeom prst="rect">
+            <a:avLst/>
+          </a:prstGeom>
+          <a:noFill/>
+          <a:ln/>
+        </p:spPr>
+        <p:txBody>
+          <a:bodyPr wrap="square" lIns="0" tIns="0" rIns="0" bIns="0" rtlCol="0" anchor="ctr"/>
+          <a:lstStyle/>
+          <a:p>
+            <a:pPr indent="0" marL="0">
+              <a:buNone/>
+            </a:pPr>
+            <a:r>
+              <a:rPr lang="en-US" sz="2200" b="1" dirty="0">
+                <a:solidFill>
+                  <a:srgbClr val="FFFFFF"/>
+                </a:solidFill>
+                <a:latin typeface="Calibri" pitchFamily="34" charset="0"/>
+                <a:ea typeface="Calibri" pitchFamily="34" charset="-122"/>
+                <a:cs typeface="Calibri" pitchFamily="34" charset="-120"/>
+              </a:rPr>
+              <a:t>📖  Today</a:t>
+            </a:r>
+            <a:endParaRPr lang="en-US" sz="2200" dirty="0"/>
+          </a:p>
+        </p:txBody>
+      </p:sp>
+      <p:sp>
+        <p:nvSpPr>
+          <p:cNvPr id="4" name="Text 2"/>
+          <p:cNvSpPr/>
+          <p:nvPr/>
+        </p:nvSpPr>
+        <p:spPr>
+          <a:xfrm>
+            <a:off x="365760" y="777240"/>
+            <a:ext cx="8229600" cy="237744"/>
+          </a:xfrm>
+          <a:prstGeom prst="rect">
+            <a:avLst/>
+          </a:prstGeom>
+          <a:noFill/>
+          <a:ln/>
+        </p:spPr>
+        <p:txBody>
+          <a:bodyPr wrap="square" lIns="0" tIns="0" rIns="0" bIns="0" rtlCol="0" anchor="ctr"/>
+          <a:lstStyle/>
+          <a:p>
+            <a:pPr indent="0" marL="0">
+              <a:buNone/>
+            </a:pPr>
+            <a:r>
+              <a:rPr lang="en-US" sz="1100" b="1" spc="100" kern="0" dirty="0">
+                <a:solidFill>
+                  <a:srgbClr val="8B6FC0"/>
+                </a:solidFill>
+                <a:latin typeface="Calibri" pitchFamily="34" charset="0"/>
+                <a:ea typeface="Calibri" pitchFamily="34" charset="-122"/>
+                <a:cs typeface="Calibri" pitchFamily="34" charset="-120"/>
+              </a:rPr>
+              <a:t>READING</a:t>
+            </a:r>
+            <a:endParaRPr lang="en-US" sz="1100" dirty="0"/>
+          </a:p>
+        </p:txBody>
+      </p:sp>
+      <p:sp>
+        <p:nvSpPr>
           <p:cNvPr id="5" name="Text 3"/>
           <p:cNvSpPr/>
           <p:nvPr/>
         </p:nvSpPr>
         <p:spPr>
           <a:xfrm>
-            <a:off x="6492240" y="173736"/>
-            <a:ext cx="2286000" cy="502920"/>
-          </a:xfrm>
-          <a:prstGeom prst="rect">
-            <a:avLst/>
-          </a:prstGeom>
-          <a:noFill/>
-          <a:ln/>
-        </p:spPr>
-        <p:txBody>
-          <a:bodyPr wrap="square" lIns="0" tIns="0" rIns="0" bIns="0" rtlCol="0" anchor="ctr"/>
-          <a:lstStyle/>
-          <a:p>
-            <a:pPr algn="ctr" indent="0" marL="0">
-              <a:buNone/>
-            </a:pPr>
-            <a:r>
-              <a:rPr lang="en-US" sz="1100" b="1" dirty="0">
+            <a:off x="365760" y="1014984"/>
+            <a:ext cx="8412480" cy="365760"/>
+          </a:xfrm>
+          <a:prstGeom prst="rect">
+            <a:avLst/>
+          </a:prstGeom>
+          <a:noFill/>
+          <a:ln/>
+        </p:spPr>
+        <p:txBody>
+          <a:bodyPr wrap="square" lIns="0" tIns="0" rIns="0" bIns="0" rtlCol="0" anchor="ctr"/>
+          <a:lstStyle/>
+          <a:p>
+            <a:pPr indent="0" marL="0">
+              <a:buNone/>
+            </a:pPr>
+            <a:r>
+              <a:rPr lang="en-US" sz="2000" b="1" dirty="0">
                 <a:solidFill>
                   <a:srgbClr val="0E1C42"/>
                 </a:solidFill>
@@ -5845,7 +6115,46 @@
                 <a:ea typeface="Calibri" pitchFamily="34" charset="-122"/>
                 <a:cs typeface="Calibri" pitchFamily="34" charset="-120"/>
               </a:rPr>
-              <a:t>CHAT PROMPT</a:t>
+              <a:t>Chapter 1</a:t>
+            </a:r>
+            <a:endParaRPr lang="en-US" sz="2000" dirty="0"/>
+          </a:p>
+        </p:txBody>
+      </p:sp>
+      <p:sp>
+        <p:nvSpPr>
+          <p:cNvPr id="6" name="Text 4"/>
+          <p:cNvSpPr/>
+          <p:nvPr/>
+        </p:nvSpPr>
+        <p:spPr>
+          <a:xfrm>
+            <a:off x="365760" y="1508760"/>
+            <a:ext cx="8229600" cy="237744"/>
+          </a:xfrm>
+          <a:prstGeom prst="rect">
+            <a:avLst/>
+          </a:prstGeom>
+          <a:noFill/>
+          <a:ln/>
+        </p:spPr>
+        <p:txBody>
+          <a:bodyPr wrap="square" lIns="0" tIns="0" rIns="0" bIns="0" rtlCol="0" anchor="ctr"/>
+          <a:lstStyle/>
+          <a:p>
+            <a:pPr indent="0" marL="0">
+              <a:buNone/>
+            </a:pPr>
+            <a:r>
+              <a:rPr lang="en-US" sz="1100" b="1" spc="100" kern="0" dirty="0">
+                <a:solidFill>
+                  <a:srgbClr val="C7922C"/>
+                </a:solidFill>
+                <a:latin typeface="Calibri" pitchFamily="34" charset="0"/>
+                <a:ea typeface="Calibri" pitchFamily="34" charset="-122"/>
+                <a:cs typeface="Calibri" pitchFamily="34" charset="-120"/>
+              </a:rPr>
+              <a:t>BIG QUESTION</a:t>
             </a:r>
             <a:endParaRPr lang="en-US" sz="1100" dirty="0"/>
           </a:p>
@@ -5853,63 +6162,24 @@
       </p:sp>
       <p:sp>
         <p:nvSpPr>
-          <p:cNvPr id="6" name="Text 4"/>
-          <p:cNvSpPr/>
-          <p:nvPr/>
-        </p:nvSpPr>
-        <p:spPr>
-          <a:xfrm>
-            <a:off x="457200" y="914400"/>
-            <a:ext cx="8046720" cy="292608"/>
-          </a:xfrm>
-          <a:prstGeom prst="rect">
-            <a:avLst/>
-          </a:prstGeom>
-          <a:noFill/>
-          <a:ln/>
-        </p:spPr>
-        <p:txBody>
-          <a:bodyPr wrap="square" lIns="0" tIns="0" rIns="0" bIns="0" rtlCol="0" anchor="ctr"/>
-          <a:lstStyle/>
-          <a:p>
-            <a:pPr indent="0" marL="0">
-              <a:buNone/>
-            </a:pPr>
-            <a:r>
-              <a:rPr lang="en-US" sz="1100" b="1" spc="200" kern="0" dirty="0">
-                <a:solidFill>
-                  <a:srgbClr val="C7922C"/>
-                </a:solidFill>
-                <a:latin typeface="Calibri" pitchFamily="34" charset="0"/>
-                <a:ea typeface="Calibri" pitchFamily="34" charset="-122"/>
-                <a:cs typeface="Calibri" pitchFamily="34" charset="-120"/>
-              </a:rPr>
-              <a:t>BIG QUESTION</a:t>
-            </a:r>
-            <a:endParaRPr lang="en-US" sz="1100" dirty="0"/>
-          </a:p>
-        </p:txBody>
-      </p:sp>
-      <p:sp>
-        <p:nvSpPr>
           <p:cNvPr id="7" name="Shape 5"/>
           <p:cNvSpPr/>
           <p:nvPr/>
         </p:nvSpPr>
         <p:spPr>
           <a:xfrm>
-            <a:off x="457200" y="1234440"/>
-            <a:ext cx="8229600" cy="640080"/>
+            <a:off x="365760" y="1746504"/>
+            <a:ext cx="8412480" cy="731520"/>
           </a:xfrm>
           <a:prstGeom prst="roundRect">
             <a:avLst>
-              <a:gd name="adj" fmla="val 14286"/>
+              <a:gd name="adj" fmla="val 12500"/>
             </a:avLst>
           </a:prstGeom>
           <a:solidFill>
             <a:srgbClr val="FEF6E8"/>
           </a:solidFill>
-          <a:ln w="12700">
+          <a:ln w="19050">
             <a:solidFill>
               <a:srgbClr val="C7922C"/>
             </a:solidFill>
@@ -5932,24 +6202,24 @@
         </p:nvSpPr>
         <p:spPr>
           <a:xfrm>
-            <a:off x="640080" y="1344168"/>
-            <a:ext cx="7863840" cy="411480"/>
-          </a:xfrm>
-          <a:prstGeom prst="rect">
-            <a:avLst/>
-          </a:prstGeom>
-          <a:noFill/>
-          <a:ln/>
-        </p:spPr>
-        <p:txBody>
-          <a:bodyPr wrap="square" lIns="0" tIns="0" rIns="0" bIns="0" rtlCol="0" anchor="ctr"/>
-          <a:lstStyle/>
-          <a:p>
-            <a:pPr indent="0" marL="0">
-              <a:buNone/>
-            </a:pPr>
-            <a:r>
-              <a:rPr lang="en-US" sz="1800" i="1" dirty="0">
+            <a:off x="594360" y="1874520"/>
+            <a:ext cx="7955280" cy="475488"/>
+          </a:xfrm>
+          <a:prstGeom prst="rect">
+            <a:avLst/>
+          </a:prstGeom>
+          <a:noFill/>
+          <a:ln/>
+        </p:spPr>
+        <p:txBody>
+          <a:bodyPr wrap="square" lIns="0" tIns="0" rIns="0" bIns="0" rtlCol="0" anchor="ctr"/>
+          <a:lstStyle/>
+          <a:p>
+            <a:pPr indent="0" marL="0">
+              <a:buNone/>
+            </a:pPr>
+            <a:r>
+              <a:rPr lang="en-US" sz="1700" dirty="0">
                 <a:solidFill>
                   <a:srgbClr val="1E293B"/>
                 </a:solidFill>
@@ -5959,7 +6229,7 @@
               </a:rPr>
               <a:t>Dr. Dan says he’ll keep an eye on Stanley. How do you think Stanley feels about being flat?</a:t>
             </a:r>
-            <a:endParaRPr lang="en-US" sz="1800" dirty="0"/>
+            <a:endParaRPr lang="en-US" sz="1700" dirty="0"/>
           </a:p>
         </p:txBody>
       </p:sp>
@@ -5971,26 +6241,26 @@
         </p:nvSpPr>
         <p:spPr>
           <a:xfrm>
-            <a:off x="457200" y="1965960"/>
-            <a:ext cx="8046720" cy="292608"/>
-          </a:xfrm>
-          <a:prstGeom prst="rect">
-            <a:avLst/>
-          </a:prstGeom>
-          <a:noFill/>
-          <a:ln/>
-        </p:spPr>
-        <p:txBody>
-          <a:bodyPr wrap="square" lIns="0" tIns="0" rIns="0" bIns="0" rtlCol="0" anchor="ctr"/>
-          <a:lstStyle/>
-          <a:p>
-            <a:pPr indent="0" marL="0">
-              <a:buNone/>
-            </a:pPr>
-            <a:r>
-              <a:rPr lang="en-US" sz="1100" b="1" spc="200" kern="0" dirty="0">
-                <a:solidFill>
-                  <a:srgbClr val="8B6FC0"/>
+            <a:off x="365760" y="2606040"/>
+            <a:ext cx="8229600" cy="237744"/>
+          </a:xfrm>
+          <a:prstGeom prst="rect">
+            <a:avLst/>
+          </a:prstGeom>
+          <a:noFill/>
+          <a:ln/>
+        </p:spPr>
+        <p:txBody>
+          <a:bodyPr wrap="square" lIns="0" tIns="0" rIns="0" bIns="0" rtlCol="0" anchor="ctr"/>
+          <a:lstStyle/>
+          <a:p>
+            <a:pPr indent="0" marL="0">
+              <a:buNone/>
+            </a:pPr>
+            <a:r>
+              <a:rPr lang="en-US" sz="1100" b="1" spc="100" kern="0" dirty="0">
+                <a:solidFill>
+                  <a:srgbClr val="55C8E8"/>
                 </a:solidFill>
                 <a:latin typeface="Calibri" pitchFamily="34" charset="0"/>
                 <a:ea typeface="Calibri" pitchFamily="34" charset="-122"/>
@@ -6010,8 +6280,8 @@
         </p:nvSpPr>
         <p:spPr>
           <a:xfrm>
-            <a:off x="640080" y="2286000"/>
-            <a:ext cx="7863840" cy="731520"/>
+            <a:off x="365760" y="2843784"/>
+            <a:ext cx="8412480" cy="914400"/>
           </a:xfrm>
           <a:prstGeom prst="rect">
             <a:avLst/>
@@ -6035,7 +6305,7 @@
                 <a:ea typeface="Calibri" pitchFamily="34" charset="-122"/>
                 <a:cs typeface="Calibri" pitchFamily="34" charset="-120"/>
               </a:rPr>
-              <a:t>Good readers preview a book before reading. They look at the cover, chapter titles, and pictures to make predictions.</a:t>
+              <a:t>Good readers preview a text and ask questions before they read. Today, practice this skill with Chapter 1:</a:t>
             </a:r>
             <a:endParaRPr lang="en-US" sz="1500" dirty="0"/>
           </a:p>
@@ -6052,6 +6322,749 @@
 <file path=ppt/slides/slide7.xml><?xml version="1.0" encoding="utf-8"?>
 <p:sld xmlns:a="http://schemas.openxmlformats.org/drawingml/2006/main" xmlns:r="http://schemas.openxmlformats.org/officeDocument/2006/relationships" xmlns:p="http://schemas.openxmlformats.org/presentationml/2006/main">
   <p:cSld name="Slide 7">
+    <p:bg>
+      <p:bgPr>
+        <a:solidFill>
+          <a:srgbClr val="F8FAFC"/>
+        </a:solidFill>
+      </p:bgPr>
+    </p:bg>
+    <p:spTree>
+      <p:nvGrpSpPr>
+        <p:cNvPr id="1" name=""/>
+        <p:cNvGrpSpPr/>
+        <p:nvPr/>
+      </p:nvGrpSpPr>
+      <p:grpSpPr>
+        <a:xfrm>
+          <a:off x="0" y="0"/>
+          <a:ext cx="0" cy="0"/>
+          <a:chOff x="0" y="0"/>
+          <a:chExt cx="0" cy="0"/>
+        </a:xfrm>
+      </p:grpSpPr>
+      <p:sp>
+        <p:nvSpPr>
+          <p:cNvPr id="2" name="Shape 0"/>
+          <p:cNvSpPr/>
+          <p:nvPr/>
+        </p:nvSpPr>
+        <p:spPr>
+          <a:xfrm>
+            <a:off x="0" y="0"/>
+            <a:ext cx="9144000" cy="566928"/>
+          </a:xfrm>
+          <a:prstGeom prst="rect">
+            <a:avLst/>
+          </a:prstGeom>
+          <a:solidFill>
+            <a:srgbClr val="55C8E8"/>
+          </a:solidFill>
+          <a:ln/>
+        </p:spPr>
+      </p:sp>
+      <p:sp>
+        <p:nvSpPr>
+          <p:cNvPr id="3" name="Text 1"/>
+          <p:cNvSpPr/>
+          <p:nvPr/>
+        </p:nvSpPr>
+        <p:spPr>
+          <a:xfrm>
+            <a:off x="365760" y="54864"/>
+            <a:ext cx="8412480" cy="457200"/>
+          </a:xfrm>
+          <a:prstGeom prst="rect">
+            <a:avLst/>
+          </a:prstGeom>
+          <a:noFill/>
+          <a:ln/>
+        </p:spPr>
+        <p:txBody>
+          <a:bodyPr wrap="square" lIns="0" tIns="0" rIns="0" bIns="0" rtlCol="0" anchor="ctr"/>
+          <a:lstStyle/>
+          <a:p>
+            <a:pPr indent="0" marL="0">
+              <a:buNone/>
+            </a:pPr>
+            <a:r>
+              <a:rPr lang="en-US" sz="2200" b="1" dirty="0">
+                <a:solidFill>
+                  <a:srgbClr val="FFFFFF"/>
+                </a:solidFill>
+                <a:latin typeface="Calibri" pitchFamily="34" charset="0"/>
+                <a:ea typeface="Calibri" pitchFamily="34" charset="-122"/>
+                <a:cs typeface="Calibri" pitchFamily="34" charset="-120"/>
+              </a:rPr>
+              <a:t>✏️  Daily Oral Language</a:t>
+            </a:r>
+            <a:endParaRPr lang="en-US" sz="2200" dirty="0"/>
+          </a:p>
+        </p:txBody>
+      </p:sp>
+      <p:sp>
+        <p:nvSpPr>
+          <p:cNvPr id="4" name="Text 2"/>
+          <p:cNvSpPr/>
+          <p:nvPr/>
+        </p:nvSpPr>
+        <p:spPr>
+          <a:xfrm>
+            <a:off x="365760" y="749808"/>
+            <a:ext cx="8229600" cy="237744"/>
+          </a:xfrm>
+          <a:prstGeom prst="rect">
+            <a:avLst/>
+          </a:prstGeom>
+          <a:noFill/>
+          <a:ln/>
+        </p:spPr>
+        <p:txBody>
+          <a:bodyPr wrap="square" lIns="0" tIns="0" rIns="0" bIns="0" rtlCol="0" anchor="ctr"/>
+          <a:lstStyle/>
+          <a:p>
+            <a:pPr indent="0" marL="0">
+              <a:buNone/>
+            </a:pPr>
+            <a:r>
+              <a:rPr lang="en-US" sz="1100" b="1" spc="100" kern="0" dirty="0">
+                <a:solidFill>
+                  <a:srgbClr val="55C8E8"/>
+                </a:solidFill>
+                <a:latin typeface="Calibri" pitchFamily="34" charset="0"/>
+                <a:ea typeface="Calibri" pitchFamily="34" charset="-122"/>
+                <a:cs typeface="Calibri" pitchFamily="34" charset="-120"/>
+              </a:rPr>
+              <a:t>FIX THESE SENTENCES</a:t>
+            </a:r>
+            <a:endParaRPr lang="en-US" sz="1100" dirty="0"/>
+          </a:p>
+        </p:txBody>
+      </p:sp>
+      <p:sp>
+        <p:nvSpPr>
+          <p:cNvPr id="5" name="Shape 3"/>
+          <p:cNvSpPr/>
+          <p:nvPr/>
+        </p:nvSpPr>
+        <p:spPr>
+          <a:xfrm>
+            <a:off x="365760" y="1024128"/>
+            <a:ext cx="8412480" cy="777240"/>
+          </a:xfrm>
+          <a:prstGeom prst="roundRect">
+            <a:avLst>
+              <a:gd name="adj" fmla="val 11765"/>
+            </a:avLst>
+          </a:prstGeom>
+          <a:solidFill>
+            <a:srgbClr val="FFFFFF"/>
+          </a:solidFill>
+          <a:ln w="19050">
+            <a:solidFill>
+              <a:srgbClr val="55C8E8"/>
+            </a:solidFill>
+            <a:prstDash val="solid"/>
+          </a:ln>
+          <a:effectLst>
+            <a:outerShdw sx="100000" sy="100000" kx="0" ky="0" algn="bl" rotWithShape="0" blurRad="101600" dist="38100" dir="2700000">
+              <a:srgbClr val="000000">
+                <a:alpha val="12000"/>
+              </a:srgbClr>
+            </a:outerShdw>
+          </a:effectLst>
+        </p:spPr>
+      </p:sp>
+      <p:sp>
+        <p:nvSpPr>
+          <p:cNvPr id="6" name="Text 4"/>
+          <p:cNvSpPr/>
+          <p:nvPr/>
+        </p:nvSpPr>
+        <p:spPr>
+          <a:xfrm>
+            <a:off x="594360" y="1152144"/>
+            <a:ext cx="7955280" cy="521208"/>
+          </a:xfrm>
+          <a:prstGeom prst="rect">
+            <a:avLst/>
+          </a:prstGeom>
+          <a:noFill/>
+          <a:ln/>
+        </p:spPr>
+        <p:txBody>
+          <a:bodyPr wrap="square" lIns="0" tIns="0" rIns="0" bIns="0" rtlCol="0" anchor="ctr"/>
+          <a:lstStyle/>
+          <a:p>
+            <a:pPr indent="0" marL="0">
+              <a:buNone/>
+            </a:pPr>
+            <a:r>
+              <a:rPr lang="en-US" sz="1700" dirty="0">
+                <a:solidFill>
+                  <a:srgbClr val="1E293B"/>
+                </a:solidFill>
+                <a:latin typeface="Calibri" pitchFamily="34" charset="0"/>
+                <a:ea typeface="Calibri" pitchFamily="34" charset="-122"/>
+                <a:cs typeface="Calibri" pitchFamily="34" charset="-120"/>
+              </a:rPr>
+              <a:t>“Heavens!” said Mrs. Lambchop. She hurried to lift the board from Stanley.</a:t>
+            </a:r>
+            <a:endParaRPr lang="en-US" sz="1700" dirty="0"/>
+          </a:p>
+        </p:txBody>
+      </p:sp>
+      <p:sp>
+        <p:nvSpPr>
+          <p:cNvPr id="7" name="Shape 5"/>
+          <p:cNvSpPr/>
+          <p:nvPr/>
+        </p:nvSpPr>
+        <p:spPr>
+          <a:xfrm>
+            <a:off x="365760" y="1874520"/>
+            <a:ext cx="8412480" cy="777240"/>
+          </a:xfrm>
+          <a:prstGeom prst="roundRect">
+            <a:avLst>
+              <a:gd name="adj" fmla="val 11765"/>
+            </a:avLst>
+          </a:prstGeom>
+          <a:solidFill>
+            <a:srgbClr val="FFFFFF"/>
+          </a:solidFill>
+          <a:ln w="19050">
+            <a:solidFill>
+              <a:srgbClr val="55C8E8"/>
+            </a:solidFill>
+            <a:prstDash val="solid"/>
+          </a:ln>
+          <a:effectLst>
+            <a:outerShdw sx="100000" sy="100000" kx="0" ky="0" algn="bl" rotWithShape="0" blurRad="101600" dist="38100" dir="2700000">
+              <a:srgbClr val="000000">
+                <a:alpha val="12000"/>
+              </a:srgbClr>
+            </a:outerShdw>
+          </a:effectLst>
+        </p:spPr>
+      </p:sp>
+      <p:sp>
+        <p:nvSpPr>
+          <p:cNvPr id="8" name="Text 6"/>
+          <p:cNvSpPr/>
+          <p:nvPr/>
+        </p:nvSpPr>
+        <p:spPr>
+          <a:xfrm>
+            <a:off x="594360" y="2002536"/>
+            <a:ext cx="7955280" cy="521208"/>
+          </a:xfrm>
+          <a:prstGeom prst="rect">
+            <a:avLst/>
+          </a:prstGeom>
+          <a:noFill/>
+          <a:ln/>
+        </p:spPr>
+        <p:txBody>
+          <a:bodyPr wrap="square" lIns="0" tIns="0" rIns="0" bIns="0" rtlCol="0" anchor="ctr"/>
+          <a:lstStyle/>
+          <a:p>
+            <a:pPr indent="0" marL="0">
+              <a:buNone/>
+            </a:pPr>
+            <a:r>
+              <a:rPr lang="en-US" sz="1700" dirty="0">
+                <a:solidFill>
+                  <a:srgbClr val="1E293B"/>
+                </a:solidFill>
+                <a:latin typeface="Calibri" pitchFamily="34" charset="0"/>
+                <a:ea typeface="Calibri" pitchFamily="34" charset="-122"/>
+                <a:cs typeface="Calibri" pitchFamily="34" charset="-120"/>
+              </a:rPr>
+              <a:t>gosh said arthur when he saw his brother flat as a pancake under the big board</a:t>
+            </a:r>
+            <a:endParaRPr lang="en-US" sz="1700" dirty="0"/>
+          </a:p>
+        </p:txBody>
+      </p:sp>
+      <p:sp>
+        <p:nvSpPr>
+          <p:cNvPr id="9" name="Text 7"/>
+          <p:cNvSpPr/>
+          <p:nvPr/>
+        </p:nvSpPr>
+        <p:spPr>
+          <a:xfrm>
+            <a:off x="365760" y="2788920"/>
+            <a:ext cx="8412480" cy="365760"/>
+          </a:xfrm>
+          <a:prstGeom prst="rect">
+            <a:avLst/>
+          </a:prstGeom>
+          <a:noFill/>
+          <a:ln/>
+        </p:spPr>
+        <p:txBody>
+          <a:bodyPr wrap="square" lIns="0" tIns="0" rIns="0" bIns="0" rtlCol="0" anchor="ctr"/>
+          <a:lstStyle/>
+          <a:p>
+            <a:pPr indent="0" marL="0">
+              <a:buNone/>
+            </a:pPr>
+            <a:r>
+              <a:rPr lang="en-US" sz="1600" b="1" dirty="0">
+                <a:solidFill>
+                  <a:srgbClr val="0E1C42"/>
+                </a:solidFill>
+                <a:latin typeface="Calibri" pitchFamily="34" charset="0"/>
+                <a:ea typeface="Calibri" pitchFamily="34" charset="-122"/>
+                <a:cs typeface="Calibri" pitchFamily="34" charset="-120"/>
+              </a:rPr>
+              <a:t>Rewrite both sentences correctly in your notebook.</a:t>
+            </a:r>
+            <a:endParaRPr lang="en-US" sz="1600" dirty="0"/>
+          </a:p>
+        </p:txBody>
+      </p:sp>
+    </p:spTree>
+  </p:cSld>
+  <p:clrMapOvr>
+    <a:masterClrMapping/>
+  </p:clrMapOvr>
+</p:sld>
+</file>
+
+<file path=ppt/slides/slide8.xml><?xml version="1.0" encoding="utf-8"?>
+<p:sld xmlns:a="http://schemas.openxmlformats.org/drawingml/2006/main" xmlns:r="http://schemas.openxmlformats.org/officeDocument/2006/relationships" xmlns:p="http://schemas.openxmlformats.org/presentationml/2006/main">
+  <p:cSld name="Slide 8">
+    <p:bg>
+      <p:bgPr>
+        <a:solidFill>
+          <a:srgbClr val="F8FAFC"/>
+        </a:solidFill>
+      </p:bgPr>
+    </p:bg>
+    <p:spTree>
+      <p:nvGrpSpPr>
+        <p:cNvPr id="1" name=""/>
+        <p:cNvGrpSpPr/>
+        <p:nvPr/>
+      </p:nvGrpSpPr>
+      <p:grpSpPr>
+        <a:xfrm>
+          <a:off x="0" y="0"/>
+          <a:ext cx="0" cy="0"/>
+          <a:chOff x="0" y="0"/>
+          <a:chExt cx="0" cy="0"/>
+        </a:xfrm>
+      </p:grpSpPr>
+      <p:sp>
+        <p:nvSpPr>
+          <p:cNvPr id="2" name="Shape 0"/>
+          <p:cNvSpPr/>
+          <p:nvPr/>
+        </p:nvSpPr>
+        <p:spPr>
+          <a:xfrm>
+            <a:off x="0" y="0"/>
+            <a:ext cx="9144000" cy="566928"/>
+          </a:xfrm>
+          <a:prstGeom prst="rect">
+            <a:avLst/>
+          </a:prstGeom>
+          <a:solidFill>
+            <a:srgbClr val="55C8E8"/>
+          </a:solidFill>
+          <a:ln/>
+        </p:spPr>
+      </p:sp>
+      <p:sp>
+        <p:nvSpPr>
+          <p:cNvPr id="3" name="Text 1"/>
+          <p:cNvSpPr/>
+          <p:nvPr/>
+        </p:nvSpPr>
+        <p:spPr>
+          <a:xfrm>
+            <a:off x="365760" y="54864"/>
+            <a:ext cx="8412480" cy="457200"/>
+          </a:xfrm>
+          <a:prstGeom prst="rect">
+            <a:avLst/>
+          </a:prstGeom>
+          <a:noFill/>
+          <a:ln/>
+        </p:spPr>
+        <p:txBody>
+          <a:bodyPr wrap="square" lIns="0" tIns="0" rIns="0" bIns="0" rtlCol="0" anchor="ctr"/>
+          <a:lstStyle/>
+          <a:p>
+            <a:pPr indent="0" marL="0">
+              <a:buNone/>
+            </a:pPr>
+            <a:r>
+              <a:rPr lang="en-US" sz="2200" b="1" dirty="0">
+                <a:solidFill>
+                  <a:srgbClr val="FFFFFF"/>
+                </a:solidFill>
+                <a:latin typeface="Calibri" pitchFamily="34" charset="0"/>
+                <a:ea typeface="Calibri" pitchFamily="34" charset="-122"/>
+                <a:cs typeface="Calibri" pitchFamily="34" charset="-120"/>
+              </a:rPr>
+              <a:t>✏️  Daily Oral Language</a:t>
+            </a:r>
+            <a:endParaRPr lang="en-US" sz="2200" dirty="0"/>
+          </a:p>
+        </p:txBody>
+      </p:sp>
+      <p:sp>
+        <p:nvSpPr>
+          <p:cNvPr id="4" name="Text 2"/>
+          <p:cNvSpPr/>
+          <p:nvPr/>
+        </p:nvSpPr>
+        <p:spPr>
+          <a:xfrm>
+            <a:off x="365760" y="749808"/>
+            <a:ext cx="8229600" cy="237744"/>
+          </a:xfrm>
+          <a:prstGeom prst="rect">
+            <a:avLst/>
+          </a:prstGeom>
+          <a:noFill/>
+          <a:ln/>
+        </p:spPr>
+        <p:txBody>
+          <a:bodyPr wrap="square" lIns="0" tIns="0" rIns="0" bIns="0" rtlCol="0" anchor="ctr"/>
+          <a:lstStyle/>
+          <a:p>
+            <a:pPr indent="0" marL="0">
+              <a:buNone/>
+            </a:pPr>
+            <a:r>
+              <a:rPr lang="en-US" sz="1100" b="1" spc="100" kern="0" dirty="0">
+                <a:solidFill>
+                  <a:srgbClr val="55C8E8"/>
+                </a:solidFill>
+                <a:latin typeface="Calibri" pitchFamily="34" charset="0"/>
+                <a:ea typeface="Calibri" pitchFamily="34" charset="-122"/>
+                <a:cs typeface="Calibri" pitchFamily="34" charset="-120"/>
+              </a:rPr>
+              <a:t>FIX THESE SENTENCES</a:t>
+            </a:r>
+            <a:endParaRPr lang="en-US" sz="1100" dirty="0"/>
+          </a:p>
+        </p:txBody>
+      </p:sp>
+      <p:sp>
+        <p:nvSpPr>
+          <p:cNvPr id="5" name="Shape 3"/>
+          <p:cNvSpPr/>
+          <p:nvPr/>
+        </p:nvSpPr>
+        <p:spPr>
+          <a:xfrm>
+            <a:off x="365760" y="1024128"/>
+            <a:ext cx="8412480" cy="777240"/>
+          </a:xfrm>
+          <a:prstGeom prst="roundRect">
+            <a:avLst>
+              <a:gd name="adj" fmla="val 11765"/>
+            </a:avLst>
+          </a:prstGeom>
+          <a:solidFill>
+            <a:srgbClr val="FFFFFF"/>
+          </a:solidFill>
+          <a:ln w="19050">
+            <a:solidFill>
+              <a:srgbClr val="55C8E8"/>
+            </a:solidFill>
+            <a:prstDash val="solid"/>
+          </a:ln>
+          <a:effectLst>
+            <a:outerShdw sx="100000" sy="100000" kx="0" ky="0" algn="bl" rotWithShape="0" blurRad="101600" dist="38100" dir="2700000">
+              <a:srgbClr val="000000">
+                <a:alpha val="12000"/>
+              </a:srgbClr>
+            </a:outerShdw>
+          </a:effectLst>
+        </p:spPr>
+      </p:sp>
+      <p:sp>
+        <p:nvSpPr>
+          <p:cNvPr id="6" name="Text 4"/>
+          <p:cNvSpPr/>
+          <p:nvPr/>
+        </p:nvSpPr>
+        <p:spPr>
+          <a:xfrm>
+            <a:off x="594360" y="1152144"/>
+            <a:ext cx="7955280" cy="521208"/>
+          </a:xfrm>
+          <a:prstGeom prst="rect">
+            <a:avLst/>
+          </a:prstGeom>
+          <a:noFill/>
+          <a:ln/>
+        </p:spPr>
+        <p:txBody>
+          <a:bodyPr wrap="square" lIns="0" tIns="0" rIns="0" bIns="0" rtlCol="0" anchor="ctr"/>
+          <a:lstStyle/>
+          <a:p>
+            <a:pPr indent="0" marL="0">
+              <a:buNone/>
+            </a:pPr>
+            <a:r>
+              <a:rPr lang="en-US" sz="1700" dirty="0">
+                <a:solidFill>
+                  <a:srgbClr val="1E293B"/>
+                </a:solidFill>
+                <a:latin typeface="Calibri" pitchFamily="34" charset="0"/>
+                <a:ea typeface="Calibri" pitchFamily="34" charset="-122"/>
+                <a:cs typeface="Calibri" pitchFamily="34" charset="-120"/>
+              </a:rPr>
+              <a:t>“Heavens!” said Mrs. Lambchop. She hurried to lift the board from Stanley.</a:t>
+            </a:r>
+            <a:endParaRPr lang="en-US" sz="1700" dirty="0"/>
+          </a:p>
+        </p:txBody>
+      </p:sp>
+      <p:sp>
+        <p:nvSpPr>
+          <p:cNvPr id="7" name="Shape 5"/>
+          <p:cNvSpPr/>
+          <p:nvPr/>
+        </p:nvSpPr>
+        <p:spPr>
+          <a:xfrm>
+            <a:off x="365760" y="1874520"/>
+            <a:ext cx="8412480" cy="777240"/>
+          </a:xfrm>
+          <a:prstGeom prst="roundRect">
+            <a:avLst>
+              <a:gd name="adj" fmla="val 11765"/>
+            </a:avLst>
+          </a:prstGeom>
+          <a:solidFill>
+            <a:srgbClr val="FFFFFF"/>
+          </a:solidFill>
+          <a:ln w="19050">
+            <a:solidFill>
+              <a:srgbClr val="55C8E8"/>
+            </a:solidFill>
+            <a:prstDash val="solid"/>
+          </a:ln>
+          <a:effectLst>
+            <a:outerShdw sx="100000" sy="100000" kx="0" ky="0" algn="bl" rotWithShape="0" blurRad="101600" dist="38100" dir="2700000">
+              <a:srgbClr val="000000">
+                <a:alpha val="12000"/>
+              </a:srgbClr>
+            </a:outerShdw>
+          </a:effectLst>
+        </p:spPr>
+      </p:sp>
+      <p:sp>
+        <p:nvSpPr>
+          <p:cNvPr id="8" name="Text 6"/>
+          <p:cNvSpPr/>
+          <p:nvPr/>
+        </p:nvSpPr>
+        <p:spPr>
+          <a:xfrm>
+            <a:off x="594360" y="2002536"/>
+            <a:ext cx="7955280" cy="521208"/>
+          </a:xfrm>
+          <a:prstGeom prst="rect">
+            <a:avLst/>
+          </a:prstGeom>
+          <a:noFill/>
+          <a:ln/>
+        </p:spPr>
+        <p:txBody>
+          <a:bodyPr wrap="square" lIns="0" tIns="0" rIns="0" bIns="0" rtlCol="0" anchor="ctr"/>
+          <a:lstStyle/>
+          <a:p>
+            <a:pPr indent="0" marL="0">
+              <a:buNone/>
+            </a:pPr>
+            <a:r>
+              <a:rPr lang="en-US" sz="1700" dirty="0">
+                <a:solidFill>
+                  <a:srgbClr val="1E293B"/>
+                </a:solidFill>
+                <a:latin typeface="Calibri" pitchFamily="34" charset="0"/>
+                <a:ea typeface="Calibri" pitchFamily="34" charset="-122"/>
+                <a:cs typeface="Calibri" pitchFamily="34" charset="-120"/>
+              </a:rPr>
+              <a:t>gosh said arthur when he saw his brother flat as a pancake under the big board</a:t>
+            </a:r>
+            <a:endParaRPr lang="en-US" sz="1700" dirty="0"/>
+          </a:p>
+        </p:txBody>
+      </p:sp>
+      <p:sp>
+        <p:nvSpPr>
+          <p:cNvPr id="9" name="Shape 7"/>
+          <p:cNvSpPr/>
+          <p:nvPr/>
+        </p:nvSpPr>
+        <p:spPr>
+          <a:xfrm>
+            <a:off x="365760" y="2743200"/>
+            <a:ext cx="8412480" cy="1417320"/>
+          </a:xfrm>
+          <a:prstGeom prst="roundRect">
+            <a:avLst>
+              <a:gd name="adj" fmla="val 6452"/>
+            </a:avLst>
+          </a:prstGeom>
+          <a:solidFill>
+            <a:srgbClr val="E8F8EF"/>
+          </a:solidFill>
+          <a:ln/>
+          <a:effectLst>
+            <a:outerShdw sx="100000" sy="100000" kx="0" ky="0" algn="bl" rotWithShape="0" blurRad="101600" dist="38100" dir="2700000">
+              <a:srgbClr val="000000">
+                <a:alpha val="12000"/>
+              </a:srgbClr>
+            </a:outerShdw>
+          </a:effectLst>
+        </p:spPr>
+      </p:sp>
+      <p:sp>
+        <p:nvSpPr>
+          <p:cNvPr id="10" name="Text 8"/>
+          <p:cNvSpPr/>
+          <p:nvPr/>
+        </p:nvSpPr>
+        <p:spPr>
+          <a:xfrm>
+            <a:off x="566928" y="2816352"/>
+            <a:ext cx="8229600" cy="237744"/>
+          </a:xfrm>
+          <a:prstGeom prst="rect">
+            <a:avLst/>
+          </a:prstGeom>
+          <a:noFill/>
+          <a:ln/>
+        </p:spPr>
+        <p:txBody>
+          <a:bodyPr wrap="square" lIns="0" tIns="0" rIns="0" bIns="0" rtlCol="0" anchor="ctr"/>
+          <a:lstStyle/>
+          <a:p>
+            <a:pPr indent="0" marL="0">
+              <a:buNone/>
+            </a:pPr>
+            <a:r>
+              <a:rPr lang="en-US" sz="1100" b="1" spc="100" kern="0" dirty="0">
+                <a:solidFill>
+                  <a:srgbClr val="34B76F"/>
+                </a:solidFill>
+                <a:latin typeface="Calibri" pitchFamily="34" charset="0"/>
+                <a:ea typeface="Calibri" pitchFamily="34" charset="-122"/>
+                <a:cs typeface="Calibri" pitchFamily="34" charset="-120"/>
+              </a:rPr>
+              <a:t>✅  CORRECTED</a:t>
+            </a:r>
+            <a:endParaRPr lang="en-US" sz="1100" dirty="0"/>
+          </a:p>
+        </p:txBody>
+      </p:sp>
+      <p:sp>
+        <p:nvSpPr>
+          <p:cNvPr id="11" name="Text 9"/>
+          <p:cNvSpPr/>
+          <p:nvPr/>
+        </p:nvSpPr>
+        <p:spPr>
+          <a:xfrm>
+            <a:off x="566928" y="3072384"/>
+            <a:ext cx="8010144" cy="685800"/>
+          </a:xfrm>
+          <a:prstGeom prst="rect">
+            <a:avLst/>
+          </a:prstGeom>
+          <a:noFill/>
+          <a:ln/>
+        </p:spPr>
+        <p:txBody>
+          <a:bodyPr wrap="square" lIns="0" tIns="0" rIns="0" bIns="0" rtlCol="0" anchor="ctr"/>
+          <a:lstStyle/>
+          <a:p>
+            <a:pPr indent="0" marL="0">
+              <a:buNone/>
+            </a:pPr>
+            <a:r>
+              <a:rPr lang="en-US" sz="1400" i="1" dirty="0">
+                <a:solidFill>
+                  <a:srgbClr val="1E293B"/>
+                </a:solidFill>
+                <a:latin typeface="Calibri" pitchFamily="34" charset="0"/>
+                <a:ea typeface="Calibri" pitchFamily="34" charset="-122"/>
+                <a:cs typeface="Calibri" pitchFamily="34" charset="-120"/>
+              </a:rPr>
+              <a:t>Corrected:</a:t>
+            </a:r>
+            <a:endParaRPr lang="en-US" sz="1400" dirty="0"/>
+          </a:p>
+          <a:p>
+            <a:pPr indent="0" marL="0">
+              <a:buNone/>
+            </a:pPr>
+            <a:endParaRPr lang="en-US" sz="1400" dirty="0"/>
+          </a:p>
+        </p:txBody>
+      </p:sp>
+      <p:sp>
+        <p:nvSpPr>
+          <p:cNvPr id="12" name="Text 10"/>
+          <p:cNvSpPr/>
+          <p:nvPr/>
+        </p:nvSpPr>
+        <p:spPr>
+          <a:xfrm>
+            <a:off x="566928" y="3767328"/>
+            <a:ext cx="8010144" cy="320040"/>
+          </a:xfrm>
+          <a:prstGeom prst="rect">
+            <a:avLst/>
+          </a:prstGeom>
+          <a:noFill/>
+          <a:ln/>
+        </p:spPr>
+        <p:txBody>
+          <a:bodyPr wrap="square" lIns="0" tIns="0" rIns="0" bIns="0" rtlCol="0" anchor="ctr"/>
+          <a:lstStyle/>
+          <a:p>
+            <a:pPr indent="0" marL="0">
+              <a:buNone/>
+            </a:pPr>
+            <a:r>
+              <a:rPr lang="en-US" sz="1200" dirty="0">
+                <a:solidFill>
+                  <a:srgbClr val="64748B"/>
+                </a:solidFill>
+                <a:latin typeface="Calibri" pitchFamily="34" charset="0"/>
+                <a:ea typeface="Calibri" pitchFamily="34" charset="-122"/>
+                <a:cs typeface="Calibri" pitchFamily="34" charset="-120"/>
+              </a:rPr>
+              <a:t>“Gosh!” said Arthur when he saw his brother flat as a pancake under the big board .</a:t>
+            </a:r>
+            <a:endParaRPr lang="en-US" sz="1200" dirty="0"/>
+          </a:p>
+        </p:txBody>
+      </p:sp>
+    </p:spTree>
+  </p:cSld>
+  <p:clrMapOvr>
+    <a:masterClrMapping/>
+  </p:clrMapOvr>
+</p:sld>
+</file>
+
+<file path=ppt/slides/slide9.xml><?xml version="1.0" encoding="utf-8"?>
+<p:sld xmlns:a="http://schemas.openxmlformats.org/drawingml/2006/main" xmlns:r="http://schemas.openxmlformats.org/officeDocument/2006/relationships" xmlns:p="http://schemas.openxmlformats.org/presentationml/2006/main">
+  <p:cSld name="Slide 9">
     <p:bg>
       <p:bgPr>
         <a:solidFill>
@@ -6075,91 +7088,122 @@
       </p:grpSpPr>
       <p:sp>
         <p:nvSpPr>
-          <p:cNvPr id="2" name="Text 0"/>
-          <p:cNvSpPr/>
-          <p:nvPr/>
-        </p:nvSpPr>
-        <p:spPr>
-          <a:xfrm>
-            <a:off x="365760" y="164592"/>
-            <a:ext cx="8412480" cy="566928"/>
-          </a:xfrm>
-          <a:prstGeom prst="rect">
-            <a:avLst/>
-          </a:prstGeom>
-          <a:noFill/>
-          <a:ln/>
-        </p:spPr>
-        <p:txBody>
-          <a:bodyPr wrap="square" lIns="0" tIns="0" rIns="0" bIns="0" rtlCol="0" anchor="ctr"/>
-          <a:lstStyle/>
-          <a:p>
-            <a:pPr algn="l" indent="0" marL="0">
-              <a:buNone/>
-            </a:pPr>
-            <a:r>
-              <a:rPr lang="en-US" sz="2800" b="1" dirty="0">
-                <a:solidFill>
-                  <a:srgbClr val="0E1C42"/>
-                </a:solidFill>
-                <a:latin typeface="Calibri" pitchFamily="34" charset="0"/>
-                <a:ea typeface="Calibri" pitchFamily="34" charset="-122"/>
-                <a:cs typeface="Calibri" pitchFamily="34" charset="-120"/>
-              </a:rPr>
-              <a:t>✅ Model Sentence — Study What's Right</a:t>
-            </a:r>
-            <a:endParaRPr lang="en-US" sz="2800" dirty="0"/>
-          </a:p>
-        </p:txBody>
-      </p:sp>
-      <p:sp>
-        <p:nvSpPr>
-          <p:cNvPr id="3" name="Shape 1"/>
-          <p:cNvSpPr/>
-          <p:nvPr/>
-        </p:nvSpPr>
-        <p:spPr>
-          <a:xfrm>
-            <a:off x="365760" y="749808"/>
-            <a:ext cx="8412480" cy="0"/>
-          </a:xfrm>
-          <a:prstGeom prst="line">
-            <a:avLst/>
-          </a:prstGeom>
-          <a:noFill/>
-          <a:ln w="19050">
-            <a:solidFill>
-              <a:srgbClr val="34B76F"/>
-            </a:solidFill>
-            <a:prstDash val="solid"/>
-          </a:ln>
-        </p:spPr>
-      </p:sp>
-      <p:sp>
-        <p:nvSpPr>
-          <p:cNvPr id="4" name="Shape 2"/>
-          <p:cNvSpPr/>
-          <p:nvPr/>
-        </p:nvSpPr>
-        <p:spPr>
-          <a:xfrm>
-            <a:off x="457200" y="1097280"/>
-            <a:ext cx="8229600" cy="914400"/>
+          <p:cNvPr id="2" name="Shape 0"/>
+          <p:cNvSpPr/>
+          <p:nvPr/>
+        </p:nvSpPr>
+        <p:spPr>
+          <a:xfrm>
+            <a:off x="0" y="0"/>
+            <a:ext cx="9144000" cy="566928"/>
+          </a:xfrm>
+          <a:prstGeom prst="rect">
+            <a:avLst/>
+          </a:prstGeom>
+          <a:solidFill>
+            <a:srgbClr val="55C8E8"/>
+          </a:solidFill>
+          <a:ln/>
+        </p:spPr>
+      </p:sp>
+      <p:sp>
+        <p:nvSpPr>
+          <p:cNvPr id="3" name="Text 1"/>
+          <p:cNvSpPr/>
+          <p:nvPr/>
+        </p:nvSpPr>
+        <p:spPr>
+          <a:xfrm>
+            <a:off x="365760" y="54864"/>
+            <a:ext cx="8412480" cy="457200"/>
+          </a:xfrm>
+          <a:prstGeom prst="rect">
+            <a:avLst/>
+          </a:prstGeom>
+          <a:noFill/>
+          <a:ln/>
+        </p:spPr>
+        <p:txBody>
+          <a:bodyPr wrap="square" lIns="0" tIns="0" rIns="0" bIns="0" rtlCol="0" anchor="ctr"/>
+          <a:lstStyle/>
+          <a:p>
+            <a:pPr indent="0" marL="0">
+              <a:buNone/>
+            </a:pPr>
+            <a:r>
+              <a:rPr lang="en-US" sz="2200" b="1" dirty="0">
+                <a:solidFill>
+                  <a:srgbClr val="FFFFFF"/>
+                </a:solidFill>
+                <a:latin typeface="Calibri" pitchFamily="34" charset="0"/>
+                <a:ea typeface="Calibri" pitchFamily="34" charset="-122"/>
+                <a:cs typeface="Calibri" pitchFamily="34" charset="-120"/>
+              </a:rPr>
+              <a:t>🌱  Morphology</a:t>
+            </a:r>
+            <a:endParaRPr lang="en-US" sz="2200" dirty="0"/>
+          </a:p>
+        </p:txBody>
+      </p:sp>
+      <p:sp>
+        <p:nvSpPr>
+          <p:cNvPr id="4" name="Text 2"/>
+          <p:cNvSpPr/>
+          <p:nvPr/>
+        </p:nvSpPr>
+        <p:spPr>
+          <a:xfrm>
+            <a:off x="365760" y="804672"/>
+            <a:ext cx="8229600" cy="237744"/>
+          </a:xfrm>
+          <a:prstGeom prst="rect">
+            <a:avLst/>
+          </a:prstGeom>
+          <a:noFill/>
+          <a:ln/>
+        </p:spPr>
+        <p:txBody>
+          <a:bodyPr wrap="square" lIns="0" tIns="0" rIns="0" bIns="0" rtlCol="0" anchor="ctr"/>
+          <a:lstStyle/>
+          <a:p>
+            <a:pPr indent="0" marL="0">
+              <a:buNone/>
+            </a:pPr>
+            <a:r>
+              <a:rPr lang="en-US" sz="1100" b="1" spc="100" kern="0" dirty="0">
+                <a:solidFill>
+                  <a:srgbClr val="8B6FC0"/>
+                </a:solidFill>
+                <a:latin typeface="Calibri" pitchFamily="34" charset="0"/>
+                <a:ea typeface="Calibri" pitchFamily="34" charset="-122"/>
+                <a:cs typeface="Calibri" pitchFamily="34" charset="-120"/>
+              </a:rPr>
+              <a:t>WHAT IS A BASE WORD?</a:t>
+            </a:r>
+            <a:endParaRPr lang="en-US" sz="1100" dirty="0"/>
+          </a:p>
+        </p:txBody>
+      </p:sp>
+      <p:sp>
+        <p:nvSpPr>
+          <p:cNvPr id="5" name="Shape 3"/>
+          <p:cNvSpPr/>
+          <p:nvPr/>
+        </p:nvSpPr>
+        <p:spPr>
+          <a:xfrm>
+            <a:off x="365760" y="1097280"/>
+            <a:ext cx="8412480" cy="621792"/>
           </a:xfrm>
           <a:prstGeom prst="roundRect">
             <a:avLst>
-              <a:gd name="adj" fmla="val 10000"/>
+              <a:gd name="adj" fmla="val 14706"/>
             </a:avLst>
           </a:prstGeom>
           <a:solidFill>
-            <a:srgbClr val="E8F8EF"/>
+            <a:srgbClr val="F0E8FF"/>
           </a:solidFill>
-          <a:ln w="12700">
-            <a:solidFill>
-              <a:srgbClr val="34B76F"/>
-            </a:solidFill>
-            <a:prstDash val="solid"/>
-          </a:ln>
+          <a:ln/>
           <a:effectLst>
             <a:outerShdw sx="100000" sy="100000" kx="0" ky="0" algn="bl" rotWithShape="0" blurRad="101600" dist="38100" dir="2700000">
               <a:srgbClr val="000000">
@@ -6171,30 +7215,30 @@
       </p:sp>
       <p:sp>
         <p:nvSpPr>
-          <p:cNvPr id="5" name="Text 3"/>
-          <p:cNvSpPr/>
-          <p:nvPr/>
-        </p:nvSpPr>
-        <p:spPr>
-          <a:xfrm>
-            <a:off x="640080" y="1207008"/>
-            <a:ext cx="7863840" cy="685800"/>
-          </a:xfrm>
-          <a:prstGeom prst="rect">
-            <a:avLst/>
-          </a:prstGeom>
-          <a:noFill/>
-          <a:ln/>
-        </p:spPr>
-        <p:txBody>
-          <a:bodyPr wrap="square" lIns="0" tIns="0" rIns="0" bIns="0" rtlCol="0" anchor="ctr"/>
-          <a:lstStyle/>
-          <a:p>
-            <a:pPr indent="0" marL="0">
-              <a:buNone/>
-            </a:pPr>
-            <a:r>
-              <a:rPr lang="en-US" sz="1800" i="1" dirty="0">
+          <p:cNvPr id="6" name="Text 4"/>
+          <p:cNvSpPr/>
+          <p:nvPr/>
+        </p:nvSpPr>
+        <p:spPr>
+          <a:xfrm>
+            <a:off x="594360" y="1216152"/>
+            <a:ext cx="7863840" cy="384048"/>
+          </a:xfrm>
+          <a:prstGeom prst="rect">
+            <a:avLst/>
+          </a:prstGeom>
+          <a:noFill/>
+          <a:ln/>
+        </p:spPr>
+        <p:txBody>
+          <a:bodyPr wrap="square" lIns="0" tIns="0" rIns="0" bIns="0" rtlCol="0" anchor="ctr"/>
+          <a:lstStyle/>
+          <a:p>
+            <a:pPr indent="0" marL="0">
+              <a:buNone/>
+            </a:pPr>
+            <a:r>
+              <a:rPr lang="en-US" sz="1500" dirty="0">
                 <a:solidFill>
                   <a:srgbClr val="1E293B"/>
                 </a:solidFill>
@@ -6202,192 +7246,32 @@
                 <a:ea typeface="Calibri" pitchFamily="34" charset="-122"/>
                 <a:cs typeface="Calibri" pitchFamily="34" charset="-120"/>
               </a:rPr>
-              <a:t>“Heavens!” said Mrs. Lambchop. She hurried to lift the board from Stanley.</a:t>
-            </a:r>
-            <a:endParaRPr lang="en-US" sz="1800" dirty="0"/>
-          </a:p>
-        </p:txBody>
-      </p:sp>
-    </p:spTree>
-  </p:cSld>
-  <p:clrMapOvr>
-    <a:masterClrMapping/>
-  </p:clrMapOvr>
-</p:sld>
-</file>
-
-<file path=ppt/slides/slide8.xml><?xml version="1.0" encoding="utf-8"?>
-<p:sld xmlns:a="http://schemas.openxmlformats.org/drawingml/2006/main" xmlns:r="http://schemas.openxmlformats.org/officeDocument/2006/relationships" xmlns:p="http://schemas.openxmlformats.org/presentationml/2006/main">
-  <p:cSld name="Slide 8">
-    <p:bg>
-      <p:bgPr>
-        <a:solidFill>
-          <a:srgbClr val="E5F7FC"/>
-        </a:solidFill>
-      </p:bgPr>
-    </p:bg>
-    <p:spTree>
-      <p:nvGrpSpPr>
-        <p:cNvPr id="1" name=""/>
-        <p:cNvGrpSpPr/>
-        <p:nvPr/>
-      </p:nvGrpSpPr>
-      <p:grpSpPr>
-        <a:xfrm>
-          <a:off x="0" y="0"/>
-          <a:ext cx="0" cy="0"/>
-          <a:chOff x="0" y="0"/>
-          <a:chExt cx="0" cy="0"/>
-        </a:xfrm>
-      </p:grpSpPr>
-      <p:sp>
-        <p:nvSpPr>
-          <p:cNvPr id="2" name="Text 0"/>
-          <p:cNvSpPr/>
-          <p:nvPr/>
-        </p:nvSpPr>
-        <p:spPr>
-          <a:xfrm>
-            <a:off x="365760" y="164592"/>
-            <a:ext cx="5943600" cy="566928"/>
-          </a:xfrm>
-          <a:prstGeom prst="rect">
-            <a:avLst/>
-          </a:prstGeom>
-          <a:noFill/>
-          <a:ln/>
-        </p:spPr>
-        <p:txBody>
-          <a:bodyPr wrap="square" lIns="0" tIns="0" rIns="0" bIns="0" rtlCol="0" anchor="ctr"/>
-          <a:lstStyle/>
-          <a:p>
-            <a:pPr algn="l" indent="0" marL="0">
-              <a:buNone/>
-            </a:pPr>
-            <a:r>
-              <a:rPr lang="en-US" sz="2800" b="1" dirty="0">
-                <a:solidFill>
-                  <a:srgbClr val="0E1C42"/>
-                </a:solidFill>
-                <a:latin typeface="Calibri" pitchFamily="34" charset="0"/>
-                <a:ea typeface="Calibri" pitchFamily="34" charset="-122"/>
-                <a:cs typeface="Calibri" pitchFamily="34" charset="-120"/>
-              </a:rPr>
-              <a:t>🔧 Fix-It Sentence — Now You Try</a:t>
-            </a:r>
-            <a:endParaRPr lang="en-US" sz="2800" dirty="0"/>
-          </a:p>
-        </p:txBody>
-      </p:sp>
-      <p:sp>
-        <p:nvSpPr>
-          <p:cNvPr id="3" name="Shape 1"/>
-          <p:cNvSpPr/>
-          <p:nvPr/>
-        </p:nvSpPr>
-        <p:spPr>
-          <a:xfrm>
-            <a:off x="365760" y="749808"/>
-            <a:ext cx="8412480" cy="0"/>
-          </a:xfrm>
-          <a:prstGeom prst="line">
-            <a:avLst/>
-          </a:prstGeom>
-          <a:noFill/>
-          <a:ln w="19050">
-            <a:solidFill>
-              <a:srgbClr val="55C8E8"/>
-            </a:solidFill>
-            <a:prstDash val="solid"/>
-          </a:ln>
-        </p:spPr>
-      </p:sp>
-      <p:sp>
-        <p:nvSpPr>
-          <p:cNvPr id="4" name="Shape 2"/>
-          <p:cNvSpPr/>
-          <p:nvPr/>
-        </p:nvSpPr>
-        <p:spPr>
-          <a:xfrm>
-            <a:off x="6492240" y="173736"/>
-            <a:ext cx="2286000" cy="502920"/>
+              <a:t>🌱  helpful — base word = help</a:t>
+            </a:r>
+            <a:endParaRPr lang="en-US" sz="1500" dirty="0"/>
+          </a:p>
+        </p:txBody>
+      </p:sp>
+      <p:sp>
+        <p:nvSpPr>
+          <p:cNvPr id="7" name="Shape 5"/>
+          <p:cNvSpPr/>
+          <p:nvPr/>
+        </p:nvSpPr>
+        <p:spPr>
+          <a:xfrm>
+            <a:off x="365760" y="1792224"/>
+            <a:ext cx="8412480" cy="621792"/>
           </a:xfrm>
           <a:prstGeom prst="roundRect">
             <a:avLst>
-              <a:gd name="adj" fmla="val 21818"/>
+              <a:gd name="adj" fmla="val 14706"/>
             </a:avLst>
           </a:prstGeom>
           <a:solidFill>
-            <a:srgbClr val="55C8E8"/>
+            <a:srgbClr val="F8F4FF"/>
           </a:solidFill>
           <a:ln/>
-        </p:spPr>
-      </p:sp>
-      <p:sp>
-        <p:nvSpPr>
-          <p:cNvPr id="5" name="Text 3"/>
-          <p:cNvSpPr/>
-          <p:nvPr/>
-        </p:nvSpPr>
-        <p:spPr>
-          <a:xfrm>
-            <a:off x="6492240" y="173736"/>
-            <a:ext cx="2286000" cy="502920"/>
-          </a:xfrm>
-          <a:prstGeom prst="rect">
-            <a:avLst/>
-          </a:prstGeom>
-          <a:noFill/>
-          <a:ln/>
-        </p:spPr>
-        <p:txBody>
-          <a:bodyPr wrap="square" lIns="0" tIns="0" rIns="0" bIns="0" rtlCol="0" anchor="ctr"/>
-          <a:lstStyle/>
-          <a:p>
-            <a:pPr algn="ctr" indent="0" marL="0">
-              <a:buNone/>
-            </a:pPr>
-            <a:r>
-              <a:rPr lang="en-US" sz="1100" b="1" dirty="0">
-                <a:solidFill>
-                  <a:srgbClr val="0E1C42"/>
-                </a:solidFill>
-                <a:latin typeface="Calibri" pitchFamily="34" charset="0"/>
-                <a:ea typeface="Calibri" pitchFamily="34" charset="-122"/>
-                <a:cs typeface="Calibri" pitchFamily="34" charset="-120"/>
-              </a:rPr>
-              <a:t>CHAT PROMPT</a:t>
-            </a:r>
-            <a:endParaRPr lang="en-US" sz="1100" dirty="0"/>
-          </a:p>
-        </p:txBody>
-      </p:sp>
-      <p:sp>
-        <p:nvSpPr>
-          <p:cNvPr id="6" name="Shape 4"/>
-          <p:cNvSpPr/>
-          <p:nvPr/>
-        </p:nvSpPr>
-        <p:spPr>
-          <a:xfrm>
-            <a:off x="457200" y="1005840"/>
-            <a:ext cx="8229600" cy="640080"/>
-          </a:xfrm>
-          <a:prstGeom prst="roundRect">
-            <a:avLst>
-              <a:gd name="adj" fmla="val 14286"/>
-            </a:avLst>
-          </a:prstGeom>
-          <a:solidFill>
-            <a:srgbClr val="F8FAFC"/>
-          </a:solidFill>
-          <a:ln w="12700">
-            <a:solidFill>
-              <a:srgbClr val="C7922C"/>
-            </a:solidFill>
-            <a:prstDash val="solid"/>
-          </a:ln>
           <a:effectLst>
             <a:outerShdw sx="100000" sy="100000" kx="0" ky="0" algn="bl" rotWithShape="0" blurRad="101600" dist="38100" dir="2700000">
               <a:srgbClr val="000000">
@@ -6399,30 +7283,30 @@
       </p:sp>
       <p:sp>
         <p:nvSpPr>
-          <p:cNvPr id="7" name="Text 5"/>
-          <p:cNvSpPr/>
-          <p:nvPr/>
-        </p:nvSpPr>
-        <p:spPr>
-          <a:xfrm>
-            <a:off x="640080" y="1115568"/>
-            <a:ext cx="7863840" cy="411480"/>
-          </a:xfrm>
-          <a:prstGeom prst="rect">
-            <a:avLst/>
-          </a:prstGeom>
-          <a:noFill/>
-          <a:ln/>
-        </p:spPr>
-        <p:txBody>
-          <a:bodyPr wrap="square" lIns="0" tIns="0" rIns="0" bIns="0" rtlCol="0" anchor="ctr"/>
-          <a:lstStyle/>
-          <a:p>
-            <a:pPr indent="0" marL="0">
-              <a:buNone/>
-            </a:pPr>
-            <a:r>
-              <a:rPr lang="en-US" sz="1800" i="1" dirty="0">
+          <p:cNvPr id="8" name="Text 6"/>
+          <p:cNvSpPr/>
+          <p:nvPr/>
+        </p:nvSpPr>
+        <p:spPr>
+          <a:xfrm>
+            <a:off x="594360" y="1911096"/>
+            <a:ext cx="7863840" cy="384048"/>
+          </a:xfrm>
+          <a:prstGeom prst="rect">
+            <a:avLst/>
+          </a:prstGeom>
+          <a:noFill/>
+          <a:ln/>
+        </p:spPr>
+        <p:txBody>
+          <a:bodyPr wrap="square" lIns="0" tIns="0" rIns="0" bIns="0" rtlCol="0" anchor="ctr"/>
+          <a:lstStyle/>
+          <a:p>
+            <a:pPr indent="0" marL="0">
+              <a:buNone/>
+            </a:pPr>
+            <a:r>
+              <a:rPr lang="en-US" sz="1500" dirty="0">
                 <a:solidFill>
                   <a:srgbClr val="1E293B"/>
                 </a:solidFill>
@@ -6430,192 +7314,32 @@
                 <a:ea typeface="Calibri" pitchFamily="34" charset="-122"/>
                 <a:cs typeface="Calibri" pitchFamily="34" charset="-120"/>
               </a:rPr>
-              <a:t>gosh said arthur when he saw his brother flat as a pancake under the big board</a:t>
-            </a:r>
-            <a:endParaRPr lang="en-US" sz="1800" dirty="0"/>
-          </a:p>
-        </p:txBody>
-      </p:sp>
-    </p:spTree>
-  </p:cSld>
-  <p:clrMapOvr>
-    <a:masterClrMapping/>
-  </p:clrMapOvr>
-</p:sld>
-</file>
-
-<file path=ppt/slides/slide9.xml><?xml version="1.0" encoding="utf-8"?>
-<p:sld xmlns:a="http://schemas.openxmlformats.org/drawingml/2006/main" xmlns:r="http://schemas.openxmlformats.org/officeDocument/2006/relationships" xmlns:p="http://schemas.openxmlformats.org/presentationml/2006/main">
-  <p:cSld name="Slide 9">
-    <p:bg>
-      <p:bgPr>
-        <a:solidFill>
-          <a:srgbClr val="E5F7FC"/>
-        </a:solidFill>
-      </p:bgPr>
-    </p:bg>
-    <p:spTree>
-      <p:nvGrpSpPr>
-        <p:cNvPr id="1" name=""/>
-        <p:cNvGrpSpPr/>
-        <p:nvPr/>
-      </p:nvGrpSpPr>
-      <p:grpSpPr>
-        <a:xfrm>
-          <a:off x="0" y="0"/>
-          <a:ext cx="0" cy="0"/>
-          <a:chOff x="0" y="0"/>
-          <a:chExt cx="0" cy="0"/>
-        </a:xfrm>
-      </p:grpSpPr>
-      <p:sp>
-        <p:nvSpPr>
-          <p:cNvPr id="2" name="Text 0"/>
-          <p:cNvSpPr/>
-          <p:nvPr/>
-        </p:nvSpPr>
-        <p:spPr>
-          <a:xfrm>
-            <a:off x="365760" y="164592"/>
-            <a:ext cx="5943600" cy="566928"/>
-          </a:xfrm>
-          <a:prstGeom prst="rect">
-            <a:avLst/>
-          </a:prstGeom>
-          <a:noFill/>
-          <a:ln/>
-        </p:spPr>
-        <p:txBody>
-          <a:bodyPr wrap="square" lIns="0" tIns="0" rIns="0" bIns="0" rtlCol="0" anchor="ctr"/>
-          <a:lstStyle/>
-          <a:p>
-            <a:pPr algn="l" indent="0" marL="0">
-              <a:buNone/>
-            </a:pPr>
-            <a:r>
-              <a:rPr lang="en-US" sz="2800" b="1" dirty="0">
-                <a:solidFill>
-                  <a:srgbClr val="0E1C42"/>
-                </a:solidFill>
-                <a:latin typeface="Calibri" pitchFamily="34" charset="0"/>
-                <a:ea typeface="Calibri" pitchFamily="34" charset="-122"/>
-                <a:cs typeface="Calibri" pitchFamily="34" charset="-120"/>
-              </a:rPr>
-              <a:t>🔧 Fix-It Sentence — Answer Revealed</a:t>
-            </a:r>
-            <a:endParaRPr lang="en-US" sz="2800" dirty="0"/>
-          </a:p>
-        </p:txBody>
-      </p:sp>
-      <p:sp>
-        <p:nvSpPr>
-          <p:cNvPr id="3" name="Shape 1"/>
-          <p:cNvSpPr/>
-          <p:nvPr/>
-        </p:nvSpPr>
-        <p:spPr>
-          <a:xfrm>
-            <a:off x="365760" y="749808"/>
-            <a:ext cx="8412480" cy="0"/>
-          </a:xfrm>
-          <a:prstGeom prst="line">
-            <a:avLst/>
-          </a:prstGeom>
-          <a:noFill/>
-          <a:ln w="19050">
-            <a:solidFill>
-              <a:srgbClr val="55C8E8"/>
-            </a:solidFill>
-            <a:prstDash val="solid"/>
-          </a:ln>
-        </p:spPr>
-      </p:sp>
-      <p:sp>
-        <p:nvSpPr>
-          <p:cNvPr id="4" name="Shape 2"/>
-          <p:cNvSpPr/>
-          <p:nvPr/>
-        </p:nvSpPr>
-        <p:spPr>
-          <a:xfrm>
-            <a:off x="6492240" y="173736"/>
-            <a:ext cx="2286000" cy="502920"/>
+              <a:t>🌱  unkind — base word = kind</a:t>
+            </a:r>
+            <a:endParaRPr lang="en-US" sz="1500" dirty="0"/>
+          </a:p>
+        </p:txBody>
+      </p:sp>
+      <p:sp>
+        <p:nvSpPr>
+          <p:cNvPr id="9" name="Shape 7"/>
+          <p:cNvSpPr/>
+          <p:nvPr/>
+        </p:nvSpPr>
+        <p:spPr>
+          <a:xfrm>
+            <a:off x="365760" y="2487168"/>
+            <a:ext cx="8412480" cy="621792"/>
           </a:xfrm>
           <a:prstGeom prst="roundRect">
             <a:avLst>
-              <a:gd name="adj" fmla="val 21818"/>
+              <a:gd name="adj" fmla="val 14706"/>
             </a:avLst>
           </a:prstGeom>
           <a:solidFill>
-            <a:srgbClr val="55C8E8"/>
+            <a:srgbClr val="F0E8FF"/>
           </a:solidFill>
           <a:ln/>
-        </p:spPr>
-      </p:sp>
-      <p:sp>
-        <p:nvSpPr>
-          <p:cNvPr id="5" name="Text 3"/>
-          <p:cNvSpPr/>
-          <p:nvPr/>
-        </p:nvSpPr>
-        <p:spPr>
-          <a:xfrm>
-            <a:off x="6492240" y="173736"/>
-            <a:ext cx="2286000" cy="502920"/>
-          </a:xfrm>
-          <a:prstGeom prst="rect">
-            <a:avLst/>
-          </a:prstGeom>
-          <a:noFill/>
-          <a:ln/>
-        </p:spPr>
-        <p:txBody>
-          <a:bodyPr wrap="square" lIns="0" tIns="0" rIns="0" bIns="0" rtlCol="0" anchor="ctr"/>
-          <a:lstStyle/>
-          <a:p>
-            <a:pPr algn="ctr" indent="0" marL="0">
-              <a:buNone/>
-            </a:pPr>
-            <a:r>
-              <a:rPr lang="en-US" sz="1100" b="1" dirty="0">
-                <a:solidFill>
-                  <a:srgbClr val="0E1C42"/>
-                </a:solidFill>
-                <a:latin typeface="Calibri" pitchFamily="34" charset="0"/>
-                <a:ea typeface="Calibri" pitchFamily="34" charset="-122"/>
-                <a:cs typeface="Calibri" pitchFamily="34" charset="-120"/>
-              </a:rPr>
-              <a:t>CHAT PROMPT</a:t>
-            </a:r>
-            <a:endParaRPr lang="en-US" sz="1100" dirty="0"/>
-          </a:p>
-        </p:txBody>
-      </p:sp>
-      <p:sp>
-        <p:nvSpPr>
-          <p:cNvPr id="6" name="Shape 4"/>
-          <p:cNvSpPr/>
-          <p:nvPr/>
-        </p:nvSpPr>
-        <p:spPr>
-          <a:xfrm>
-            <a:off x="457200" y="1005840"/>
-            <a:ext cx="8229600" cy="640080"/>
-          </a:xfrm>
-          <a:prstGeom prst="roundRect">
-            <a:avLst>
-              <a:gd name="adj" fmla="val 14286"/>
-            </a:avLst>
-          </a:prstGeom>
-          <a:solidFill>
-            <a:srgbClr val="F8FAFC"/>
-          </a:solidFill>
-          <a:ln w="12700">
-            <a:solidFill>
-              <a:srgbClr val="C7922C"/>
-            </a:solidFill>
-            <a:prstDash val="solid"/>
-          </a:ln>
           <a:effectLst>
             <a:outerShdw sx="100000" sy="100000" kx="0" ky="0" algn="bl" rotWithShape="0" blurRad="101600" dist="38100" dir="2700000">
               <a:srgbClr val="000000">
@@ -6627,30 +7351,30 @@
       </p:sp>
       <p:sp>
         <p:nvSpPr>
-          <p:cNvPr id="7" name="Text 5"/>
-          <p:cNvSpPr/>
-          <p:nvPr/>
-        </p:nvSpPr>
-        <p:spPr>
-          <a:xfrm>
-            <a:off x="640080" y="1115568"/>
-            <a:ext cx="7863840" cy="411480"/>
-          </a:xfrm>
-          <a:prstGeom prst="rect">
-            <a:avLst/>
-          </a:prstGeom>
-          <a:noFill/>
-          <a:ln/>
-        </p:spPr>
-        <p:txBody>
-          <a:bodyPr wrap="square" lIns="0" tIns="0" rIns="0" bIns="0" rtlCol="0" anchor="ctr"/>
-          <a:lstStyle/>
-          <a:p>
-            <a:pPr indent="0" marL="0">
-              <a:buNone/>
-            </a:pPr>
-            <a:r>
-              <a:rPr lang="en-US" sz="1800" i="1" dirty="0">
+          <p:cNvPr id="10" name="Text 8"/>
+          <p:cNvSpPr/>
+          <p:nvPr/>
+        </p:nvSpPr>
+        <p:spPr>
+          <a:xfrm>
+            <a:off x="594360" y="2606040"/>
+            <a:ext cx="7863840" cy="384048"/>
+          </a:xfrm>
+          <a:prstGeom prst="rect">
+            <a:avLst/>
+          </a:prstGeom>
+          <a:noFill/>
+          <a:ln/>
+        </p:spPr>
+        <p:txBody>
+          <a:bodyPr wrap="square" lIns="0" tIns="0" rIns="0" bIns="0" rtlCol="0" anchor="ctr"/>
+          <a:lstStyle/>
+          <a:p>
+            <a:pPr indent="0" marL="0">
+              <a:buNone/>
+            </a:pPr>
+            <a:r>
+              <a:rPr lang="en-US" sz="1500" dirty="0">
                 <a:solidFill>
                   <a:srgbClr val="1E293B"/>
                 </a:solidFill>
@@ -6658,87 +7382,77 @@
                 <a:ea typeface="Calibri" pitchFamily="34" charset="-122"/>
                 <a:cs typeface="Calibri" pitchFamily="34" charset="-120"/>
               </a:rPr>
-              <a:t>gosh said arthur when he saw his brother flat as a pancake under the big board</a:t>
-            </a:r>
-            <a:endParaRPr lang="en-US" sz="1800" dirty="0"/>
-          </a:p>
-        </p:txBody>
-      </p:sp>
-      <p:sp>
-        <p:nvSpPr>
-          <p:cNvPr id="8" name="Text 6"/>
-          <p:cNvSpPr/>
-          <p:nvPr/>
-        </p:nvSpPr>
-        <p:spPr>
-          <a:xfrm>
-            <a:off x="457200" y="1737360"/>
-            <a:ext cx="8046720" cy="292608"/>
-          </a:xfrm>
-          <a:prstGeom prst="rect">
-            <a:avLst/>
-          </a:prstGeom>
-          <a:noFill/>
-          <a:ln/>
-        </p:spPr>
-        <p:txBody>
-          <a:bodyPr wrap="square" lIns="0" tIns="0" rIns="0" bIns="0" rtlCol="0" anchor="ctr"/>
-          <a:lstStyle/>
-          <a:p>
-            <a:pPr indent="0" marL="0">
-              <a:buNone/>
-            </a:pPr>
-            <a:r>
-              <a:rPr lang="en-US" sz="1100" b="1" spc="200" kern="0" dirty="0">
-                <a:solidFill>
-                  <a:srgbClr val="64748B"/>
-                </a:solidFill>
-                <a:latin typeface="Calibri" pitchFamily="34" charset="0"/>
-                <a:ea typeface="Calibri" pitchFamily="34" charset="-122"/>
-                <a:cs typeface="Calibri" pitchFamily="34" charset="-120"/>
-              </a:rPr>
-              <a:t>WHY</a:t>
-            </a:r>
-            <a:endParaRPr lang="en-US" sz="1100" dirty="0"/>
-          </a:p>
-        </p:txBody>
-      </p:sp>
-      <p:sp>
-        <p:nvSpPr>
-          <p:cNvPr id="9" name="Text 7"/>
-          <p:cNvSpPr/>
-          <p:nvPr/>
-        </p:nvSpPr>
-        <p:spPr>
-          <a:xfrm>
-            <a:off x="640080" y="2011680"/>
-            <a:ext cx="7863840" cy="502920"/>
-          </a:xfrm>
-          <a:prstGeom prst="rect">
-            <a:avLst/>
-          </a:prstGeom>
-          <a:noFill/>
-          <a:ln/>
-        </p:spPr>
-        <p:txBody>
-          <a:bodyPr wrap="square" lIns="0" tIns="0" rIns="0" bIns="0" rtlCol="0" anchor="ctr"/>
-          <a:lstStyle/>
-          <a:p>
-            <a:pPr indent="0" marL="0">
-              <a:buNone/>
-            </a:pPr>
-            <a:r>
-              <a:rPr lang="en-US" sz="1300" i="1" dirty="0">
-                <a:solidFill>
-                  <a:srgbClr val="64748B"/>
-                </a:solidFill>
-                <a:latin typeface="Calibri" pitchFamily="34" charset="0"/>
-                <a:ea typeface="Calibri" pitchFamily="34" charset="-122"/>
-                <a:cs typeface="Calibri" pitchFamily="34" charset="-120"/>
-              </a:rPr>
-              <a:t>"Gosh!" said Arthur when he saw his brother flat as a pancake under the big board .</a:t>
-            </a:r>
-            <a:endParaRPr lang="en-US" sz="1300" dirty="0"/>
+              <a:t>🌱  jumping — base word = jump</a:t>
+            </a:r>
+            <a:endParaRPr lang="en-US" sz="1500" dirty="0"/>
+          </a:p>
+        </p:txBody>
+      </p:sp>
+      <p:sp>
+        <p:nvSpPr>
+          <p:cNvPr id="11" name="Shape 9"/>
+          <p:cNvSpPr/>
+          <p:nvPr/>
+        </p:nvSpPr>
+        <p:spPr>
+          <a:xfrm>
+            <a:off x="365760" y="3182112"/>
+            <a:ext cx="8412480" cy="621792"/>
+          </a:xfrm>
+          <a:prstGeom prst="roundRect">
+            <a:avLst>
+              <a:gd name="adj" fmla="val 14706"/>
+            </a:avLst>
+          </a:prstGeom>
+          <a:solidFill>
+            <a:srgbClr val="F8F4FF"/>
+          </a:solidFill>
+          <a:ln/>
+          <a:effectLst>
+            <a:outerShdw sx="100000" sy="100000" kx="0" ky="0" algn="bl" rotWithShape="0" blurRad="101600" dist="38100" dir="2700000">
+              <a:srgbClr val="000000">
+                <a:alpha val="12000"/>
+              </a:srgbClr>
+            </a:outerShdw>
+          </a:effectLst>
+        </p:spPr>
+      </p:sp>
+      <p:sp>
+        <p:nvSpPr>
+          <p:cNvPr id="12" name="Text 10"/>
+          <p:cNvSpPr/>
+          <p:nvPr/>
+        </p:nvSpPr>
+        <p:spPr>
+          <a:xfrm>
+            <a:off x="594360" y="3300984"/>
+            <a:ext cx="7863840" cy="384048"/>
+          </a:xfrm>
+          <a:prstGeom prst="rect">
+            <a:avLst/>
+          </a:prstGeom>
+          <a:noFill/>
+          <a:ln/>
+        </p:spPr>
+        <p:txBody>
+          <a:bodyPr wrap="square" lIns="0" tIns="0" rIns="0" bIns="0" rtlCol="0" anchor="ctr"/>
+          <a:lstStyle/>
+          <a:p>
+            <a:pPr indent="0" marL="0">
+              <a:buNone/>
+            </a:pPr>
+            <a:r>
+              <a:rPr lang="en-US" sz="1500" dirty="0">
+                <a:solidFill>
+                  <a:srgbClr val="1E293B"/>
+                </a:solidFill>
+                <a:latin typeface="Calibri" pitchFamily="34" charset="0"/>
+                <a:ea typeface="Calibri" pitchFamily="34" charset="-122"/>
+                <a:cs typeface="Calibri" pitchFamily="34" charset="-120"/>
+              </a:rPr>
+              <a:t>🌱  Practice: Match the Word to Its Base!</a:t>
+            </a:r>
+            <a:endParaRPr lang="en-US" sz="1500" dirty="0"/>
           </a:p>
         </p:txBody>
       </p:sp>

--- a/Planning docs/Slides/lesson-1-2-teacher-slides.pptx
+++ b/Planning docs/Slides/lesson-1-2-teacher-slides.pptx
@@ -4734,24 +4734,7 @@
                 <a:ea typeface="Calibri" pitchFamily="34" charset="-122"/>
                 <a:cs typeface="Calibri" pitchFamily="34" charset="-120"/>
               </a:rPr>
-              <a:t>•  Dr. Dan says he’ll keep an eye on Stanley. How do you think Stanley feels about being flat?</a:t>
-            </a:r>
-            <a:endParaRPr lang="en-US" sz="1500" dirty="0"/>
-          </a:p>
-          <a:p>
-            <a:pPr indent="0" marL="0">
-              <a:buNone/>
-            </a:pPr>
-            <a:r>
-              <a:rPr lang="en-US" sz="1500" dirty="0">
-                <a:solidFill>
-                  <a:srgbClr val="1E293B"/>
-                </a:solidFill>
-                <a:latin typeface="Calibri" pitchFamily="34" charset="0"/>
-                <a:ea typeface="Calibri" pitchFamily="34" charset="-122"/>
-                <a:cs typeface="Calibri" pitchFamily="34" charset="-120"/>
-              </a:rPr>
-              <a:t>•  Dr. Dan has examined Stanley and says he is fine — just flat. If you were Stanley's friend, what would you say to make him feel better? What questions would you ask him?</a:t>
+              <a:t>•  Stop when Dr. Dan finishes the examination and says he will “keep an eye on this young fellow.” Dr. Dan never explains why Stanley is flat. If you were standing in that office, what would you ask him?</a:t>
             </a:r>
             <a:endParaRPr lang="en-US" sz="1500" dirty="0"/>
           </a:p>
